--- a/static/ppts/G6_Math_T1_Place_Value.pptx
+++ b/static/ppts/G6_Math_T1_Place_Value.pptx
@@ -9,9 +9,10 @@
     <p:sldId id="257" r:id="rId3"/>
     <p:sldId id="258" r:id="rId4"/>
     <p:sldId id="259" r:id="rId5"/>
+    <p:sldId id="260" r:id="rId6"/>
   </p:sldIdLst>
   <p:notesMasterIdLst>
-    <p:notesMasterId r:id="rId6"/>
+    <p:notesMasterId r:id="rId7"/>
   </p:notesMasterIdLst>
   <p:sldSz cx="9144000" cy="5143500"/>
   <p:notesSz cx="5143500" cy="9144000"/>
@@ -811,6 +812,94 @@
 </p:notes>
 </file>
 
+<file path=ppt/notesSlides/notesSlide5.xml><?xml version="1.0" encoding="utf-8"?>
+<p:notes xmlns:a="http://schemas.openxmlformats.org/drawingml/2006/main" xmlns:r="http://schemas.openxmlformats.org/officeDocument/2006/relationships" xmlns:p="http://schemas.openxmlformats.org/presentationml/2006/main">
+  <p:cSld>
+    <p:spTree>
+      <p:nvGrpSpPr>
+        <p:cNvPr id="1" name=""/>
+        <p:cNvGrpSpPr/>
+        <p:nvPr/>
+      </p:nvGrpSpPr>
+      <p:grpSpPr>
+        <a:xfrm>
+          <a:off x="0" y="0"/>
+          <a:ext cx="0" cy="0"/>
+          <a:chOff x="0" y="0"/>
+          <a:chExt cx="0" cy="0"/>
+        </a:xfrm>
+      </p:grpSpPr>
+      <p:sp>
+        <p:nvSpPr>
+          <p:cNvPr id="2" name="Slide Image Placeholder 1"/>
+          <p:cNvSpPr>
+            <a:spLocks noGrp="1" noRot="1" noChangeAspect="1"/>
+          </p:cNvSpPr>
+          <p:nvPr>
+            <p:ph type="sldImg"/>
+          </p:nvPr>
+        </p:nvSpPr>
+        <p:spPr/>
+      </p:sp>
+      <p:sp>
+        <p:nvSpPr>
+          <p:cNvPr id="3" name="Notes Placeholder 2"/>
+          <p:cNvSpPr>
+            <a:spLocks noGrp="1"/>
+          </p:cNvSpPr>
+          <p:nvPr>
+            <p:ph type="body" idx="1"/>
+          </p:nvPr>
+        </p:nvSpPr>
+        <p:spPr/>
+        <p:txBody>
+          <a:bodyPr/>
+          <a:lstStyle/>
+          <a:p>
+            <a:r>
+              <a:rPr lang="en-US" dirty="0"/>
+              <a:t/>
+            </a:r>
+            <a:endParaRPr lang="en-US" dirty="0"/>
+          </a:p>
+        </p:txBody>
+      </p:sp>
+      <p:sp>
+        <p:nvSpPr>
+          <p:cNvPr id="4" name="Slide Number Placeholder 3"/>
+          <p:cNvSpPr>
+            <a:spLocks noGrp="1"/>
+          </p:cNvSpPr>
+          <p:nvPr>
+            <p:ph type="sldNum" sz="quarter" idx="10"/>
+          </p:nvPr>
+        </p:nvSpPr>
+        <p:spPr/>
+        <p:txBody>
+          <a:bodyPr/>
+          <a:lstStyle/>
+          <a:p>
+            <a:fld id="{F7021451-1387-4CA6-816F-3879F97B5CBC}" type="slidenum">
+              <a:rPr lang="en-US"/>
+              <a:t>5</a:t>
+            </a:fld>
+            <a:endParaRPr lang="en-US"/>
+          </a:p>
+        </p:txBody>
+      </p:sp>
+    </p:spTree>
+    <p:extLst>
+      <p:ext uri="{BB962C8B-B14F-4D97-AF65-F5344CB8AC3E}">
+        <p14:creationId xmlns:p14="http://schemas.microsoft.com/office/powerpoint/2010/main" val="1024086991"/>
+      </p:ext>
+    </p:extLst>
+  </p:cSld>
+  <p:clrMapOvr>
+    <a:masterClrMapping/>
+  </p:clrMapOvr>
+</p:notes>
+</file>
+
 <file path=ppt/slideLayouts/slideLayout1.xml><?xml version="1.0" encoding="utf-8"?>
 <p:sldLayout xmlns:a="http://schemas.openxmlformats.org/drawingml/2006/main" xmlns:r="http://schemas.openxmlformats.org/officeDocument/2006/relationships" xmlns:p="http://schemas.openxmlformats.org/presentationml/2006/main" preserve="1">
   <p:cSld name="DEFAULT">
@@ -1170,7 +1259,7 @@
         </p:nvSpPr>
         <p:spPr>
           <a:xfrm>
-            <a:off x="731520" y="1280160"/>
+            <a:off x="731520" y="1097280"/>
             <a:ext cx="7772400" cy="1371600"/>
           </a:xfrm>
           <a:prstGeom prst="rect">
@@ -1187,7 +1276,7 @@
               <a:buNone/>
             </a:pPr>
             <a:r>
-              <a:rPr lang="en-US" sz="3600" b="1" dirty="0">
+              <a:rPr lang="en-US" sz="4000" b="1" dirty="0">
                 <a:solidFill>
                   <a:srgbClr val="FFFFFF"/>
                 </a:solidFill>
@@ -1197,7 +1286,7 @@
               </a:rPr>
               <a:t>Place Value &amp; Number Systems</a:t>
             </a:r>
-            <a:endParaRPr lang="en-US" sz="3600" dirty="0"/>
+            <a:endParaRPr lang="en-US" sz="4000" dirty="0"/>
           </a:p>
         </p:txBody>
       </p:sp>
@@ -1209,7 +1298,7 @@
         </p:nvSpPr>
         <p:spPr>
           <a:xfrm>
-            <a:off x="731520" y="2743200"/>
+            <a:off x="731520" y="2560320"/>
             <a:ext cx="7772400" cy="548640"/>
           </a:xfrm>
           <a:prstGeom prst="rect">
@@ -1228,13 +1317,13 @@
             <a:r>
               <a:rPr lang="en-US" sz="1600" dirty="0">
                 <a:solidFill>
-                  <a:srgbClr val="9B9690"/>
+                  <a:srgbClr val="E9C46A"/>
                 </a:solidFill>
                 <a:latin typeface="Calibri" pitchFamily="34" charset="0"/>
                 <a:ea typeface="Calibri" pitchFamily="34" charset="-122"/>
                 <a:cs typeface="Calibri" pitchFamily="34" charset="-120"/>
               </a:rPr>
-              <a:t>G6 Maths · Number Sense</a:t>
+              <a:t>Grade 6 Mathematics · Mr Zocchi</a:t>
             </a:r>
             <a:endParaRPr lang="en-US" sz="1600" dirty="0"/>
           </a:p>
@@ -1242,14 +1331,36 @@
       </p:sp>
       <p:sp>
         <p:nvSpPr>
-          <p:cNvPr id="5" name="Text 3"/>
+          <p:cNvPr id="5" name="Shape 3"/>
           <p:cNvSpPr/>
           <p:nvPr/>
         </p:nvSpPr>
         <p:spPr>
           <a:xfrm>
-            <a:off x="731520" y="4389120"/>
-            <a:ext cx="7772400" cy="457200"/>
+            <a:off x="731520" y="3474720"/>
+            <a:ext cx="2011680" cy="411480"/>
+          </a:xfrm>
+          <a:prstGeom prst="roundRect">
+            <a:avLst>
+              <a:gd name="adj" fmla="val 17778"/>
+            </a:avLst>
+          </a:prstGeom>
+          <a:solidFill>
+            <a:srgbClr val="2A9D8F"/>
+          </a:solidFill>
+          <a:ln/>
+        </p:spPr>
+      </p:sp>
+      <p:sp>
+        <p:nvSpPr>
+          <p:cNvPr id="6" name="Text 4"/>
+          <p:cNvSpPr/>
+          <p:nvPr/>
+        </p:nvSpPr>
+        <p:spPr>
+          <a:xfrm>
+            <a:off x="731520" y="3474720"/>
+            <a:ext cx="2011680" cy="411480"/>
           </a:xfrm>
           <a:prstGeom prst="rect">
             <a:avLst/>
@@ -1261,21 +1372,21 @@
           <a:bodyPr wrap="square" rtlCol="0" anchor="ctr"/>
           <a:lstStyle/>
           <a:p>
-            <a:pPr indent="0" marL="0">
+            <a:pPr algn="ctr" indent="0" marL="0">
               <a:buNone/>
             </a:pPr>
             <a:r>
-              <a:rPr lang="en-US" sz="1000" dirty="0">
-                <a:solidFill>
-                  <a:srgbClr val="6B6660"/>
+              <a:rPr lang="en-US" sz="1200" b="1" dirty="0">
+                <a:solidFill>
+                  <a:srgbClr val="FFFFFF"/>
                 </a:solidFill>
                 <a:latin typeface="Calibri" pitchFamily="34" charset="0"/>
                 <a:ea typeface="Calibri" pitchFamily="34" charset="-122"/>
                 <a:cs typeface="Calibri" pitchFamily="34" charset="-120"/>
               </a:rPr>
-              <a:t>Mr Zocchi · mrzocchi.com</a:t>
-            </a:r>
-            <a:endParaRPr lang="en-US" sz="1000" dirty="0"/>
+              <a:t>Term 1 · Number Sense</a:t>
+            </a:r>
+            <a:endParaRPr lang="en-US" sz="1200" dirty="0"/>
           </a:p>
         </p:txBody>
       </p:sp>
@@ -1293,7 +1404,7 @@
     <p:bg>
       <p:bgPr>
         <a:solidFill>
-          <a:srgbClr val="FFFFFF"/>
+          <a:srgbClr val="FAF8F5"/>
         </a:solidFill>
       </p:bgPr>
     </p:bg>
@@ -1339,8 +1450,8 @@
         </p:nvSpPr>
         <p:spPr>
           <a:xfrm>
-            <a:off x="548640" y="274320"/>
-            <a:ext cx="8046720" cy="640080"/>
+            <a:off x="7772400" y="4709160"/>
+            <a:ext cx="1097280" cy="320040"/>
           </a:xfrm>
           <a:prstGeom prst="rect">
             <a:avLst/>
@@ -1349,14 +1460,105 @@
           <a:ln/>
         </p:spPr>
         <p:txBody>
-          <a:bodyPr wrap="square" lIns="0" tIns="0" rIns="0" bIns="0" rtlCol="0" anchor="ctr"/>
+          <a:bodyPr wrap="square" rtlCol="0" anchor="ctr"/>
+          <a:lstStyle/>
+          <a:p>
+            <a:pPr algn="r" indent="0" marL="0">
+              <a:buNone/>
+            </a:pPr>
+            <a:r>
+              <a:rPr lang="en-US" sz="900" dirty="0">
+                <a:solidFill>
+                  <a:srgbClr val="6B6660"/>
+                </a:solidFill>
+                <a:latin typeface="Calibri" pitchFamily="34" charset="0"/>
+                <a:ea typeface="Calibri" pitchFamily="34" charset="-122"/>
+                <a:cs typeface="Calibri" pitchFamily="34" charset="-120"/>
+              </a:rPr>
+              <a:t>2 / 5</a:t>
+            </a:r>
+            <a:endParaRPr lang="en-US" sz="900" dirty="0"/>
+          </a:p>
+        </p:txBody>
+      </p:sp>
+      <p:sp>
+        <p:nvSpPr>
+          <p:cNvPr id="4" name="Shape 2"/>
+          <p:cNvSpPr/>
+          <p:nvPr/>
+        </p:nvSpPr>
+        <p:spPr>
+          <a:xfrm>
+            <a:off x="1371600" y="914400"/>
+            <a:ext cx="6400800" cy="3200400"/>
+          </a:xfrm>
+          <a:prstGeom prst="rect">
+            <a:avLst/>
+          </a:prstGeom>
+          <a:solidFill>
+            <a:srgbClr val="FFFFFF"/>
+          </a:solidFill>
+          <a:ln w="12700">
+            <a:solidFill>
+              <a:srgbClr val="E5E2DC"/>
+            </a:solidFill>
+            <a:prstDash val="solid"/>
+          </a:ln>
+          <a:effectLst>
+            <a:outerShdw sx="100000" sy="100000" kx="0" ky="0" algn="bl" rotWithShape="0" blurRad="50800" dist="25400" dir="8100000">
+              <a:srgbClr val="000000">
+                <a:alpha val="10000"/>
+              </a:srgbClr>
+            </a:outerShdw>
+          </a:effectLst>
+        </p:spPr>
+      </p:sp>
+      <p:sp>
+        <p:nvSpPr>
+          <p:cNvPr id="5" name="Shape 3"/>
+          <p:cNvSpPr/>
+          <p:nvPr/>
+        </p:nvSpPr>
+        <p:spPr>
+          <a:xfrm>
+            <a:off x="1371600" y="914400"/>
+            <a:ext cx="91440" cy="3200400"/>
+          </a:xfrm>
+          <a:prstGeom prst="rect">
+            <a:avLst/>
+          </a:prstGeom>
+          <a:solidFill>
+            <a:srgbClr val="2A9D8F"/>
+          </a:solidFill>
+          <a:ln/>
+        </p:spPr>
+      </p:sp>
+      <p:sp>
+        <p:nvSpPr>
+          <p:cNvPr id="6" name="Text 4"/>
+          <p:cNvSpPr/>
+          <p:nvPr/>
+        </p:nvSpPr>
+        <p:spPr>
+          <a:xfrm>
+            <a:off x="1828800" y="1097280"/>
+            <a:ext cx="5669280" cy="640080"/>
+          </a:xfrm>
+          <a:prstGeom prst="rect">
+            <a:avLst/>
+          </a:prstGeom>
+          <a:noFill/>
+          <a:ln/>
+        </p:spPr>
+        <p:txBody>
+          <a:bodyPr wrap="square" rtlCol="0" anchor="ctr"/>
           <a:lstStyle/>
           <a:p>
             <a:pPr indent="0" marL="0">
               <a:buNone/>
             </a:pPr>
             <a:r>
-              <a:rPr lang="en-US" sz="2600" b="1" dirty="0">
+              <a:rPr lang="en-US" sz="2400" b="1" dirty="0">
                 <a:solidFill>
                   <a:srgbClr val="1B2A4A"/>
                 </a:solidFill>
@@ -1366,20 +1568,20 @@
               </a:rPr>
               <a:t>Understanding Place Value</a:t>
             </a:r>
-            <a:endParaRPr lang="en-US" sz="2600" dirty="0"/>
-          </a:p>
-        </p:txBody>
-      </p:sp>
-      <p:sp>
-        <p:nvSpPr>
-          <p:cNvPr id="4" name="Text 2"/>
+            <a:endParaRPr lang="en-US" sz="2400" dirty="0"/>
+          </a:p>
+        </p:txBody>
+      </p:sp>
+      <p:sp>
+        <p:nvSpPr>
+          <p:cNvPr id="7" name="Text 5"/>
           <p:cNvSpPr/>
           <p:nvPr/>
         </p:nvSpPr>
         <p:spPr>
           <a:xfrm>
-            <a:off x="548640" y="1097280"/>
-            <a:ext cx="8046720" cy="3474720"/>
+            <a:off x="1828800" y="1828800"/>
+            <a:ext cx="5669280" cy="2011680"/>
           </a:xfrm>
           <a:prstGeom prst="rect">
             <a:avLst/>
@@ -1391,12 +1593,11 @@
           <a:bodyPr wrap="square" rtlCol="0" anchor="t"/>
           <a:lstStyle/>
           <a:p>
-            <a:pPr marL="342900" indent="-342900">
-              <a:spcAft>
-                <a:spcPts val="800"/>
-              </a:spcAft>
-              <a:buSzPct val="100000"/>
-              <a:buChar char="•"/>
+            <a:pPr indent="0" marL="0">
+              <a:lnSpc>
+                <a:spcPct val="130000"/>
+              </a:lnSpc>
+              <a:buNone/>
             </a:pPr>
             <a:r>
               <a:rPr lang="en-US" sz="1500" dirty="0">
@@ -1407,129 +1608,9 @@
                 <a:ea typeface="Calibri" pitchFamily="34" charset="-122"/>
                 <a:cs typeface="Calibri" pitchFamily="34" charset="-120"/>
               </a:rPr>
-              <a:t>Every digit in a number has a VALUE based on its POSITION</a:t>
+              <a:t>Every digit in a number has a value determined by its position. In the number 4,527: the 4 represents 4,000 (four thousands), the 5 represents 500 (five hundreds), the 2 represents 20 (two tens), and the 7 represents 7 (seven ones). Understanding place value is the foundation of all number work.</a:t>
             </a:r>
             <a:endParaRPr lang="en-US" sz="1500" dirty="0"/>
-          </a:p>
-          <a:p>
-            <a:pPr marL="342900" indent="-342900">
-              <a:spcAft>
-                <a:spcPts val="800"/>
-              </a:spcAft>
-              <a:buSzPct val="100000"/>
-              <a:buChar char="•"/>
-            </a:pPr>
-            <a:r>
-              <a:rPr lang="en-US" sz="1500" dirty="0">
-                <a:solidFill>
-                  <a:srgbClr val="3D3A36"/>
-                </a:solidFill>
-                <a:latin typeface="Calibri" pitchFamily="34" charset="0"/>
-                <a:ea typeface="Calibri" pitchFamily="34" charset="-122"/>
-                <a:cs typeface="Calibri" pitchFamily="34" charset="-120"/>
-              </a:rPr>
-              <a:t>In 4,527: the 4 = 4,000 (thousands), 5 = 500 (hundreds), 2 = 20 (tens), 7 = 7 (ones)</a:t>
-            </a:r>
-            <a:endParaRPr lang="en-US" sz="1500" dirty="0"/>
-          </a:p>
-          <a:p>
-            <a:pPr marL="342900" indent="-342900">
-              <a:spcAft>
-                <a:spcPts val="800"/>
-              </a:spcAft>
-              <a:buSzPct val="100000"/>
-              <a:buChar char="•"/>
-            </a:pPr>
-            <a:r>
-              <a:rPr lang="en-US" sz="1500" dirty="0">
-                <a:solidFill>
-                  <a:srgbClr val="3D3A36"/>
-                </a:solidFill>
-                <a:latin typeface="Calibri" pitchFamily="34" charset="0"/>
-                <a:ea typeface="Calibri" pitchFamily="34" charset="-122"/>
-                <a:cs typeface="Calibri" pitchFamily="34" charset="-120"/>
-              </a:rPr>
-              <a:t>Place value extends to decimals: tenths, hundredths, thousandths</a:t>
-            </a:r>
-            <a:endParaRPr lang="en-US" sz="1500" dirty="0"/>
-          </a:p>
-          <a:p>
-            <a:pPr marL="342900" indent="-342900">
-              <a:spcAft>
-                <a:spcPts val="800"/>
-              </a:spcAft>
-              <a:buSzPct val="100000"/>
-              <a:buChar char="•"/>
-            </a:pPr>
-            <a:r>
-              <a:rPr lang="en-US" sz="1500" dirty="0">
-                <a:solidFill>
-                  <a:srgbClr val="3D3A36"/>
-                </a:solidFill>
-                <a:latin typeface="Calibri" pitchFamily="34" charset="0"/>
-                <a:ea typeface="Calibri" pitchFamily="34" charset="-122"/>
-                <a:cs typeface="Calibri" pitchFamily="34" charset="-120"/>
-              </a:rPr>
-              <a:t>Moving left: each place is ×10 bigger</a:t>
-            </a:r>
-            <a:endParaRPr lang="en-US" sz="1500" dirty="0"/>
-          </a:p>
-          <a:p>
-            <a:pPr marL="342900" indent="-342900">
-              <a:spcAft>
-                <a:spcPts val="800"/>
-              </a:spcAft>
-              <a:buSzPct val="100000"/>
-              <a:buChar char="•"/>
-            </a:pPr>
-            <a:r>
-              <a:rPr lang="en-US" sz="1500" dirty="0">
-                <a:solidFill>
-                  <a:srgbClr val="3D3A36"/>
-                </a:solidFill>
-                <a:latin typeface="Calibri" pitchFamily="34" charset="0"/>
-                <a:ea typeface="Calibri" pitchFamily="34" charset="-122"/>
-                <a:cs typeface="Calibri" pitchFamily="34" charset="-120"/>
-              </a:rPr>
-              <a:t>Moving right: each place is ÷10 smaller</a:t>
-            </a:r>
-            <a:endParaRPr lang="en-US" sz="1500" dirty="0"/>
-          </a:p>
-        </p:txBody>
-      </p:sp>
-      <p:sp>
-        <p:nvSpPr>
-          <p:cNvPr id="5" name="Text 3"/>
-          <p:cNvSpPr/>
-          <p:nvPr/>
-        </p:nvSpPr>
-        <p:spPr>
-          <a:xfrm>
-            <a:off x="548640" y="4800600"/>
-            <a:ext cx="3657600" cy="274320"/>
-          </a:xfrm>
-          <a:prstGeom prst="rect">
-            <a:avLst/>
-          </a:prstGeom>
-          <a:noFill/>
-          <a:ln/>
-        </p:spPr>
-        <p:txBody>
-          <a:bodyPr wrap="square" rtlCol="0" anchor="ctr"/>
-          <a:lstStyle/>
-          <a:p>
-            <a:pPr indent="0" marL="0">
-              <a:buNone/>
-            </a:pPr>
-            <a:r>
-              <a:rPr lang="en-US" sz="800" dirty="0">
-                <a:solidFill>
-                  <a:srgbClr val="9B9690"/>
-                </a:solidFill>
-              </a:rPr>
-              <a:t>mrzocchi.com</a:t>
-            </a:r>
-            <a:endParaRPr lang="en-US" sz="800" dirty="0"/>
           </a:p>
         </p:txBody>
       </p:sp>
@@ -1547,7 +1628,7 @@
     <p:bg>
       <p:bgPr>
         <a:solidFill>
-          <a:srgbClr val="FFFFFF"/>
+          <a:srgbClr val="FAF8F5"/>
         </a:solidFill>
       </p:bgPr>
     </p:bg>
@@ -1593,8 +1674,8 @@
         </p:nvSpPr>
         <p:spPr>
           <a:xfrm>
-            <a:off x="548640" y="274320"/>
-            <a:ext cx="8046720" cy="640080"/>
+            <a:off x="7772400" y="4709160"/>
+            <a:ext cx="1097280" cy="320040"/>
           </a:xfrm>
           <a:prstGeom prst="rect">
             <a:avLst/>
@@ -1603,7 +1684,46 @@
           <a:ln/>
         </p:spPr>
         <p:txBody>
-          <a:bodyPr wrap="square" lIns="0" tIns="0" rIns="0" bIns="0" rtlCol="0" anchor="ctr"/>
+          <a:bodyPr wrap="square" rtlCol="0" anchor="ctr"/>
+          <a:lstStyle/>
+          <a:p>
+            <a:pPr algn="r" indent="0" marL="0">
+              <a:buNone/>
+            </a:pPr>
+            <a:r>
+              <a:rPr lang="en-US" sz="900" dirty="0">
+                <a:solidFill>
+                  <a:srgbClr val="6B6660"/>
+                </a:solidFill>
+                <a:latin typeface="Calibri" pitchFamily="34" charset="0"/>
+                <a:ea typeface="Calibri" pitchFamily="34" charset="-122"/>
+                <a:cs typeface="Calibri" pitchFamily="34" charset="-120"/>
+              </a:rPr>
+              <a:t>3 / 5</a:t>
+            </a:r>
+            <a:endParaRPr lang="en-US" sz="900" dirty="0"/>
+          </a:p>
+        </p:txBody>
+      </p:sp>
+      <p:sp>
+        <p:nvSpPr>
+          <p:cNvPr id="4" name="Text 2"/>
+          <p:cNvSpPr/>
+          <p:nvPr/>
+        </p:nvSpPr>
+        <p:spPr>
+          <a:xfrm>
+            <a:off x="457200" y="274320"/>
+            <a:ext cx="8229600" cy="640080"/>
+          </a:xfrm>
+          <a:prstGeom prst="rect">
+            <a:avLst/>
+          </a:prstGeom>
+          <a:noFill/>
+          <a:ln/>
+        </p:spPr>
+        <p:txBody>
+          <a:bodyPr wrap="square" rtlCol="0" anchor="ctr"/>
           <a:lstStyle/>
           <a:p>
             <a:pPr indent="0" marL="0">
@@ -1618,7 +1738,7 @@
                 <a:ea typeface="Georgia" pitchFamily="34" charset="-122"/>
                 <a:cs typeface="Georgia" pitchFamily="34" charset="-120"/>
               </a:rPr>
-              <a:t>Reading &amp; Writing Large Numbers</a:t>
+              <a:t>Place Value Chart</a:t>
             </a:r>
             <a:endParaRPr lang="en-US" sz="2600" dirty="0"/>
           </a:p>
@@ -1626,14 +1746,14 @@
       </p:sp>
       <p:sp>
         <p:nvSpPr>
-          <p:cNvPr id="4" name="Text 2"/>
+          <p:cNvPr id="5" name="Text 3"/>
           <p:cNvSpPr/>
           <p:nvPr/>
         </p:nvSpPr>
         <p:spPr>
           <a:xfrm>
-            <a:off x="548640" y="1097280"/>
-            <a:ext cx="8046720" cy="3474720"/>
+            <a:off x="457200" y="1188720"/>
+            <a:ext cx="3840480" cy="3474720"/>
           </a:xfrm>
           <a:prstGeom prst="rect">
             <a:avLst/>
@@ -1647,13 +1767,13 @@
           <a:p>
             <a:pPr marL="342900" indent="-342900">
               <a:spcAft>
-                <a:spcPts val="800"/>
+                <a:spcPts val="600"/>
               </a:spcAft>
               <a:buSzPct val="100000"/>
               <a:buChar char="•"/>
             </a:pPr>
             <a:r>
-              <a:rPr lang="en-US" sz="1500" dirty="0">
+              <a:rPr lang="en-US" sz="1400" dirty="0">
                 <a:solidFill>
                   <a:srgbClr val="3D3A36"/>
                 </a:solidFill>
@@ -1661,20 +1781,20 @@
                 <a:ea typeface="Calibri" pitchFamily="34" charset="-122"/>
                 <a:cs typeface="Calibri" pitchFamily="34" charset="-120"/>
               </a:rPr>
-              <a:t>Use commas or spaces to separate groups of three digits</a:t>
-            </a:r>
-            <a:endParaRPr lang="en-US" sz="1500" dirty="0"/>
+              <a:t>Millions, Hundred-thousands, Ten-thousands, Thousands, Hundreds, Tens, Ones</a:t>
+            </a:r>
+            <a:endParaRPr lang="en-US" sz="1400" dirty="0"/>
           </a:p>
           <a:p>
             <a:pPr marL="342900" indent="-342900">
               <a:spcAft>
-                <a:spcPts val="800"/>
+                <a:spcPts val="600"/>
               </a:spcAft>
               <a:buSzPct val="100000"/>
               <a:buChar char="•"/>
             </a:pPr>
             <a:r>
-              <a:rPr lang="en-US" sz="1500" dirty="0">
+              <a:rPr lang="en-US" sz="1400" dirty="0">
                 <a:solidFill>
                   <a:srgbClr val="3D3A36"/>
                 </a:solidFill>
@@ -1682,20 +1802,20 @@
                 <a:ea typeface="Calibri" pitchFamily="34" charset="-122"/>
                 <a:cs typeface="Calibri" pitchFamily="34" charset="-120"/>
               </a:rPr>
-              <a:t>4,527,830 = four million, five hundred twenty-seven thousand, eight hundred and thirty</a:t>
-            </a:r>
-            <a:endParaRPr lang="en-US" sz="1500" dirty="0"/>
+              <a:t>Example: 3,805,214</a:t>
+            </a:r>
+            <a:endParaRPr lang="en-US" sz="1400" dirty="0"/>
           </a:p>
           <a:p>
             <a:pPr marL="342900" indent="-342900">
               <a:spcAft>
-                <a:spcPts val="800"/>
+                <a:spcPts val="600"/>
               </a:spcAft>
               <a:buSzPct val="100000"/>
               <a:buChar char="•"/>
             </a:pPr>
             <a:r>
-              <a:rPr lang="en-US" sz="1500" dirty="0">
+              <a:rPr lang="en-US" sz="1400" dirty="0">
                 <a:solidFill>
                   <a:srgbClr val="3D3A36"/>
                 </a:solidFill>
@@ -1703,20 +1823,20 @@
                 <a:ea typeface="Calibri" pitchFamily="34" charset="-122"/>
                 <a:cs typeface="Calibri" pitchFamily="34" charset="-120"/>
               </a:rPr>
-              <a:t>Partition: 4,527 = 4,000 + 500 + 20 + 7</a:t>
-            </a:r>
-            <a:endParaRPr lang="en-US" sz="1500" dirty="0"/>
+              <a:t>3 millions, 8 hundred-thousands, 0 ten-thousands, 5 thousands, 2 hundreds, 1 ten, 4 ones</a:t>
+            </a:r>
+            <a:endParaRPr lang="en-US" sz="1400" dirty="0"/>
           </a:p>
           <a:p>
             <a:pPr marL="342900" indent="-342900">
               <a:spcAft>
-                <a:spcPts val="800"/>
+                <a:spcPts val="600"/>
               </a:spcAft>
               <a:buSzPct val="100000"/>
               <a:buChar char="•"/>
             </a:pPr>
             <a:r>
-              <a:rPr lang="en-US" sz="1500" dirty="0">
+              <a:rPr lang="en-US" sz="1400" dirty="0">
                 <a:solidFill>
                   <a:srgbClr val="3D3A36"/>
                 </a:solidFill>
@@ -1724,20 +1844,20 @@
                 <a:ea typeface="Calibri" pitchFamily="34" charset="-122"/>
                 <a:cs typeface="Calibri" pitchFamily="34" charset="-120"/>
               </a:rPr>
-              <a:t>Compare by looking at the largest place value first</a:t>
-            </a:r>
-            <a:endParaRPr lang="en-US" sz="1500" dirty="0"/>
+              <a:t>Decimals extend right: tenths, hundredths, thousandths</a:t>
+            </a:r>
+            <a:endParaRPr lang="en-US" sz="1400" dirty="0"/>
           </a:p>
           <a:p>
             <a:pPr marL="342900" indent="-342900">
               <a:spcAft>
-                <a:spcPts val="800"/>
+                <a:spcPts val="600"/>
               </a:spcAft>
               <a:buSzPct val="100000"/>
               <a:buChar char="•"/>
             </a:pPr>
             <a:r>
-              <a:rPr lang="en-US" sz="1500" dirty="0">
+              <a:rPr lang="en-US" sz="1400" dirty="0">
                 <a:solidFill>
                   <a:srgbClr val="3D3A36"/>
                 </a:solidFill>
@@ -1745,22 +1865,74 @@
                 <a:ea typeface="Calibri" pitchFamily="34" charset="-122"/>
                 <a:cs typeface="Calibri" pitchFamily="34" charset="-120"/>
               </a:rPr>
-              <a:t>Ordering: arrange from smallest to largest (ascending) or largest to smallest (descending)</a:t>
-            </a:r>
-            <a:endParaRPr lang="en-US" sz="1500" dirty="0"/>
-          </a:p>
-        </p:txBody>
-      </p:sp>
-      <p:sp>
-        <p:nvSpPr>
-          <p:cNvPr id="5" name="Text 3"/>
+              <a:t>Example: 6.35 = 6 ones, 3 tenths, 5 hundredths</a:t>
+            </a:r>
+            <a:endParaRPr lang="en-US" sz="1400" dirty="0"/>
+          </a:p>
+        </p:txBody>
+      </p:sp>
+      <p:sp>
+        <p:nvSpPr>
+          <p:cNvPr id="6" name="Shape 4"/>
           <p:cNvSpPr/>
           <p:nvPr/>
         </p:nvSpPr>
         <p:spPr>
           <a:xfrm>
-            <a:off x="548640" y="4800600"/>
-            <a:ext cx="3657600" cy="274320"/>
+            <a:off x="4846320" y="1188720"/>
+            <a:ext cx="3840480" cy="3474720"/>
+          </a:xfrm>
+          <a:prstGeom prst="rect">
+            <a:avLst/>
+          </a:prstGeom>
+          <a:solidFill>
+            <a:srgbClr val="FFFFFF"/>
+          </a:solidFill>
+          <a:ln w="12700">
+            <a:solidFill>
+              <a:srgbClr val="E5E2DC"/>
+            </a:solidFill>
+            <a:prstDash val="solid"/>
+          </a:ln>
+          <a:effectLst>
+            <a:outerShdw sx="100000" sy="100000" kx="0" ky="0" algn="bl" rotWithShape="0" blurRad="50800" dist="25400" dir="8100000">
+              <a:srgbClr val="000000">
+                <a:alpha val="10000"/>
+              </a:srgbClr>
+            </a:outerShdw>
+          </a:effectLst>
+        </p:spPr>
+      </p:sp>
+      <p:sp>
+        <p:nvSpPr>
+          <p:cNvPr id="7" name="Shape 5"/>
+          <p:cNvSpPr/>
+          <p:nvPr/>
+        </p:nvSpPr>
+        <p:spPr>
+          <a:xfrm>
+            <a:off x="4846320" y="1188720"/>
+            <a:ext cx="3840480" cy="54864"/>
+          </a:xfrm>
+          <a:prstGeom prst="rect">
+            <a:avLst/>
+          </a:prstGeom>
+          <a:solidFill>
+            <a:srgbClr val="2A9D8F"/>
+          </a:solidFill>
+          <a:ln/>
+        </p:spPr>
+      </p:sp>
+      <p:sp>
+        <p:nvSpPr>
+          <p:cNvPr id="8" name="Text 6"/>
+          <p:cNvSpPr/>
+          <p:nvPr/>
+        </p:nvSpPr>
+        <p:spPr>
+          <a:xfrm>
+            <a:off x="5120640" y="1371600"/>
+            <a:ext cx="3291840" cy="3108960"/>
           </a:xfrm>
           <a:prstGeom prst="rect">
             <a:avLst/>
@@ -1769,21 +1941,136 @@
           <a:ln/>
         </p:spPr>
         <p:txBody>
-          <a:bodyPr wrap="square" rtlCol="0" anchor="ctr"/>
+          <a:bodyPr wrap="square" rtlCol="0" anchor="t"/>
           <a:lstStyle/>
           <a:p>
             <a:pPr indent="0" marL="0">
+              <a:spcAft>
+                <a:spcPts val="400"/>
+              </a:spcAft>
               <a:buNone/>
             </a:pPr>
             <a:r>
-              <a:rPr lang="en-US" sz="800" dirty="0">
-                <a:solidFill>
-                  <a:srgbClr val="9B9690"/>
-                </a:solidFill>
-              </a:rPr>
-              <a:t>mrzocchi.com</a:t>
-            </a:r>
-            <a:endParaRPr lang="en-US" sz="800" dirty="0"/>
+              <a:rPr lang="en-US" sz="1600" b="1" dirty="0">
+                <a:solidFill>
+                  <a:srgbClr val="1B2A4A"/>
+                </a:solidFill>
+                <a:latin typeface="Calibri" pitchFamily="34" charset="0"/>
+                <a:ea typeface="Calibri" pitchFamily="34" charset="-122"/>
+                <a:cs typeface="Calibri" pitchFamily="34" charset="-120"/>
+              </a:rPr>
+              <a:t>Reading Large Numbers</a:t>
+            </a:r>
+            <a:endParaRPr lang="en-US" sz="1600" dirty="0"/>
+          </a:p>
+          <a:p>
+            <a:pPr indent="0" marL="0">
+              <a:spcAft>
+                <a:spcPts val="400"/>
+              </a:spcAft>
+              <a:buNone/>
+            </a:pPr>
+            <a:endParaRPr lang="en-US" sz="1600" dirty="0"/>
+          </a:p>
+          <a:p>
+            <a:pPr indent="0" marL="0">
+              <a:spcAft>
+                <a:spcPts val="400"/>
+              </a:spcAft>
+              <a:buNone/>
+            </a:pPr>
+            <a:r>
+              <a:rPr lang="en-US" sz="1300" dirty="0">
+                <a:solidFill>
+                  <a:srgbClr val="3D3A36"/>
+                </a:solidFill>
+                <a:latin typeface="Calibri" pitchFamily="34" charset="0"/>
+                <a:ea typeface="Calibri" pitchFamily="34" charset="-122"/>
+                <a:cs typeface="Calibri" pitchFamily="34" charset="-120"/>
+              </a:rPr>
+              <a:t>Use commas to separate groups of three digits</a:t>
+            </a:r>
+            <a:endParaRPr lang="en-US" sz="1600" dirty="0"/>
+          </a:p>
+          <a:p>
+            <a:pPr indent="0" marL="0">
+              <a:spcAft>
+                <a:spcPts val="400"/>
+              </a:spcAft>
+              <a:buNone/>
+            </a:pPr>
+            <a:r>
+              <a:rPr lang="en-US" sz="1300" dirty="0">
+                <a:solidFill>
+                  <a:srgbClr val="3D3A36"/>
+                </a:solidFill>
+                <a:latin typeface="Calibri" pitchFamily="34" charset="0"/>
+                <a:ea typeface="Calibri" pitchFamily="34" charset="-122"/>
+                <a:cs typeface="Calibri" pitchFamily="34" charset="-120"/>
+              </a:rPr>
+              <a:t>4,500,000 = 'four million, five hundred thousand'</a:t>
+            </a:r>
+            <a:endParaRPr lang="en-US" sz="1600" dirty="0"/>
+          </a:p>
+          <a:p>
+            <a:pPr indent="0" marL="0">
+              <a:spcAft>
+                <a:spcPts val="400"/>
+              </a:spcAft>
+              <a:buNone/>
+            </a:pPr>
+            <a:r>
+              <a:rPr lang="en-US" sz="1300" dirty="0">
+                <a:solidFill>
+                  <a:srgbClr val="3D3A36"/>
+                </a:solidFill>
+                <a:latin typeface="Calibri" pitchFamily="34" charset="0"/>
+                <a:ea typeface="Calibri" pitchFamily="34" charset="-122"/>
+                <a:cs typeface="Calibri" pitchFamily="34" charset="-120"/>
+              </a:rPr>
+              <a:t>Read from left to right, group by group</a:t>
+            </a:r>
+            <a:endParaRPr lang="en-US" sz="1600" dirty="0"/>
+          </a:p>
+          <a:p>
+            <a:pPr indent="0" marL="0">
+              <a:spcAft>
+                <a:spcPts val="400"/>
+              </a:spcAft>
+              <a:buNone/>
+            </a:pPr>
+            <a:r>
+              <a:rPr lang="en-US" sz="1300" dirty="0">
+                <a:solidFill>
+                  <a:srgbClr val="3D3A36"/>
+                </a:solidFill>
+                <a:latin typeface="Calibri" pitchFamily="34" charset="0"/>
+                <a:ea typeface="Calibri" pitchFamily="34" charset="-122"/>
+                <a:cs typeface="Calibri" pitchFamily="34" charset="-120"/>
+              </a:rPr>
+              <a:t>Standard form: 4.5 × 10⁶ (for very large numbers)</a:t>
+            </a:r>
+            <a:endParaRPr lang="en-US" sz="1600" dirty="0"/>
+          </a:p>
+          <a:p>
+            <a:pPr indent="0" marL="0">
+              <a:spcAft>
+                <a:spcPts val="400"/>
+              </a:spcAft>
+              <a:buNone/>
+            </a:pPr>
+            <a:r>
+              <a:rPr lang="en-US" sz="1300" dirty="0">
+                <a:solidFill>
+                  <a:srgbClr val="3D3A36"/>
+                </a:solidFill>
+                <a:latin typeface="Calibri" pitchFamily="34" charset="0"/>
+                <a:ea typeface="Calibri" pitchFamily="34" charset="-122"/>
+                <a:cs typeface="Calibri" pitchFamily="34" charset="-120"/>
+              </a:rPr>
+              <a:t>Comparing: look at the leftmost digit first</a:t>
+            </a:r>
+            <a:endParaRPr lang="en-US" sz="1600" dirty="0"/>
           </a:p>
         </p:txBody>
       </p:sp>
@@ -1798,6 +2085,263 @@
 <file path=ppt/slides/slide4.xml><?xml version="1.0" encoding="utf-8"?>
 <p:sld xmlns:a="http://schemas.openxmlformats.org/drawingml/2006/main" xmlns:r="http://schemas.openxmlformats.org/officeDocument/2006/relationships" xmlns:p="http://schemas.openxmlformats.org/presentationml/2006/main">
   <p:cSld name="Slide 4">
+    <p:bg>
+      <p:bgPr>
+        <a:solidFill>
+          <a:srgbClr val="FAF8F5"/>
+        </a:solidFill>
+      </p:bgPr>
+    </p:bg>
+    <p:spTree>
+      <p:nvGrpSpPr>
+        <p:cNvPr id="1" name=""/>
+        <p:cNvGrpSpPr/>
+        <p:nvPr/>
+      </p:nvGrpSpPr>
+      <p:grpSpPr>
+        <a:xfrm>
+          <a:off x="0" y="0"/>
+          <a:ext cx="0" cy="0"/>
+          <a:chOff x="0" y="0"/>
+          <a:chExt cx="0" cy="0"/>
+        </a:xfrm>
+      </p:grpSpPr>
+      <p:sp>
+        <p:nvSpPr>
+          <p:cNvPr id="2" name="Shape 0"/>
+          <p:cNvSpPr/>
+          <p:nvPr/>
+        </p:nvSpPr>
+        <p:spPr>
+          <a:xfrm>
+            <a:off x="0" y="0"/>
+            <a:ext cx="9144000" cy="54864"/>
+          </a:xfrm>
+          <a:prstGeom prst="rect">
+            <a:avLst/>
+          </a:prstGeom>
+          <a:solidFill>
+            <a:srgbClr val="2A9D8F"/>
+          </a:solidFill>
+          <a:ln/>
+        </p:spPr>
+      </p:sp>
+      <p:sp>
+        <p:nvSpPr>
+          <p:cNvPr id="3" name="Text 1"/>
+          <p:cNvSpPr/>
+          <p:nvPr/>
+        </p:nvSpPr>
+        <p:spPr>
+          <a:xfrm>
+            <a:off x="7772400" y="4709160"/>
+            <a:ext cx="1097280" cy="320040"/>
+          </a:xfrm>
+          <a:prstGeom prst="rect">
+            <a:avLst/>
+          </a:prstGeom>
+          <a:noFill/>
+          <a:ln/>
+        </p:spPr>
+        <p:txBody>
+          <a:bodyPr wrap="square" rtlCol="0" anchor="ctr"/>
+          <a:lstStyle/>
+          <a:p>
+            <a:pPr algn="r" indent="0" marL="0">
+              <a:buNone/>
+            </a:pPr>
+            <a:r>
+              <a:rPr lang="en-US" sz="900" dirty="0">
+                <a:solidFill>
+                  <a:srgbClr val="6B6660"/>
+                </a:solidFill>
+                <a:latin typeface="Calibri" pitchFamily="34" charset="0"/>
+                <a:ea typeface="Calibri" pitchFamily="34" charset="-122"/>
+                <a:cs typeface="Calibri" pitchFamily="34" charset="-120"/>
+              </a:rPr>
+              <a:t>4 / 5</a:t>
+            </a:r>
+            <a:endParaRPr lang="en-US" sz="900" dirty="0"/>
+          </a:p>
+        </p:txBody>
+      </p:sp>
+      <p:sp>
+        <p:nvSpPr>
+          <p:cNvPr id="4" name="Text 2"/>
+          <p:cNvSpPr/>
+          <p:nvPr/>
+        </p:nvSpPr>
+        <p:spPr>
+          <a:xfrm>
+            <a:off x="457200" y="274320"/>
+            <a:ext cx="8229600" cy="640080"/>
+          </a:xfrm>
+          <a:prstGeom prst="rect">
+            <a:avLst/>
+          </a:prstGeom>
+          <a:noFill/>
+          <a:ln/>
+        </p:spPr>
+        <p:txBody>
+          <a:bodyPr wrap="square" rtlCol="0" anchor="ctr"/>
+          <a:lstStyle/>
+          <a:p>
+            <a:pPr indent="0" marL="0">
+              <a:buNone/>
+            </a:pPr>
+            <a:r>
+              <a:rPr lang="en-US" sz="2600" b="1" dirty="0">
+                <a:solidFill>
+                  <a:srgbClr val="1B2A4A"/>
+                </a:solidFill>
+                <a:latin typeface="Georgia" pitchFamily="34" charset="0"/>
+                <a:ea typeface="Georgia" pitchFamily="34" charset="-122"/>
+                <a:cs typeface="Georgia" pitchFamily="34" charset="-120"/>
+              </a:rPr>
+              <a:t>Ordering and Comparing Numbers</a:t>
+            </a:r>
+            <a:endParaRPr lang="en-US" sz="2600" dirty="0"/>
+          </a:p>
+        </p:txBody>
+      </p:sp>
+      <p:sp>
+        <p:nvSpPr>
+          <p:cNvPr id="5" name="Text 3"/>
+          <p:cNvSpPr/>
+          <p:nvPr/>
+        </p:nvSpPr>
+        <p:spPr>
+          <a:xfrm>
+            <a:off x="457200" y="1097280"/>
+            <a:ext cx="8229600" cy="3657600"/>
+          </a:xfrm>
+          <a:prstGeom prst="rect">
+            <a:avLst/>
+          </a:prstGeom>
+          <a:noFill/>
+          <a:ln/>
+        </p:spPr>
+        <p:txBody>
+          <a:bodyPr wrap="square" rtlCol="0" anchor="t"/>
+          <a:lstStyle/>
+          <a:p>
+            <a:pPr marL="342900" indent="-342900">
+              <a:spcAft>
+                <a:spcPts val="800"/>
+              </a:spcAft>
+              <a:buSzPct val="100000"/>
+              <a:buChar char="•"/>
+            </a:pPr>
+            <a:r>
+              <a:rPr lang="en-US" sz="1400" dirty="0">
+                <a:solidFill>
+                  <a:srgbClr val="3D3A36"/>
+                </a:solidFill>
+                <a:latin typeface="Calibri" pitchFamily="34" charset="0"/>
+                <a:ea typeface="Calibri" pitchFamily="34" charset="-122"/>
+                <a:cs typeface="Calibri" pitchFamily="34" charset="-120"/>
+              </a:rPr>
+              <a:t>Use &lt; (less than), &gt; (greater than), = (equal to)</a:t>
+            </a:r>
+            <a:endParaRPr lang="en-US" sz="1400" dirty="0"/>
+          </a:p>
+          <a:p>
+            <a:pPr marL="342900" indent="-342900">
+              <a:spcAft>
+                <a:spcPts val="800"/>
+              </a:spcAft>
+              <a:buSzPct val="100000"/>
+              <a:buChar char="•"/>
+            </a:pPr>
+            <a:r>
+              <a:rPr lang="en-US" sz="1400" dirty="0">
+                <a:solidFill>
+                  <a:srgbClr val="3D3A36"/>
+                </a:solidFill>
+                <a:latin typeface="Calibri" pitchFamily="34" charset="0"/>
+                <a:ea typeface="Calibri" pitchFamily="34" charset="-122"/>
+                <a:cs typeface="Calibri" pitchFamily="34" charset="-120"/>
+              </a:rPr>
+              <a:t>Compare digits from left to right, starting with the highest place value</a:t>
+            </a:r>
+            <a:endParaRPr lang="en-US" sz="1400" dirty="0"/>
+          </a:p>
+          <a:p>
+            <a:pPr marL="342900" indent="-342900">
+              <a:spcAft>
+                <a:spcPts val="800"/>
+              </a:spcAft>
+              <a:buSzPct val="100000"/>
+              <a:buChar char="•"/>
+            </a:pPr>
+            <a:r>
+              <a:rPr lang="en-US" sz="1400" dirty="0">
+                <a:solidFill>
+                  <a:srgbClr val="3D3A36"/>
+                </a:solidFill>
+                <a:latin typeface="Calibri" pitchFamily="34" charset="0"/>
+                <a:ea typeface="Calibri" pitchFamily="34" charset="-122"/>
+                <a:cs typeface="Calibri" pitchFamily="34" charset="-120"/>
+              </a:rPr>
+              <a:t>Example: 5,432 vs 5,438 — same until the ones place: 2 &lt; 8, so 5,432 &lt; 5,438</a:t>
+            </a:r>
+            <a:endParaRPr lang="en-US" sz="1400" dirty="0"/>
+          </a:p>
+          <a:p>
+            <a:pPr marL="342900" indent="-342900">
+              <a:spcAft>
+                <a:spcPts val="800"/>
+              </a:spcAft>
+              <a:buSzPct val="100000"/>
+              <a:buChar char="•"/>
+            </a:pPr>
+            <a:r>
+              <a:rPr lang="en-US" sz="1400" dirty="0">
+                <a:solidFill>
+                  <a:srgbClr val="3D3A36"/>
+                </a:solidFill>
+                <a:latin typeface="Calibri" pitchFamily="34" charset="0"/>
+                <a:ea typeface="Calibri" pitchFamily="34" charset="-122"/>
+                <a:cs typeface="Calibri" pitchFamily="34" charset="-120"/>
+              </a:rPr>
+              <a:t>For decimals: 0.35 vs 0.4 — write as 0.35 vs 0.40, compare tenths: 3 &lt; 4</a:t>
+            </a:r>
+            <a:endParaRPr lang="en-US" sz="1400" dirty="0"/>
+          </a:p>
+          <a:p>
+            <a:pPr marL="342900" indent="-342900">
+              <a:spcAft>
+                <a:spcPts val="800"/>
+              </a:spcAft>
+              <a:buSzPct val="100000"/>
+              <a:buChar char="•"/>
+            </a:pPr>
+            <a:r>
+              <a:rPr lang="en-US" sz="1400" dirty="0">
+                <a:solidFill>
+                  <a:srgbClr val="3D3A36"/>
+                </a:solidFill>
+                <a:latin typeface="Calibri" pitchFamily="34" charset="0"/>
+                <a:ea typeface="Calibri" pitchFamily="34" charset="-122"/>
+                <a:cs typeface="Calibri" pitchFamily="34" charset="-120"/>
+              </a:rPr>
+              <a:t>On a number line, numbers increase to the right</a:t>
+            </a:r>
+            <a:endParaRPr lang="en-US" sz="1400" dirty="0"/>
+          </a:p>
+        </p:txBody>
+      </p:sp>
+    </p:spTree>
+  </p:cSld>
+  <p:clrMapOvr>
+    <a:masterClrMapping/>
+  </p:clrMapOvr>
+</p:sld>
+</file>
+
+<file path=ppt/slides/slide5.xml><?xml version="1.0" encoding="utf-8"?>
+<p:sld xmlns:a="http://schemas.openxmlformats.org/drawingml/2006/main" xmlns:r="http://schemas.openxmlformats.org/officeDocument/2006/relationships" xmlns:p="http://schemas.openxmlformats.org/presentationml/2006/main">
+  <p:cSld name="Slide 5">
     <p:bg>
       <p:bgPr>
         <a:solidFill>
@@ -1828,13 +2372,13 @@
         <p:spPr>
           <a:xfrm>
             <a:off x="0" y="0"/>
-            <a:ext cx="9144000" cy="54864"/>
-          </a:xfrm>
-          <a:prstGeom prst="rect">
-            <a:avLst/>
-          </a:prstGeom>
-          <a:solidFill>
-            <a:srgbClr val="2A9D8F"/>
+            <a:ext cx="109728" cy="5143500"/>
+          </a:xfrm>
+          <a:prstGeom prst="rect">
+            <a:avLst/>
+          </a:prstGeom>
+          <a:solidFill>
+            <a:srgbClr val="E9C46A"/>
           </a:solidFill>
           <a:ln/>
         </p:spPr>
@@ -1847,8 +2391,8 @@
         </p:nvSpPr>
         <p:spPr>
           <a:xfrm>
-            <a:off x="548640" y="457200"/>
-            <a:ext cx="8046720" cy="640080"/>
+            <a:off x="731520" y="457200"/>
+            <a:ext cx="7772400" cy="731520"/>
           </a:xfrm>
           <a:prstGeom prst="rect">
             <a:avLst/>
@@ -1864,7 +2408,7 @@
               <a:buNone/>
             </a:pPr>
             <a:r>
-              <a:rPr lang="en-US" sz="2800" b="1" dirty="0">
+              <a:rPr lang="en-US" sz="3200" b="1" dirty="0">
                 <a:solidFill>
                   <a:srgbClr val="FFFFFF"/>
                 </a:solidFill>
@@ -1874,7 +2418,7 @@
               </a:rPr>
               <a:t>Key Takeaways</a:t>
             </a:r>
-            <a:endParaRPr lang="en-US" sz="2800" dirty="0"/>
+            <a:endParaRPr lang="en-US" sz="3200" dirty="0"/>
           </a:p>
         </p:txBody>
       </p:sp>
@@ -1886,8 +2430,8 @@
         </p:nvSpPr>
         <p:spPr>
           <a:xfrm>
-            <a:off x="731520" y="1371600"/>
-            <a:ext cx="7680960" cy="3200400"/>
+            <a:off x="731520" y="1463040"/>
+            <a:ext cx="7772400" cy="3200400"/>
           </a:xfrm>
           <a:prstGeom prst="rect">
             <a:avLst/>
@@ -1907,7 +2451,7 @@
               <a:buChar char="•"/>
             </a:pPr>
             <a:r>
-              <a:rPr lang="en-US" sz="1600" dirty="0">
+              <a:rPr lang="en-US" sz="1500" dirty="0">
                 <a:solidFill>
                   <a:srgbClr val="CADCFC"/>
                 </a:solidFill>
@@ -1915,9 +2459,9 @@
                 <a:ea typeface="Calibri" pitchFamily="34" charset="-122"/>
                 <a:cs typeface="Calibri" pitchFamily="34" charset="-120"/>
               </a:rPr>
-              <a:t>Place value: each digit's value depends on its position</a:t>
-            </a:r>
-            <a:endParaRPr lang="en-US" sz="1600" dirty="0"/>
+              <a:t>Every digit's value depends on its position (place value)</a:t>
+            </a:r>
+            <a:endParaRPr lang="en-US" sz="1500" dirty="0"/>
           </a:p>
           <a:p>
             <a:pPr marL="342900" indent="-342900">
@@ -1928,7 +2472,7 @@
               <a:buChar char="•"/>
             </a:pPr>
             <a:r>
-              <a:rPr lang="en-US" sz="1600" dirty="0">
+              <a:rPr lang="en-US" sz="1500" dirty="0">
                 <a:solidFill>
                   <a:srgbClr val="CADCFC"/>
                 </a:solidFill>
@@ -1936,9 +2480,9 @@
                 <a:ea typeface="Calibri" pitchFamily="34" charset="-122"/>
                 <a:cs typeface="Calibri" pitchFamily="34" charset="-120"/>
               </a:rPr>
-              <a:t>Each place is 10× bigger going left, 10× smaller going right</a:t>
-            </a:r>
-            <a:endParaRPr lang="en-US" sz="1600" dirty="0"/>
+              <a:t>Commas separate groups of three digits in large numbers</a:t>
+            </a:r>
+            <a:endParaRPr lang="en-US" sz="1500" dirty="0"/>
           </a:p>
           <a:p>
             <a:pPr marL="342900" indent="-342900">
@@ -1949,7 +2493,7 @@
               <a:buChar char="•"/>
             </a:pPr>
             <a:r>
-              <a:rPr lang="en-US" sz="1600" dirty="0">
+              <a:rPr lang="en-US" sz="1500" dirty="0">
                 <a:solidFill>
                   <a:srgbClr val="CADCFC"/>
                 </a:solidFill>
@@ -1957,9 +2501,9 @@
                 <a:ea typeface="Calibri" pitchFamily="34" charset="-122"/>
                 <a:cs typeface="Calibri" pitchFamily="34" charset="-120"/>
               </a:rPr>
-              <a:t>Partition numbers to understand their structure</a:t>
-            </a:r>
-            <a:endParaRPr lang="en-US" sz="1600" dirty="0"/>
+              <a:t>Compare numbers from left to right, highest place value first</a:t>
+            </a:r>
+            <a:endParaRPr lang="en-US" sz="1500" dirty="0"/>
           </a:p>
           <a:p>
             <a:pPr marL="342900" indent="-342900">
@@ -1970,7 +2514,7 @@
               <a:buChar char="•"/>
             </a:pPr>
             <a:r>
-              <a:rPr lang="en-US" sz="1600" dirty="0">
+              <a:rPr lang="en-US" sz="1500" dirty="0">
                 <a:solidFill>
                   <a:srgbClr val="CADCFC"/>
                 </a:solidFill>
@@ -1978,9 +2522,30 @@
                 <a:ea typeface="Calibri" pitchFamily="34" charset="-122"/>
                 <a:cs typeface="Calibri" pitchFamily="34" charset="-120"/>
               </a:rPr>
-              <a:t>Compare numbers from the highest place value down</a:t>
-            </a:r>
-            <a:endParaRPr lang="en-US" sz="1600" dirty="0"/>
+              <a:t>Decimals: tenths, hundredths, thousandths extend right of the decimal point</a:t>
+            </a:r>
+            <a:endParaRPr lang="en-US" sz="1500" dirty="0"/>
+          </a:p>
+          <a:p>
+            <a:pPr marL="342900" indent="-342900">
+              <a:spcAft>
+                <a:spcPts val="1000"/>
+              </a:spcAft>
+              <a:buSzPct val="100000"/>
+              <a:buChar char="•"/>
+            </a:pPr>
+            <a:r>
+              <a:rPr lang="en-US" sz="1500" dirty="0">
+                <a:solidFill>
+                  <a:srgbClr val="CADCFC"/>
+                </a:solidFill>
+                <a:latin typeface="Calibri" pitchFamily="34" charset="0"/>
+                <a:ea typeface="Calibri" pitchFamily="34" charset="-122"/>
+                <a:cs typeface="Calibri" pitchFamily="34" charset="-120"/>
+              </a:rPr>
+              <a:t>Use &lt;, &gt;, = to compare and order numbers</a:t>
+            </a:r>
+            <a:endParaRPr lang="en-US" sz="1500" dirty="0"/>
           </a:p>
         </p:txBody>
       </p:sp>
@@ -1992,8 +2557,8 @@
         </p:nvSpPr>
         <p:spPr>
           <a:xfrm>
-            <a:off x="548640" y="4572000"/>
-            <a:ext cx="3657600" cy="274320"/>
+            <a:off x="731520" y="4572000"/>
+            <a:ext cx="7772400" cy="365760"/>
           </a:xfrm>
           <a:prstGeom prst="rect">
             <a:avLst/>
@@ -2009,14 +2574,17 @@
               <a:buNone/>
             </a:pPr>
             <a:r>
-              <a:rPr lang="en-US" sz="1000" dirty="0">
-                <a:solidFill>
-                  <a:srgbClr val="6B6660"/>
-                </a:solidFill>
+              <a:rPr lang="en-US" sz="1100" dirty="0">
+                <a:solidFill>
+                  <a:srgbClr val="E9C46A"/>
+                </a:solidFill>
+                <a:latin typeface="Calibri" pitchFamily="34" charset="0"/>
+                <a:ea typeface="Calibri" pitchFamily="34" charset="-122"/>
+                <a:cs typeface="Calibri" pitchFamily="34" charset="-120"/>
               </a:rPr>
               <a:t>mrzocchi.com</a:t>
             </a:r>
-            <a:endParaRPr lang="en-US" sz="1000" dirty="0"/>
+            <a:endParaRPr lang="en-US" sz="1100" dirty="0"/>
           </a:p>
         </p:txBody>
       </p:sp>

--- a/static/ppts/G6_Math_T1_Place_Value.pptx
+++ b/static/ppts/G6_Math_T1_Place_Value.pptx
@@ -10,9 +10,12 @@
     <p:sldId id="258" r:id="rId4"/>
     <p:sldId id="259" r:id="rId5"/>
     <p:sldId id="260" r:id="rId6"/>
+    <p:sldId id="261" r:id="rId7"/>
+    <p:sldId id="262" r:id="rId8"/>
+    <p:sldId id="263" r:id="rId9"/>
   </p:sldIdLst>
   <p:notesMasterIdLst>
-    <p:notesMasterId r:id="rId7"/>
+    <p:notesMasterId r:id="rId10"/>
   </p:notesMasterIdLst>
   <p:sldSz cx="9144000" cy="5143500"/>
   <p:notesSz cx="5143500" cy="9144000"/>
@@ -882,6 +885,270 @@
             <a:fld id="{F7021451-1387-4CA6-816F-3879F97B5CBC}" type="slidenum">
               <a:rPr lang="en-US"/>
               <a:t>5</a:t>
+            </a:fld>
+            <a:endParaRPr lang="en-US"/>
+          </a:p>
+        </p:txBody>
+      </p:sp>
+    </p:spTree>
+    <p:extLst>
+      <p:ext uri="{BB962C8B-B14F-4D97-AF65-F5344CB8AC3E}">
+        <p14:creationId xmlns:p14="http://schemas.microsoft.com/office/powerpoint/2010/main" val="1024086991"/>
+      </p:ext>
+    </p:extLst>
+  </p:cSld>
+  <p:clrMapOvr>
+    <a:masterClrMapping/>
+  </p:clrMapOvr>
+</p:notes>
+</file>
+
+<file path=ppt/notesSlides/notesSlide6.xml><?xml version="1.0" encoding="utf-8"?>
+<p:notes xmlns:a="http://schemas.openxmlformats.org/drawingml/2006/main" xmlns:r="http://schemas.openxmlformats.org/officeDocument/2006/relationships" xmlns:p="http://schemas.openxmlformats.org/presentationml/2006/main">
+  <p:cSld>
+    <p:spTree>
+      <p:nvGrpSpPr>
+        <p:cNvPr id="1" name=""/>
+        <p:cNvGrpSpPr/>
+        <p:nvPr/>
+      </p:nvGrpSpPr>
+      <p:grpSpPr>
+        <a:xfrm>
+          <a:off x="0" y="0"/>
+          <a:ext cx="0" cy="0"/>
+          <a:chOff x="0" y="0"/>
+          <a:chExt cx="0" cy="0"/>
+        </a:xfrm>
+      </p:grpSpPr>
+      <p:sp>
+        <p:nvSpPr>
+          <p:cNvPr id="2" name="Slide Image Placeholder 1"/>
+          <p:cNvSpPr>
+            <a:spLocks noGrp="1" noRot="1" noChangeAspect="1"/>
+          </p:cNvSpPr>
+          <p:nvPr>
+            <p:ph type="sldImg"/>
+          </p:nvPr>
+        </p:nvSpPr>
+        <p:spPr/>
+      </p:sp>
+      <p:sp>
+        <p:nvSpPr>
+          <p:cNvPr id="3" name="Notes Placeholder 2"/>
+          <p:cNvSpPr>
+            <a:spLocks noGrp="1"/>
+          </p:cNvSpPr>
+          <p:nvPr>
+            <p:ph type="body" idx="1"/>
+          </p:nvPr>
+        </p:nvSpPr>
+        <p:spPr/>
+        <p:txBody>
+          <a:bodyPr/>
+          <a:lstStyle/>
+          <a:p>
+            <a:r>
+              <a:rPr lang="en-US" dirty="0"/>
+              <a:t/>
+            </a:r>
+            <a:endParaRPr lang="en-US" dirty="0"/>
+          </a:p>
+        </p:txBody>
+      </p:sp>
+      <p:sp>
+        <p:nvSpPr>
+          <p:cNvPr id="4" name="Slide Number Placeholder 3"/>
+          <p:cNvSpPr>
+            <a:spLocks noGrp="1"/>
+          </p:cNvSpPr>
+          <p:nvPr>
+            <p:ph type="sldNum" sz="quarter" idx="10"/>
+          </p:nvPr>
+        </p:nvSpPr>
+        <p:spPr/>
+        <p:txBody>
+          <a:bodyPr/>
+          <a:lstStyle/>
+          <a:p>
+            <a:fld id="{F7021451-1387-4CA6-816F-3879F97B5CBC}" type="slidenum">
+              <a:rPr lang="en-US"/>
+              <a:t>6</a:t>
+            </a:fld>
+            <a:endParaRPr lang="en-US"/>
+          </a:p>
+        </p:txBody>
+      </p:sp>
+    </p:spTree>
+    <p:extLst>
+      <p:ext uri="{BB962C8B-B14F-4D97-AF65-F5344CB8AC3E}">
+        <p14:creationId xmlns:p14="http://schemas.microsoft.com/office/powerpoint/2010/main" val="1024086991"/>
+      </p:ext>
+    </p:extLst>
+  </p:cSld>
+  <p:clrMapOvr>
+    <a:masterClrMapping/>
+  </p:clrMapOvr>
+</p:notes>
+</file>
+
+<file path=ppt/notesSlides/notesSlide7.xml><?xml version="1.0" encoding="utf-8"?>
+<p:notes xmlns:a="http://schemas.openxmlformats.org/drawingml/2006/main" xmlns:r="http://schemas.openxmlformats.org/officeDocument/2006/relationships" xmlns:p="http://schemas.openxmlformats.org/presentationml/2006/main">
+  <p:cSld>
+    <p:spTree>
+      <p:nvGrpSpPr>
+        <p:cNvPr id="1" name=""/>
+        <p:cNvGrpSpPr/>
+        <p:nvPr/>
+      </p:nvGrpSpPr>
+      <p:grpSpPr>
+        <a:xfrm>
+          <a:off x="0" y="0"/>
+          <a:ext cx="0" cy="0"/>
+          <a:chOff x="0" y="0"/>
+          <a:chExt cx="0" cy="0"/>
+        </a:xfrm>
+      </p:grpSpPr>
+      <p:sp>
+        <p:nvSpPr>
+          <p:cNvPr id="2" name="Slide Image Placeholder 1"/>
+          <p:cNvSpPr>
+            <a:spLocks noGrp="1" noRot="1" noChangeAspect="1"/>
+          </p:cNvSpPr>
+          <p:nvPr>
+            <p:ph type="sldImg"/>
+          </p:nvPr>
+        </p:nvSpPr>
+        <p:spPr/>
+      </p:sp>
+      <p:sp>
+        <p:nvSpPr>
+          <p:cNvPr id="3" name="Notes Placeholder 2"/>
+          <p:cNvSpPr>
+            <a:spLocks noGrp="1"/>
+          </p:cNvSpPr>
+          <p:nvPr>
+            <p:ph type="body" idx="1"/>
+          </p:nvPr>
+        </p:nvSpPr>
+        <p:spPr/>
+        <p:txBody>
+          <a:bodyPr/>
+          <a:lstStyle/>
+          <a:p>
+            <a:r>
+              <a:rPr lang="en-US" dirty="0"/>
+              <a:t/>
+            </a:r>
+            <a:endParaRPr lang="en-US" dirty="0"/>
+          </a:p>
+        </p:txBody>
+      </p:sp>
+      <p:sp>
+        <p:nvSpPr>
+          <p:cNvPr id="4" name="Slide Number Placeholder 3"/>
+          <p:cNvSpPr>
+            <a:spLocks noGrp="1"/>
+          </p:cNvSpPr>
+          <p:nvPr>
+            <p:ph type="sldNum" sz="quarter" idx="10"/>
+          </p:nvPr>
+        </p:nvSpPr>
+        <p:spPr/>
+        <p:txBody>
+          <a:bodyPr/>
+          <a:lstStyle/>
+          <a:p>
+            <a:fld id="{F7021451-1387-4CA6-816F-3879F97B5CBC}" type="slidenum">
+              <a:rPr lang="en-US"/>
+              <a:t>7</a:t>
+            </a:fld>
+            <a:endParaRPr lang="en-US"/>
+          </a:p>
+        </p:txBody>
+      </p:sp>
+    </p:spTree>
+    <p:extLst>
+      <p:ext uri="{BB962C8B-B14F-4D97-AF65-F5344CB8AC3E}">
+        <p14:creationId xmlns:p14="http://schemas.microsoft.com/office/powerpoint/2010/main" val="1024086991"/>
+      </p:ext>
+    </p:extLst>
+  </p:cSld>
+  <p:clrMapOvr>
+    <a:masterClrMapping/>
+  </p:clrMapOvr>
+</p:notes>
+</file>
+
+<file path=ppt/notesSlides/notesSlide8.xml><?xml version="1.0" encoding="utf-8"?>
+<p:notes xmlns:a="http://schemas.openxmlformats.org/drawingml/2006/main" xmlns:r="http://schemas.openxmlformats.org/officeDocument/2006/relationships" xmlns:p="http://schemas.openxmlformats.org/presentationml/2006/main">
+  <p:cSld>
+    <p:spTree>
+      <p:nvGrpSpPr>
+        <p:cNvPr id="1" name=""/>
+        <p:cNvGrpSpPr/>
+        <p:nvPr/>
+      </p:nvGrpSpPr>
+      <p:grpSpPr>
+        <a:xfrm>
+          <a:off x="0" y="0"/>
+          <a:ext cx="0" cy="0"/>
+          <a:chOff x="0" y="0"/>
+          <a:chExt cx="0" cy="0"/>
+        </a:xfrm>
+      </p:grpSpPr>
+      <p:sp>
+        <p:nvSpPr>
+          <p:cNvPr id="2" name="Slide Image Placeholder 1"/>
+          <p:cNvSpPr>
+            <a:spLocks noGrp="1" noRot="1" noChangeAspect="1"/>
+          </p:cNvSpPr>
+          <p:nvPr>
+            <p:ph type="sldImg"/>
+          </p:nvPr>
+        </p:nvSpPr>
+        <p:spPr/>
+      </p:sp>
+      <p:sp>
+        <p:nvSpPr>
+          <p:cNvPr id="3" name="Notes Placeholder 2"/>
+          <p:cNvSpPr>
+            <a:spLocks noGrp="1"/>
+          </p:cNvSpPr>
+          <p:nvPr>
+            <p:ph type="body" idx="1"/>
+          </p:nvPr>
+        </p:nvSpPr>
+        <p:spPr/>
+        <p:txBody>
+          <a:bodyPr/>
+          <a:lstStyle/>
+          <a:p>
+            <a:r>
+              <a:rPr lang="en-US" dirty="0"/>
+              <a:t/>
+            </a:r>
+            <a:endParaRPr lang="en-US" dirty="0"/>
+          </a:p>
+        </p:txBody>
+      </p:sp>
+      <p:sp>
+        <p:nvSpPr>
+          <p:cNvPr id="4" name="Slide Number Placeholder 3"/>
+          <p:cNvSpPr>
+            <a:spLocks noGrp="1"/>
+          </p:cNvSpPr>
+          <p:nvPr>
+            <p:ph type="sldNum" sz="quarter" idx="10"/>
+          </p:nvPr>
+        </p:nvSpPr>
+        <p:spPr/>
+        <p:txBody>
+          <a:bodyPr/>
+          <a:lstStyle/>
+          <a:p>
+            <a:fld id="{F7021451-1387-4CA6-816F-3879F97B5CBC}" type="slidenum">
+              <a:rPr lang="en-US"/>
+              <a:t>8</a:t>
             </a:fld>
             <a:endParaRPr lang="en-US"/>
           </a:p>
@@ -1210,13 +1477,6 @@
 <file path=ppt/slides/slide1.xml><?xml version="1.0" encoding="utf-8"?>
 <p:sld xmlns:a="http://schemas.openxmlformats.org/drawingml/2006/main" xmlns:r="http://schemas.openxmlformats.org/officeDocument/2006/relationships" xmlns:p="http://schemas.openxmlformats.org/presentationml/2006/main">
   <p:cSld name="Slide 1">
-    <p:bg>
-      <p:bgPr>
-        <a:solidFill>
-          <a:srgbClr val="1B2A4A"/>
-        </a:solidFill>
-      </p:bgPr>
-    </p:bg>
     <p:spTree>
       <p:nvGrpSpPr>
         <p:cNvPr id="1" name=""/>
@@ -1240,7 +1500,27 @@
         <p:spPr>
           <a:xfrm>
             <a:off x="0" y="0"/>
-            <a:ext cx="109728" cy="5143500"/>
+            <a:ext cx="9144000" cy="5143500"/>
+          </a:xfrm>
+          <a:prstGeom prst="rect">
+            <a:avLst/>
+          </a:prstGeom>
+          <a:solidFill>
+            <a:srgbClr val="1B2A4A"/>
+          </a:solidFill>
+          <a:ln/>
+        </p:spPr>
+      </p:sp>
+      <p:sp>
+        <p:nvSpPr>
+          <p:cNvPr id="3" name="Shape 1"/>
+          <p:cNvSpPr/>
+          <p:nvPr/>
+        </p:nvSpPr>
+        <p:spPr>
+          <a:xfrm>
+            <a:off x="0" y="4777740"/>
+            <a:ext cx="9144000" cy="365760"/>
           </a:xfrm>
           <a:prstGeom prst="rect">
             <a:avLst/>
@@ -1253,14 +1533,36 @@
       </p:sp>
       <p:sp>
         <p:nvSpPr>
-          <p:cNvPr id="3" name="Text 1"/>
-          <p:cNvSpPr/>
-          <p:nvPr/>
-        </p:nvSpPr>
-        <p:spPr>
-          <a:xfrm>
-            <a:off x="731520" y="1097280"/>
-            <a:ext cx="7772400" cy="1371600"/>
+          <p:cNvPr id="4" name="Shape 2"/>
+          <p:cNvSpPr/>
+          <p:nvPr/>
+        </p:nvSpPr>
+        <p:spPr>
+          <a:xfrm>
+            <a:off x="6858000" y="-1371600"/>
+            <a:ext cx="4572000" cy="4572000"/>
+          </a:xfrm>
+          <a:prstGeom prst="ellipse">
+            <a:avLst/>
+          </a:prstGeom>
+          <a:solidFill>
+            <a:srgbClr val="2A9D8F">
+              <a:alpha val="12000"/>
+            </a:srgbClr>
+          </a:solidFill>
+          <a:ln/>
+        </p:spPr>
+      </p:sp>
+      <p:sp>
+        <p:nvSpPr>
+          <p:cNvPr id="5" name="Text 3"/>
+          <p:cNvSpPr/>
+          <p:nvPr/>
+        </p:nvSpPr>
+        <p:spPr>
+          <a:xfrm>
+            <a:off x="731520" y="914400"/>
+            <a:ext cx="7680960" cy="457200"/>
           </a:xfrm>
           <a:prstGeom prst="rect">
             <a:avLst/>
@@ -1276,7 +1578,46 @@
               <a:buNone/>
             </a:pPr>
             <a:r>
-              <a:rPr lang="en-US" sz="4000" b="1" dirty="0">
+              <a:rPr lang="en-US" sz="1300" b="1" spc="500" kern="0" dirty="0">
+                <a:solidFill>
+                  <a:srgbClr val="2A9D8F"/>
+                </a:solidFill>
+                <a:latin typeface="Calibri" pitchFamily="34" charset="0"/>
+                <a:ea typeface="Calibri" pitchFamily="34" charset="-122"/>
+                <a:cs typeface="Calibri" pitchFamily="34" charset="-120"/>
+              </a:rPr>
+              <a:t>GRADE 6 MATHEMATICS</a:t>
+            </a:r>
+            <a:endParaRPr lang="en-US" sz="1300" dirty="0"/>
+          </a:p>
+        </p:txBody>
+      </p:sp>
+      <p:sp>
+        <p:nvSpPr>
+          <p:cNvPr id="6" name="Text 4"/>
+          <p:cNvSpPr/>
+          <p:nvPr/>
+        </p:nvSpPr>
+        <p:spPr>
+          <a:xfrm>
+            <a:off x="731520" y="1463040"/>
+            <a:ext cx="6858000" cy="1645920"/>
+          </a:xfrm>
+          <a:prstGeom prst="rect">
+            <a:avLst/>
+          </a:prstGeom>
+          <a:noFill/>
+          <a:ln/>
+        </p:spPr>
+        <p:txBody>
+          <a:bodyPr wrap="square" rtlCol="0" anchor="t"/>
+          <a:lstStyle/>
+          <a:p>
+            <a:pPr indent="0" marL="0">
+              <a:buNone/>
+            </a:pPr>
+            <a:r>
+              <a:rPr lang="en-US" sz="3800" b="1" dirty="0">
                 <a:solidFill>
                   <a:srgbClr val="FFFFFF"/>
                 </a:solidFill>
@@ -1284,46 +1625,63 @@
                 <a:ea typeface="Georgia" pitchFamily="34" charset="-122"/>
                 <a:cs typeface="Georgia" pitchFamily="34" charset="-120"/>
               </a:rPr>
-              <a:t>Place Value &amp; Number Systems</a:t>
-            </a:r>
-            <a:endParaRPr lang="en-US" sz="4000" dirty="0"/>
-          </a:p>
-        </p:txBody>
-      </p:sp>
-      <p:sp>
-        <p:nvSpPr>
-          <p:cNvPr id="4" name="Text 2"/>
-          <p:cNvSpPr/>
-          <p:nvPr/>
-        </p:nvSpPr>
-        <p:spPr>
-          <a:xfrm>
-            <a:off x="731520" y="2560320"/>
-            <a:ext cx="7772400" cy="548640"/>
-          </a:xfrm>
-          <a:prstGeom prst="rect">
-            <a:avLst/>
-          </a:prstGeom>
-          <a:noFill/>
-          <a:ln/>
-        </p:spPr>
-        <p:txBody>
-          <a:bodyPr wrap="square" rtlCol="0" anchor="ctr"/>
-          <a:lstStyle/>
+              <a:t>Place Value &amp;</a:t>
+            </a:r>
+            <a:endParaRPr lang="en-US" sz="3800" dirty="0"/>
+          </a:p>
           <a:p>
             <a:pPr indent="0" marL="0">
               <a:buNone/>
             </a:pPr>
             <a:r>
-              <a:rPr lang="en-US" sz="1600" dirty="0">
+              <a:rPr lang="en-US" sz="3800" b="1" dirty="0">
                 <a:solidFill>
-                  <a:srgbClr val="E9C46A"/>
+                  <a:srgbClr val="FFFFFF"/>
+                </a:solidFill>
+                <a:latin typeface="Georgia" pitchFamily="34" charset="0"/>
+                <a:ea typeface="Georgia" pitchFamily="34" charset="-122"/>
+                <a:cs typeface="Georgia" pitchFamily="34" charset="-120"/>
+              </a:rPr>
+              <a:t>Number Systems</a:t>
+            </a:r>
+            <a:endParaRPr lang="en-US" sz="3800" dirty="0"/>
+          </a:p>
+        </p:txBody>
+      </p:sp>
+      <p:sp>
+        <p:nvSpPr>
+          <p:cNvPr id="7" name="Text 5"/>
+          <p:cNvSpPr/>
+          <p:nvPr/>
+        </p:nvSpPr>
+        <p:spPr>
+          <a:xfrm>
+            <a:off x="731520" y="3200400"/>
+            <a:ext cx="6400800" cy="548640"/>
+          </a:xfrm>
+          <a:prstGeom prst="rect">
+            <a:avLst/>
+          </a:prstGeom>
+          <a:noFill/>
+          <a:ln/>
+        </p:spPr>
+        <p:txBody>
+          <a:bodyPr wrap="square" rtlCol="0" anchor="ctr"/>
+          <a:lstStyle/>
+          <a:p>
+            <a:pPr indent="0" marL="0">
+              <a:buNone/>
+            </a:pPr>
+            <a:r>
+              <a:rPr lang="en-US" sz="1600" i="1" dirty="0">
+                <a:solidFill>
+                  <a:srgbClr val="9B9690"/>
                 </a:solidFill>
                 <a:latin typeface="Calibri" pitchFamily="34" charset="0"/>
                 <a:ea typeface="Calibri" pitchFamily="34" charset="-122"/>
                 <a:cs typeface="Calibri" pitchFamily="34" charset="-120"/>
               </a:rPr>
-              <a:t>Grade 6 Mathematics · Mr Zocchi</a:t>
+              <a:t>Understanding the value of each digit</a:t>
             </a:r>
             <a:endParaRPr lang="en-US" sz="1600" dirty="0"/>
           </a:p>
@@ -1331,36 +1689,14 @@
       </p:sp>
       <p:sp>
         <p:nvSpPr>
-          <p:cNvPr id="5" name="Shape 3"/>
-          <p:cNvSpPr/>
-          <p:nvPr/>
-        </p:nvSpPr>
-        <p:spPr>
-          <a:xfrm>
-            <a:off x="731520" y="3474720"/>
-            <a:ext cx="2011680" cy="411480"/>
-          </a:xfrm>
-          <a:prstGeom prst="roundRect">
-            <a:avLst>
-              <a:gd name="adj" fmla="val 17778"/>
-            </a:avLst>
-          </a:prstGeom>
-          <a:solidFill>
-            <a:srgbClr val="2A9D8F"/>
-          </a:solidFill>
-          <a:ln/>
-        </p:spPr>
-      </p:sp>
-      <p:sp>
-        <p:nvSpPr>
-          <p:cNvPr id="6" name="Text 4"/>
-          <p:cNvSpPr/>
-          <p:nvPr/>
-        </p:nvSpPr>
-        <p:spPr>
-          <a:xfrm>
-            <a:off x="731520" y="3474720"/>
-            <a:ext cx="2011680" cy="411480"/>
+          <p:cNvPr id="8" name="Text 6"/>
+          <p:cNvSpPr/>
+          <p:nvPr/>
+        </p:nvSpPr>
+        <p:spPr>
+          <a:xfrm>
+            <a:off x="731520" y="4297680"/>
+            <a:ext cx="2743200" cy="365760"/>
           </a:xfrm>
           <a:prstGeom prst="rect">
             <a:avLst/>
@@ -1372,21 +1708,21 @@
           <a:bodyPr wrap="square" rtlCol="0" anchor="ctr"/>
           <a:lstStyle/>
           <a:p>
-            <a:pPr algn="ctr" indent="0" marL="0">
+            <a:pPr indent="0" marL="0">
               <a:buNone/>
             </a:pPr>
             <a:r>
-              <a:rPr lang="en-US" sz="1200" b="1" dirty="0">
+              <a:rPr lang="en-US" sz="1100" dirty="0">
                 <a:solidFill>
-                  <a:srgbClr val="FFFFFF"/>
+                  <a:srgbClr val="9B9690"/>
                 </a:solidFill>
                 <a:latin typeface="Calibri" pitchFamily="34" charset="0"/>
                 <a:ea typeface="Calibri" pitchFamily="34" charset="-122"/>
                 <a:cs typeface="Calibri" pitchFamily="34" charset="-120"/>
               </a:rPr>
-              <a:t>Term 1 · Number Sense</a:t>
-            </a:r>
-            <a:endParaRPr lang="en-US" sz="1200" dirty="0"/>
+              <a:t>mrzocchi.com</a:t>
+            </a:r>
+            <a:endParaRPr lang="en-US" sz="1100" dirty="0"/>
           </a:p>
         </p:txBody>
       </p:sp>
@@ -1431,7 +1767,47 @@
         <p:spPr>
           <a:xfrm>
             <a:off x="0" y="0"/>
-            <a:ext cx="9144000" cy="54864"/>
+            <a:ext cx="9144000" cy="822960"/>
+          </a:xfrm>
+          <a:prstGeom prst="rect">
+            <a:avLst/>
+          </a:prstGeom>
+          <a:solidFill>
+            <a:srgbClr val="FFFFFF"/>
+          </a:solidFill>
+          <a:ln/>
+        </p:spPr>
+      </p:sp>
+      <p:sp>
+        <p:nvSpPr>
+          <p:cNvPr id="3" name="Shape 1"/>
+          <p:cNvSpPr/>
+          <p:nvPr/>
+        </p:nvSpPr>
+        <p:spPr>
+          <a:xfrm>
+            <a:off x="0" y="804672"/>
+            <a:ext cx="9144000" cy="27432"/>
+          </a:xfrm>
+          <a:prstGeom prst="rect">
+            <a:avLst/>
+          </a:prstGeom>
+          <a:solidFill>
+            <a:srgbClr val="E5E2DC"/>
+          </a:solidFill>
+          <a:ln/>
+        </p:spPr>
+      </p:sp>
+      <p:sp>
+        <p:nvSpPr>
+          <p:cNvPr id="4" name="Shape 2"/>
+          <p:cNvSpPr/>
+          <p:nvPr/>
+        </p:nvSpPr>
+        <p:spPr>
+          <a:xfrm>
+            <a:off x="548640" y="201168"/>
+            <a:ext cx="54864" cy="420624"/>
           </a:xfrm>
           <a:prstGeom prst="rect">
             <a:avLst/>
@@ -1444,14 +1820,14 @@
       </p:sp>
       <p:sp>
         <p:nvSpPr>
-          <p:cNvPr id="3" name="Text 1"/>
-          <p:cNvSpPr/>
-          <p:nvPr/>
-        </p:nvSpPr>
-        <p:spPr>
-          <a:xfrm>
-            <a:off x="7772400" y="4709160"/>
-            <a:ext cx="1097280" cy="320040"/>
+          <p:cNvPr id="5" name="Text 3"/>
+          <p:cNvSpPr/>
+          <p:nvPr/>
+        </p:nvSpPr>
+        <p:spPr>
+          <a:xfrm>
+            <a:off x="777240" y="137160"/>
+            <a:ext cx="7772400" cy="548640"/>
           </a:xfrm>
           <a:prstGeom prst="rect">
             <a:avLst/>
@@ -1460,14 +1836,139 @@
           <a:ln/>
         </p:spPr>
         <p:txBody>
-          <a:bodyPr wrap="square" rtlCol="0" anchor="ctr"/>
+          <a:bodyPr wrap="square" lIns="0" tIns="0" rIns="0" bIns="0" rtlCol="0" anchor="ctr"/>
           <a:lstStyle/>
           <a:p>
-            <a:pPr algn="r" indent="0" marL="0">
+            <a:pPr indent="0" marL="0">
               <a:buNone/>
             </a:pPr>
             <a:r>
-              <a:rPr lang="en-US" sz="900" dirty="0">
+              <a:rPr lang="en-US" sz="2000" b="1" dirty="0">
+                <a:solidFill>
+                  <a:srgbClr val="1B2A4A"/>
+                </a:solidFill>
+                <a:latin typeface="Georgia" pitchFamily="34" charset="0"/>
+                <a:ea typeface="Georgia" pitchFamily="34" charset="-122"/>
+                <a:cs typeface="Georgia" pitchFamily="34" charset="-120"/>
+              </a:rPr>
+              <a:t>Key Vocabulary</a:t>
+            </a:r>
+            <a:endParaRPr lang="en-US" sz="2000" dirty="0"/>
+          </a:p>
+        </p:txBody>
+      </p:sp>
+      <p:sp>
+        <p:nvSpPr>
+          <p:cNvPr id="6" name="Shape 4"/>
+          <p:cNvSpPr/>
+          <p:nvPr/>
+        </p:nvSpPr>
+        <p:spPr>
+          <a:xfrm>
+            <a:off x="731520" y="1051560"/>
+            <a:ext cx="3657600" cy="658368"/>
+          </a:xfrm>
+          <a:prstGeom prst="rect">
+            <a:avLst/>
+          </a:prstGeom>
+          <a:solidFill>
+            <a:srgbClr val="FFFFFF"/>
+          </a:solidFill>
+          <a:ln/>
+          <a:effectLst>
+            <a:outerShdw sx="100000" sy="100000" kx="0" ky="0" algn="bl" rotWithShape="0" blurRad="50800" dist="25400" dir="8100000">
+              <a:srgbClr val="000000">
+                <a:alpha val="10000"/>
+              </a:srgbClr>
+            </a:outerShdw>
+          </a:effectLst>
+        </p:spPr>
+      </p:sp>
+      <p:sp>
+        <p:nvSpPr>
+          <p:cNvPr id="7" name="Shape 5"/>
+          <p:cNvSpPr/>
+          <p:nvPr/>
+        </p:nvSpPr>
+        <p:spPr>
+          <a:xfrm>
+            <a:off x="731520" y="1051560"/>
+            <a:ext cx="54864" cy="658368"/>
+          </a:xfrm>
+          <a:prstGeom prst="rect">
+            <a:avLst/>
+          </a:prstGeom>
+          <a:solidFill>
+            <a:srgbClr val="2A9D8F"/>
+          </a:solidFill>
+          <a:ln/>
+        </p:spPr>
+      </p:sp>
+      <p:sp>
+        <p:nvSpPr>
+          <p:cNvPr id="8" name="Text 6"/>
+          <p:cNvSpPr/>
+          <p:nvPr/>
+        </p:nvSpPr>
+        <p:spPr>
+          <a:xfrm>
+            <a:off x="914400" y="1051560"/>
+            <a:ext cx="1463040" cy="658368"/>
+          </a:xfrm>
+          <a:prstGeom prst="rect">
+            <a:avLst/>
+          </a:prstGeom>
+          <a:noFill/>
+          <a:ln/>
+        </p:spPr>
+        <p:txBody>
+          <a:bodyPr wrap="square" lIns="0" tIns="0" rIns="0" bIns="0" rtlCol="0" anchor="ctr"/>
+          <a:lstStyle/>
+          <a:p>
+            <a:pPr indent="0" marL="0">
+              <a:buNone/>
+            </a:pPr>
+            <a:r>
+              <a:rPr lang="en-US" sz="1300" b="1" dirty="0">
+                <a:solidFill>
+                  <a:srgbClr val="1B2A4A"/>
+                </a:solidFill>
+                <a:latin typeface="Georgia" pitchFamily="34" charset="0"/>
+                <a:ea typeface="Georgia" pitchFamily="34" charset="-122"/>
+                <a:cs typeface="Georgia" pitchFamily="34" charset="-120"/>
+              </a:rPr>
+              <a:t>Digit</a:t>
+            </a:r>
+            <a:endParaRPr lang="en-US" sz="1300" dirty="0"/>
+          </a:p>
+        </p:txBody>
+      </p:sp>
+      <p:sp>
+        <p:nvSpPr>
+          <p:cNvPr id="9" name="Text 7"/>
+          <p:cNvSpPr/>
+          <p:nvPr/>
+        </p:nvSpPr>
+        <p:spPr>
+          <a:xfrm>
+            <a:off x="2377440" y="1051560"/>
+            <a:ext cx="1920240" cy="658368"/>
+          </a:xfrm>
+          <a:prstGeom prst="rect">
+            <a:avLst/>
+          </a:prstGeom>
+          <a:noFill/>
+          <a:ln/>
+        </p:spPr>
+        <p:txBody>
+          <a:bodyPr wrap="square" lIns="0" tIns="0" rIns="0" bIns="0" rtlCol="0" anchor="ctr"/>
+          <a:lstStyle/>
+          <a:p>
+            <a:pPr indent="0" marL="0">
+              <a:buNone/>
+            </a:pPr>
+            <a:r>
+              <a:rPr lang="en-US" sz="1100" dirty="0">
                 <a:solidFill>
                   <a:srgbClr val="6B6660"/>
                 </a:solidFill>
@@ -1475,22 +1976,22 @@
                 <a:ea typeface="Calibri" pitchFamily="34" charset="-122"/>
                 <a:cs typeface="Calibri" pitchFamily="34" charset="-120"/>
               </a:rPr>
-              <a:t>2 / 5</a:t>
-            </a:r>
-            <a:endParaRPr lang="en-US" sz="900" dirty="0"/>
-          </a:p>
-        </p:txBody>
-      </p:sp>
-      <p:sp>
-        <p:nvSpPr>
-          <p:cNvPr id="4" name="Shape 2"/>
-          <p:cNvSpPr/>
-          <p:nvPr/>
-        </p:nvSpPr>
-        <p:spPr>
-          <a:xfrm>
-            <a:off x="1371600" y="914400"/>
-            <a:ext cx="6400800" cy="3200400"/>
+              <a:t>A single number symbol (0–9)</a:t>
+            </a:r>
+            <a:endParaRPr lang="en-US" sz="1100" dirty="0"/>
+          </a:p>
+        </p:txBody>
+      </p:sp>
+      <p:sp>
+        <p:nvSpPr>
+          <p:cNvPr id="10" name="Shape 8"/>
+          <p:cNvSpPr/>
+          <p:nvPr/>
+        </p:nvSpPr>
+        <p:spPr>
+          <a:xfrm>
+            <a:off x="4754880" y="1051560"/>
+            <a:ext cx="3657600" cy="658368"/>
           </a:xfrm>
           <a:prstGeom prst="rect">
             <a:avLst/>
@@ -1498,12 +1999,7 @@
           <a:solidFill>
             <a:srgbClr val="FFFFFF"/>
           </a:solidFill>
-          <a:ln w="12700">
-            <a:solidFill>
-              <a:srgbClr val="E5E2DC"/>
-            </a:solidFill>
-            <a:prstDash val="solid"/>
-          </a:ln>
+          <a:ln/>
           <a:effectLst>
             <a:outerShdw sx="100000" sy="100000" kx="0" ky="0" algn="bl" rotWithShape="0" blurRad="50800" dist="25400" dir="8100000">
               <a:srgbClr val="000000">
@@ -1515,14 +2011,14 @@
       </p:sp>
       <p:sp>
         <p:nvSpPr>
-          <p:cNvPr id="5" name="Shape 3"/>
-          <p:cNvSpPr/>
-          <p:nvPr/>
-        </p:nvSpPr>
-        <p:spPr>
-          <a:xfrm>
-            <a:off x="1371600" y="914400"/>
-            <a:ext cx="91440" cy="3200400"/>
+          <p:cNvPr id="11" name="Shape 9"/>
+          <p:cNvSpPr/>
+          <p:nvPr/>
+        </p:nvSpPr>
+        <p:spPr>
+          <a:xfrm>
+            <a:off x="4754880" y="1051560"/>
+            <a:ext cx="54864" cy="658368"/>
           </a:xfrm>
           <a:prstGeom prst="rect">
             <a:avLst/>
@@ -1535,14 +2031,14 @@
       </p:sp>
       <p:sp>
         <p:nvSpPr>
-          <p:cNvPr id="6" name="Text 4"/>
-          <p:cNvSpPr/>
-          <p:nvPr/>
-        </p:nvSpPr>
-        <p:spPr>
-          <a:xfrm>
-            <a:off x="1828800" y="1097280"/>
-            <a:ext cx="5669280" cy="640080"/>
+          <p:cNvPr id="12" name="Text 10"/>
+          <p:cNvSpPr/>
+          <p:nvPr/>
+        </p:nvSpPr>
+        <p:spPr>
+          <a:xfrm>
+            <a:off x="4937760" y="1051560"/>
+            <a:ext cx="1463040" cy="658368"/>
           </a:xfrm>
           <a:prstGeom prst="rect">
             <a:avLst/>
@@ -1551,14 +2047,14 @@
           <a:ln/>
         </p:spPr>
         <p:txBody>
-          <a:bodyPr wrap="square" rtlCol="0" anchor="ctr"/>
+          <a:bodyPr wrap="square" lIns="0" tIns="0" rIns="0" bIns="0" rtlCol="0" anchor="ctr"/>
           <a:lstStyle/>
           <a:p>
             <a:pPr indent="0" marL="0">
               <a:buNone/>
             </a:pPr>
             <a:r>
-              <a:rPr lang="en-US" sz="2400" b="1" dirty="0">
+              <a:rPr lang="en-US" sz="1300" b="1" dirty="0">
                 <a:solidFill>
                   <a:srgbClr val="1B2A4A"/>
                 </a:solidFill>
@@ -1566,22 +2062,22 @@
                 <a:ea typeface="Georgia" pitchFamily="34" charset="-122"/>
                 <a:cs typeface="Georgia" pitchFamily="34" charset="-120"/>
               </a:rPr>
-              <a:t>Understanding Place Value</a:t>
-            </a:r>
-            <a:endParaRPr lang="en-US" sz="2400" dirty="0"/>
-          </a:p>
-        </p:txBody>
-      </p:sp>
-      <p:sp>
-        <p:nvSpPr>
-          <p:cNvPr id="7" name="Text 5"/>
-          <p:cNvSpPr/>
-          <p:nvPr/>
-        </p:nvSpPr>
-        <p:spPr>
-          <a:xfrm>
-            <a:off x="1828800" y="1828800"/>
-            <a:ext cx="5669280" cy="2011680"/>
+              <a:t>Place value</a:t>
+            </a:r>
+            <a:endParaRPr lang="en-US" sz="1300" dirty="0"/>
+          </a:p>
+        </p:txBody>
+      </p:sp>
+      <p:sp>
+        <p:nvSpPr>
+          <p:cNvPr id="13" name="Text 11"/>
+          <p:cNvSpPr/>
+          <p:nvPr/>
+        </p:nvSpPr>
+        <p:spPr>
+          <a:xfrm>
+            <a:off x="6400800" y="1051560"/>
+            <a:ext cx="1920240" cy="658368"/>
           </a:xfrm>
           <a:prstGeom prst="rect">
             <a:avLst/>
@@ -1590,27 +2086,524 @@
           <a:ln/>
         </p:spPr>
         <p:txBody>
-          <a:bodyPr wrap="square" rtlCol="0" anchor="t"/>
+          <a:bodyPr wrap="square" lIns="0" tIns="0" rIns="0" bIns="0" rtlCol="0" anchor="ctr"/>
           <a:lstStyle/>
           <a:p>
             <a:pPr indent="0" marL="0">
-              <a:lnSpc>
-                <a:spcPct val="130000"/>
-              </a:lnSpc>
               <a:buNone/>
             </a:pPr>
             <a:r>
-              <a:rPr lang="en-US" sz="1500" dirty="0">
+              <a:rPr lang="en-US" sz="1100" dirty="0">
                 <a:solidFill>
-                  <a:srgbClr val="3D3A36"/>
+                  <a:srgbClr val="6B6660"/>
                 </a:solidFill>
                 <a:latin typeface="Calibri" pitchFamily="34" charset="0"/>
                 <a:ea typeface="Calibri" pitchFamily="34" charset="-122"/>
                 <a:cs typeface="Calibri" pitchFamily="34" charset="-120"/>
               </a:rPr>
-              <a:t>Every digit in a number has a value determined by its position. In the number 4,527: the 4 represents 4,000 (four thousands), the 5 represents 500 (five hundreds), the 2 represents 20 (two tens), and the 7 represents 7 (seven ones). Understanding place value is the foundation of all number work.</a:t>
-            </a:r>
-            <a:endParaRPr lang="en-US" sz="1500" dirty="0"/>
+              <a:t>The value of a digit based on its position</a:t>
+            </a:r>
+            <a:endParaRPr lang="en-US" sz="1100" dirty="0"/>
+          </a:p>
+        </p:txBody>
+      </p:sp>
+      <p:sp>
+        <p:nvSpPr>
+          <p:cNvPr id="14" name="Shape 12"/>
+          <p:cNvSpPr/>
+          <p:nvPr/>
+        </p:nvSpPr>
+        <p:spPr>
+          <a:xfrm>
+            <a:off x="731520" y="1819656"/>
+            <a:ext cx="3657600" cy="658368"/>
+          </a:xfrm>
+          <a:prstGeom prst="rect">
+            <a:avLst/>
+          </a:prstGeom>
+          <a:solidFill>
+            <a:srgbClr val="FFFFFF"/>
+          </a:solidFill>
+          <a:ln/>
+          <a:effectLst>
+            <a:outerShdw sx="100000" sy="100000" kx="0" ky="0" algn="bl" rotWithShape="0" blurRad="50800" dist="25400" dir="8100000">
+              <a:srgbClr val="000000">
+                <a:alpha val="10000"/>
+              </a:srgbClr>
+            </a:outerShdw>
+          </a:effectLst>
+        </p:spPr>
+      </p:sp>
+      <p:sp>
+        <p:nvSpPr>
+          <p:cNvPr id="15" name="Shape 13"/>
+          <p:cNvSpPr/>
+          <p:nvPr/>
+        </p:nvSpPr>
+        <p:spPr>
+          <a:xfrm>
+            <a:off x="731520" y="1819656"/>
+            <a:ext cx="54864" cy="658368"/>
+          </a:xfrm>
+          <a:prstGeom prst="rect">
+            <a:avLst/>
+          </a:prstGeom>
+          <a:solidFill>
+            <a:srgbClr val="2A9D8F"/>
+          </a:solidFill>
+          <a:ln/>
+        </p:spPr>
+      </p:sp>
+      <p:sp>
+        <p:nvSpPr>
+          <p:cNvPr id="16" name="Text 14"/>
+          <p:cNvSpPr/>
+          <p:nvPr/>
+        </p:nvSpPr>
+        <p:spPr>
+          <a:xfrm>
+            <a:off x="914400" y="1819656"/>
+            <a:ext cx="1463040" cy="658368"/>
+          </a:xfrm>
+          <a:prstGeom prst="rect">
+            <a:avLst/>
+          </a:prstGeom>
+          <a:noFill/>
+          <a:ln/>
+        </p:spPr>
+        <p:txBody>
+          <a:bodyPr wrap="square" lIns="0" tIns="0" rIns="0" bIns="0" rtlCol="0" anchor="ctr"/>
+          <a:lstStyle/>
+          <a:p>
+            <a:pPr indent="0" marL="0">
+              <a:buNone/>
+            </a:pPr>
+            <a:r>
+              <a:rPr lang="en-US" sz="1300" b="1" dirty="0">
+                <a:solidFill>
+                  <a:srgbClr val="1B2A4A"/>
+                </a:solidFill>
+                <a:latin typeface="Georgia" pitchFamily="34" charset="0"/>
+                <a:ea typeface="Georgia" pitchFamily="34" charset="-122"/>
+                <a:cs typeface="Georgia" pitchFamily="34" charset="-120"/>
+              </a:rPr>
+              <a:t>Ones</a:t>
+            </a:r>
+            <a:endParaRPr lang="en-US" sz="1300" dirty="0"/>
+          </a:p>
+        </p:txBody>
+      </p:sp>
+      <p:sp>
+        <p:nvSpPr>
+          <p:cNvPr id="17" name="Text 15"/>
+          <p:cNvSpPr/>
+          <p:nvPr/>
+        </p:nvSpPr>
+        <p:spPr>
+          <a:xfrm>
+            <a:off x="2377440" y="1819656"/>
+            <a:ext cx="1920240" cy="658368"/>
+          </a:xfrm>
+          <a:prstGeom prst="rect">
+            <a:avLst/>
+          </a:prstGeom>
+          <a:noFill/>
+          <a:ln/>
+        </p:spPr>
+        <p:txBody>
+          <a:bodyPr wrap="square" lIns="0" tIns="0" rIns="0" bIns="0" rtlCol="0" anchor="ctr"/>
+          <a:lstStyle/>
+          <a:p>
+            <a:pPr indent="0" marL="0">
+              <a:buNone/>
+            </a:pPr>
+            <a:r>
+              <a:rPr lang="en-US" sz="1100" dirty="0">
+                <a:solidFill>
+                  <a:srgbClr val="6B6660"/>
+                </a:solidFill>
+                <a:latin typeface="Calibri" pitchFamily="34" charset="0"/>
+                <a:ea typeface="Calibri" pitchFamily="34" charset="-122"/>
+                <a:cs typeface="Calibri" pitchFamily="34" charset="-120"/>
+              </a:rPr>
+              <a:t>Right-most column</a:t>
+            </a:r>
+            <a:endParaRPr lang="en-US" sz="1100" dirty="0"/>
+          </a:p>
+        </p:txBody>
+      </p:sp>
+      <p:sp>
+        <p:nvSpPr>
+          <p:cNvPr id="18" name="Shape 16"/>
+          <p:cNvSpPr/>
+          <p:nvPr/>
+        </p:nvSpPr>
+        <p:spPr>
+          <a:xfrm>
+            <a:off x="4754880" y="1819656"/>
+            <a:ext cx="3657600" cy="658368"/>
+          </a:xfrm>
+          <a:prstGeom prst="rect">
+            <a:avLst/>
+          </a:prstGeom>
+          <a:solidFill>
+            <a:srgbClr val="FFFFFF"/>
+          </a:solidFill>
+          <a:ln/>
+          <a:effectLst>
+            <a:outerShdw sx="100000" sy="100000" kx="0" ky="0" algn="bl" rotWithShape="0" blurRad="50800" dist="25400" dir="8100000">
+              <a:srgbClr val="000000">
+                <a:alpha val="10000"/>
+              </a:srgbClr>
+            </a:outerShdw>
+          </a:effectLst>
+        </p:spPr>
+      </p:sp>
+      <p:sp>
+        <p:nvSpPr>
+          <p:cNvPr id="19" name="Shape 17"/>
+          <p:cNvSpPr/>
+          <p:nvPr/>
+        </p:nvSpPr>
+        <p:spPr>
+          <a:xfrm>
+            <a:off x="4754880" y="1819656"/>
+            <a:ext cx="54864" cy="658368"/>
+          </a:xfrm>
+          <a:prstGeom prst="rect">
+            <a:avLst/>
+          </a:prstGeom>
+          <a:solidFill>
+            <a:srgbClr val="2A9D8F"/>
+          </a:solidFill>
+          <a:ln/>
+        </p:spPr>
+      </p:sp>
+      <p:sp>
+        <p:nvSpPr>
+          <p:cNvPr id="20" name="Text 18"/>
+          <p:cNvSpPr/>
+          <p:nvPr/>
+        </p:nvSpPr>
+        <p:spPr>
+          <a:xfrm>
+            <a:off x="4937760" y="1819656"/>
+            <a:ext cx="1463040" cy="658368"/>
+          </a:xfrm>
+          <a:prstGeom prst="rect">
+            <a:avLst/>
+          </a:prstGeom>
+          <a:noFill/>
+          <a:ln/>
+        </p:spPr>
+        <p:txBody>
+          <a:bodyPr wrap="square" lIns="0" tIns="0" rIns="0" bIns="0" rtlCol="0" anchor="ctr"/>
+          <a:lstStyle/>
+          <a:p>
+            <a:pPr indent="0" marL="0">
+              <a:buNone/>
+            </a:pPr>
+            <a:r>
+              <a:rPr lang="en-US" sz="1300" b="1" dirty="0">
+                <a:solidFill>
+                  <a:srgbClr val="1B2A4A"/>
+                </a:solidFill>
+                <a:latin typeface="Georgia" pitchFamily="34" charset="0"/>
+                <a:ea typeface="Georgia" pitchFamily="34" charset="-122"/>
+                <a:cs typeface="Georgia" pitchFamily="34" charset="-120"/>
+              </a:rPr>
+              <a:t>Tens</a:t>
+            </a:r>
+            <a:endParaRPr lang="en-US" sz="1300" dirty="0"/>
+          </a:p>
+        </p:txBody>
+      </p:sp>
+      <p:sp>
+        <p:nvSpPr>
+          <p:cNvPr id="21" name="Text 19"/>
+          <p:cNvSpPr/>
+          <p:nvPr/>
+        </p:nvSpPr>
+        <p:spPr>
+          <a:xfrm>
+            <a:off x="6400800" y="1819656"/>
+            <a:ext cx="1920240" cy="658368"/>
+          </a:xfrm>
+          <a:prstGeom prst="rect">
+            <a:avLst/>
+          </a:prstGeom>
+          <a:noFill/>
+          <a:ln/>
+        </p:spPr>
+        <p:txBody>
+          <a:bodyPr wrap="square" lIns="0" tIns="0" rIns="0" bIns="0" rtlCol="0" anchor="ctr"/>
+          <a:lstStyle/>
+          <a:p>
+            <a:pPr indent="0" marL="0">
+              <a:buNone/>
+            </a:pPr>
+            <a:r>
+              <a:rPr lang="en-US" sz="1100" dirty="0">
+                <a:solidFill>
+                  <a:srgbClr val="6B6660"/>
+                </a:solidFill>
+                <a:latin typeface="Calibri" pitchFamily="34" charset="0"/>
+                <a:ea typeface="Calibri" pitchFamily="34" charset="-122"/>
+                <a:cs typeface="Calibri" pitchFamily="34" charset="-120"/>
+              </a:rPr>
+              <a:t>Second column from right</a:t>
+            </a:r>
+            <a:endParaRPr lang="en-US" sz="1100" dirty="0"/>
+          </a:p>
+        </p:txBody>
+      </p:sp>
+      <p:sp>
+        <p:nvSpPr>
+          <p:cNvPr id="22" name="Shape 20"/>
+          <p:cNvSpPr/>
+          <p:nvPr/>
+        </p:nvSpPr>
+        <p:spPr>
+          <a:xfrm>
+            <a:off x="731520" y="2587752"/>
+            <a:ext cx="3657600" cy="658368"/>
+          </a:xfrm>
+          <a:prstGeom prst="rect">
+            <a:avLst/>
+          </a:prstGeom>
+          <a:solidFill>
+            <a:srgbClr val="FFFFFF"/>
+          </a:solidFill>
+          <a:ln/>
+          <a:effectLst>
+            <a:outerShdw sx="100000" sy="100000" kx="0" ky="0" algn="bl" rotWithShape="0" blurRad="50800" dist="25400" dir="8100000">
+              <a:srgbClr val="000000">
+                <a:alpha val="10000"/>
+              </a:srgbClr>
+            </a:outerShdw>
+          </a:effectLst>
+        </p:spPr>
+      </p:sp>
+      <p:sp>
+        <p:nvSpPr>
+          <p:cNvPr id="23" name="Shape 21"/>
+          <p:cNvSpPr/>
+          <p:nvPr/>
+        </p:nvSpPr>
+        <p:spPr>
+          <a:xfrm>
+            <a:off x="731520" y="2587752"/>
+            <a:ext cx="54864" cy="658368"/>
+          </a:xfrm>
+          <a:prstGeom prst="rect">
+            <a:avLst/>
+          </a:prstGeom>
+          <a:solidFill>
+            <a:srgbClr val="2A9D8F"/>
+          </a:solidFill>
+          <a:ln/>
+        </p:spPr>
+      </p:sp>
+      <p:sp>
+        <p:nvSpPr>
+          <p:cNvPr id="24" name="Text 22"/>
+          <p:cNvSpPr/>
+          <p:nvPr/>
+        </p:nvSpPr>
+        <p:spPr>
+          <a:xfrm>
+            <a:off x="914400" y="2587752"/>
+            <a:ext cx="1463040" cy="658368"/>
+          </a:xfrm>
+          <a:prstGeom prst="rect">
+            <a:avLst/>
+          </a:prstGeom>
+          <a:noFill/>
+          <a:ln/>
+        </p:spPr>
+        <p:txBody>
+          <a:bodyPr wrap="square" lIns="0" tIns="0" rIns="0" bIns="0" rtlCol="0" anchor="ctr"/>
+          <a:lstStyle/>
+          <a:p>
+            <a:pPr indent="0" marL="0">
+              <a:buNone/>
+            </a:pPr>
+            <a:r>
+              <a:rPr lang="en-US" sz="1300" b="1" dirty="0">
+                <a:solidFill>
+                  <a:srgbClr val="1B2A4A"/>
+                </a:solidFill>
+                <a:latin typeface="Georgia" pitchFamily="34" charset="0"/>
+                <a:ea typeface="Georgia" pitchFamily="34" charset="-122"/>
+                <a:cs typeface="Georgia" pitchFamily="34" charset="-120"/>
+              </a:rPr>
+              <a:t>Hundreds</a:t>
+            </a:r>
+            <a:endParaRPr lang="en-US" sz="1300" dirty="0"/>
+          </a:p>
+        </p:txBody>
+      </p:sp>
+      <p:sp>
+        <p:nvSpPr>
+          <p:cNvPr id="25" name="Text 23"/>
+          <p:cNvSpPr/>
+          <p:nvPr/>
+        </p:nvSpPr>
+        <p:spPr>
+          <a:xfrm>
+            <a:off x="2377440" y="2587752"/>
+            <a:ext cx="1920240" cy="658368"/>
+          </a:xfrm>
+          <a:prstGeom prst="rect">
+            <a:avLst/>
+          </a:prstGeom>
+          <a:noFill/>
+          <a:ln/>
+        </p:spPr>
+        <p:txBody>
+          <a:bodyPr wrap="square" lIns="0" tIns="0" rIns="0" bIns="0" rtlCol="0" anchor="ctr"/>
+          <a:lstStyle/>
+          <a:p>
+            <a:pPr indent="0" marL="0">
+              <a:buNone/>
+            </a:pPr>
+            <a:r>
+              <a:rPr lang="en-US" sz="1100" dirty="0">
+                <a:solidFill>
+                  <a:srgbClr val="6B6660"/>
+                </a:solidFill>
+                <a:latin typeface="Calibri" pitchFamily="34" charset="0"/>
+                <a:ea typeface="Calibri" pitchFamily="34" charset="-122"/>
+                <a:cs typeface="Calibri" pitchFamily="34" charset="-120"/>
+              </a:rPr>
+              <a:t>Third column</a:t>
+            </a:r>
+            <a:endParaRPr lang="en-US" sz="1100" dirty="0"/>
+          </a:p>
+        </p:txBody>
+      </p:sp>
+      <p:sp>
+        <p:nvSpPr>
+          <p:cNvPr id="26" name="Shape 24"/>
+          <p:cNvSpPr/>
+          <p:nvPr/>
+        </p:nvSpPr>
+        <p:spPr>
+          <a:xfrm>
+            <a:off x="4754880" y="2587752"/>
+            <a:ext cx="3657600" cy="658368"/>
+          </a:xfrm>
+          <a:prstGeom prst="rect">
+            <a:avLst/>
+          </a:prstGeom>
+          <a:solidFill>
+            <a:srgbClr val="FFFFFF"/>
+          </a:solidFill>
+          <a:ln/>
+          <a:effectLst>
+            <a:outerShdw sx="100000" sy="100000" kx="0" ky="0" algn="bl" rotWithShape="0" blurRad="50800" dist="25400" dir="8100000">
+              <a:srgbClr val="000000">
+                <a:alpha val="10000"/>
+              </a:srgbClr>
+            </a:outerShdw>
+          </a:effectLst>
+        </p:spPr>
+      </p:sp>
+      <p:sp>
+        <p:nvSpPr>
+          <p:cNvPr id="27" name="Shape 25"/>
+          <p:cNvSpPr/>
+          <p:nvPr/>
+        </p:nvSpPr>
+        <p:spPr>
+          <a:xfrm>
+            <a:off x="4754880" y="2587752"/>
+            <a:ext cx="54864" cy="658368"/>
+          </a:xfrm>
+          <a:prstGeom prst="rect">
+            <a:avLst/>
+          </a:prstGeom>
+          <a:solidFill>
+            <a:srgbClr val="2A9D8F"/>
+          </a:solidFill>
+          <a:ln/>
+        </p:spPr>
+      </p:sp>
+      <p:sp>
+        <p:nvSpPr>
+          <p:cNvPr id="28" name="Text 26"/>
+          <p:cNvSpPr/>
+          <p:nvPr/>
+        </p:nvSpPr>
+        <p:spPr>
+          <a:xfrm>
+            <a:off x="4937760" y="2587752"/>
+            <a:ext cx="1463040" cy="658368"/>
+          </a:xfrm>
+          <a:prstGeom prst="rect">
+            <a:avLst/>
+          </a:prstGeom>
+          <a:noFill/>
+          <a:ln/>
+        </p:spPr>
+        <p:txBody>
+          <a:bodyPr wrap="square" lIns="0" tIns="0" rIns="0" bIns="0" rtlCol="0" anchor="ctr"/>
+          <a:lstStyle/>
+          <a:p>
+            <a:pPr indent="0" marL="0">
+              <a:buNone/>
+            </a:pPr>
+            <a:r>
+              <a:rPr lang="en-US" sz="1300" b="1" dirty="0">
+                <a:solidFill>
+                  <a:srgbClr val="1B2A4A"/>
+                </a:solidFill>
+                <a:latin typeface="Georgia" pitchFamily="34" charset="0"/>
+                <a:ea typeface="Georgia" pitchFamily="34" charset="-122"/>
+                <a:cs typeface="Georgia" pitchFamily="34" charset="-120"/>
+              </a:rPr>
+              <a:t>Thousands</a:t>
+            </a:r>
+            <a:endParaRPr lang="en-US" sz="1300" dirty="0"/>
+          </a:p>
+        </p:txBody>
+      </p:sp>
+      <p:sp>
+        <p:nvSpPr>
+          <p:cNvPr id="29" name="Text 27"/>
+          <p:cNvSpPr/>
+          <p:nvPr/>
+        </p:nvSpPr>
+        <p:spPr>
+          <a:xfrm>
+            <a:off x="6400800" y="2587752"/>
+            <a:ext cx="1920240" cy="658368"/>
+          </a:xfrm>
+          <a:prstGeom prst="rect">
+            <a:avLst/>
+          </a:prstGeom>
+          <a:noFill/>
+          <a:ln/>
+        </p:spPr>
+        <p:txBody>
+          <a:bodyPr wrap="square" lIns="0" tIns="0" rIns="0" bIns="0" rtlCol="0" anchor="ctr"/>
+          <a:lstStyle/>
+          <a:p>
+            <a:pPr indent="0" marL="0">
+              <a:buNone/>
+            </a:pPr>
+            <a:r>
+              <a:rPr lang="en-US" sz="1100" dirty="0">
+                <a:solidFill>
+                  <a:srgbClr val="6B6660"/>
+                </a:solidFill>
+                <a:latin typeface="Calibri" pitchFamily="34" charset="0"/>
+                <a:ea typeface="Calibri" pitchFamily="34" charset="-122"/>
+                <a:cs typeface="Calibri" pitchFamily="34" charset="-120"/>
+              </a:rPr>
+              <a:t>Fourth column</a:t>
+            </a:r>
+            <a:endParaRPr lang="en-US" sz="1100" dirty="0"/>
           </a:p>
         </p:txBody>
       </p:sp>
@@ -1655,7 +2648,47 @@
         <p:spPr>
           <a:xfrm>
             <a:off x="0" y="0"/>
-            <a:ext cx="9144000" cy="54864"/>
+            <a:ext cx="9144000" cy="822960"/>
+          </a:xfrm>
+          <a:prstGeom prst="rect">
+            <a:avLst/>
+          </a:prstGeom>
+          <a:solidFill>
+            <a:srgbClr val="FFFFFF"/>
+          </a:solidFill>
+          <a:ln/>
+        </p:spPr>
+      </p:sp>
+      <p:sp>
+        <p:nvSpPr>
+          <p:cNvPr id="3" name="Shape 1"/>
+          <p:cNvSpPr/>
+          <p:nvPr/>
+        </p:nvSpPr>
+        <p:spPr>
+          <a:xfrm>
+            <a:off x="0" y="804672"/>
+            <a:ext cx="9144000" cy="27432"/>
+          </a:xfrm>
+          <a:prstGeom prst="rect">
+            <a:avLst/>
+          </a:prstGeom>
+          <a:solidFill>
+            <a:srgbClr val="E5E2DC"/>
+          </a:solidFill>
+          <a:ln/>
+        </p:spPr>
+      </p:sp>
+      <p:sp>
+        <p:nvSpPr>
+          <p:cNvPr id="4" name="Shape 2"/>
+          <p:cNvSpPr/>
+          <p:nvPr/>
+        </p:nvSpPr>
+        <p:spPr>
+          <a:xfrm>
+            <a:off x="548640" y="201168"/>
+            <a:ext cx="54864" cy="420624"/>
           </a:xfrm>
           <a:prstGeom prst="rect">
             <a:avLst/>
@@ -1668,14 +2701,14 @@
       </p:sp>
       <p:sp>
         <p:nvSpPr>
-          <p:cNvPr id="3" name="Text 1"/>
-          <p:cNvSpPr/>
-          <p:nvPr/>
-        </p:nvSpPr>
-        <p:spPr>
-          <a:xfrm>
-            <a:off x="7772400" y="4709160"/>
-            <a:ext cx="1097280" cy="320040"/>
+          <p:cNvPr id="5" name="Text 3"/>
+          <p:cNvSpPr/>
+          <p:nvPr/>
+        </p:nvSpPr>
+        <p:spPr>
+          <a:xfrm>
+            <a:off x="777240" y="137160"/>
+            <a:ext cx="7772400" cy="548640"/>
           </a:xfrm>
           <a:prstGeom prst="rect">
             <a:avLst/>
@@ -1684,53 +2717,14 @@
           <a:ln/>
         </p:spPr>
         <p:txBody>
-          <a:bodyPr wrap="square" rtlCol="0" anchor="ctr"/>
-          <a:lstStyle/>
-          <a:p>
-            <a:pPr algn="r" indent="0" marL="0">
-              <a:buNone/>
-            </a:pPr>
-            <a:r>
-              <a:rPr lang="en-US" sz="900" dirty="0">
-                <a:solidFill>
-                  <a:srgbClr val="6B6660"/>
-                </a:solidFill>
-                <a:latin typeface="Calibri" pitchFamily="34" charset="0"/>
-                <a:ea typeface="Calibri" pitchFamily="34" charset="-122"/>
-                <a:cs typeface="Calibri" pitchFamily="34" charset="-120"/>
-              </a:rPr>
-              <a:t>3 / 5</a:t>
-            </a:r>
-            <a:endParaRPr lang="en-US" sz="900" dirty="0"/>
-          </a:p>
-        </p:txBody>
-      </p:sp>
-      <p:sp>
-        <p:nvSpPr>
-          <p:cNvPr id="4" name="Text 2"/>
-          <p:cNvSpPr/>
-          <p:nvPr/>
-        </p:nvSpPr>
-        <p:spPr>
-          <a:xfrm>
-            <a:off x="457200" y="274320"/>
-            <a:ext cx="8229600" cy="640080"/>
-          </a:xfrm>
-          <a:prstGeom prst="rect">
-            <a:avLst/>
-          </a:prstGeom>
-          <a:noFill/>
-          <a:ln/>
-        </p:spPr>
-        <p:txBody>
-          <a:bodyPr wrap="square" rtlCol="0" anchor="ctr"/>
+          <a:bodyPr wrap="square" lIns="0" tIns="0" rIns="0" bIns="0" rtlCol="0" anchor="ctr"/>
           <a:lstStyle/>
           <a:p>
             <a:pPr indent="0" marL="0">
               <a:buNone/>
             </a:pPr>
             <a:r>
-              <a:rPr lang="en-US" sz="2600" b="1" dirty="0">
+              <a:rPr lang="en-US" sz="2000" b="1" dirty="0">
                 <a:solidFill>
                   <a:srgbClr val="1B2A4A"/>
                 </a:solidFill>
@@ -1738,22 +2732,22 @@
                 <a:ea typeface="Georgia" pitchFamily="34" charset="-122"/>
                 <a:cs typeface="Georgia" pitchFamily="34" charset="-120"/>
               </a:rPr>
-              <a:t>Place Value Chart</a:t>
-            </a:r>
-            <a:endParaRPr lang="en-US" sz="2600" dirty="0"/>
-          </a:p>
-        </p:txBody>
-      </p:sp>
-      <p:sp>
-        <p:nvSpPr>
-          <p:cNvPr id="5" name="Text 3"/>
-          <p:cNvSpPr/>
-          <p:nvPr/>
-        </p:nvSpPr>
-        <p:spPr>
-          <a:xfrm>
-            <a:off x="457200" y="1188720"/>
-            <a:ext cx="3840480" cy="3474720"/>
+              <a:t>What Is Place Value?</a:t>
+            </a:r>
+            <a:endParaRPr lang="en-US" sz="2000" dirty="0"/>
+          </a:p>
+        </p:txBody>
+      </p:sp>
+      <p:sp>
+        <p:nvSpPr>
+          <p:cNvPr id="6" name="Text 4"/>
+          <p:cNvSpPr/>
+          <p:nvPr/>
+        </p:nvSpPr>
+        <p:spPr>
+          <a:xfrm>
+            <a:off x="731520" y="1051560"/>
+            <a:ext cx="7680960" cy="3108960"/>
           </a:xfrm>
           <a:prstGeom prst="rect">
             <a:avLst/>
@@ -1767,13 +2761,13 @@
           <a:p>
             <a:pPr marL="342900" indent="-342900">
               <a:spcAft>
-                <a:spcPts val="600"/>
+                <a:spcPts val="800"/>
               </a:spcAft>
               <a:buSzPct val="100000"/>
               <a:buChar char="•"/>
             </a:pPr>
             <a:r>
-              <a:rPr lang="en-US" sz="1400" dirty="0">
+              <a:rPr lang="en-US" sz="1500" dirty="0">
                 <a:solidFill>
                   <a:srgbClr val="3D3A36"/>
                 </a:solidFill>
@@ -1781,20 +2775,20 @@
                 <a:ea typeface="Calibri" pitchFamily="34" charset="-122"/>
                 <a:cs typeface="Calibri" pitchFamily="34" charset="-120"/>
               </a:rPr>
-              <a:t>Millions, Hundred-thousands, Ten-thousands, Thousands, Hundreds, Tens, Ones</a:t>
-            </a:r>
-            <a:endParaRPr lang="en-US" sz="1400" dirty="0"/>
+              <a:t>The POSITION of a digit tells you its VALUE.</a:t>
+            </a:r>
+            <a:endParaRPr lang="en-US" sz="1500" dirty="0"/>
           </a:p>
           <a:p>
             <a:pPr marL="342900" indent="-342900">
               <a:spcAft>
-                <a:spcPts val="600"/>
+                <a:spcPts val="800"/>
               </a:spcAft>
               <a:buSzPct val="100000"/>
               <a:buChar char="•"/>
             </a:pPr>
             <a:r>
-              <a:rPr lang="en-US" sz="1400" dirty="0">
+              <a:rPr lang="en-US" sz="1500" dirty="0">
                 <a:solidFill>
                   <a:srgbClr val="3D3A36"/>
                 </a:solidFill>
@@ -1802,20 +2796,20 @@
                 <a:ea typeface="Calibri" pitchFamily="34" charset="-122"/>
                 <a:cs typeface="Calibri" pitchFamily="34" charset="-120"/>
               </a:rPr>
-              <a:t>Example: 3,805,214</a:t>
-            </a:r>
-            <a:endParaRPr lang="en-US" sz="1400" dirty="0"/>
+              <a:t>In 3,472: the 3 means 3,000 (three thousand), the 4 means 400 (four hundred).</a:t>
+            </a:r>
+            <a:endParaRPr lang="en-US" sz="1500" dirty="0"/>
           </a:p>
           <a:p>
             <a:pPr marL="342900" indent="-342900">
               <a:spcAft>
-                <a:spcPts val="600"/>
+                <a:spcPts val="800"/>
               </a:spcAft>
               <a:buSzPct val="100000"/>
               <a:buChar char="•"/>
             </a:pPr>
             <a:r>
-              <a:rPr lang="en-US" sz="1400" dirty="0">
+              <a:rPr lang="en-US" sz="1500" dirty="0">
                 <a:solidFill>
                   <a:srgbClr val="3D3A36"/>
                 </a:solidFill>
@@ -1823,20 +2817,20 @@
                 <a:ea typeface="Calibri" pitchFamily="34" charset="-122"/>
                 <a:cs typeface="Calibri" pitchFamily="34" charset="-120"/>
               </a:rPr>
-              <a:t>3 millions, 8 hundred-thousands, 0 ten-thousands, 5 thousands, 2 hundreds, 1 ten, 4 ones</a:t>
-            </a:r>
-            <a:endParaRPr lang="en-US" sz="1400" dirty="0"/>
+              <a:t>Each place is 10 times bigger than the one to its right.</a:t>
+            </a:r>
+            <a:endParaRPr lang="en-US" sz="1500" dirty="0"/>
           </a:p>
           <a:p>
             <a:pPr marL="342900" indent="-342900">
               <a:spcAft>
-                <a:spcPts val="600"/>
+                <a:spcPts val="800"/>
               </a:spcAft>
               <a:buSzPct val="100000"/>
               <a:buChar char="•"/>
             </a:pPr>
             <a:r>
-              <a:rPr lang="en-US" sz="1400" dirty="0">
+              <a:rPr lang="en-US" sz="1500" dirty="0">
                 <a:solidFill>
                   <a:srgbClr val="3D3A36"/>
                 </a:solidFill>
@@ -1844,20 +2838,20 @@
                 <a:ea typeface="Calibri" pitchFamily="34" charset="-122"/>
                 <a:cs typeface="Calibri" pitchFamily="34" charset="-120"/>
               </a:rPr>
-              <a:t>Decimals extend right: tenths, hundredths, thousandths</a:t>
-            </a:r>
-            <a:endParaRPr lang="en-US" sz="1400" dirty="0"/>
+              <a:t>Moving left: ones → tens → hundreds → thousands → ten thousands.</a:t>
+            </a:r>
+            <a:endParaRPr lang="en-US" sz="1500" dirty="0"/>
           </a:p>
           <a:p>
             <a:pPr marL="342900" indent="-342900">
               <a:spcAft>
-                <a:spcPts val="600"/>
+                <a:spcPts val="800"/>
               </a:spcAft>
               <a:buSzPct val="100000"/>
               <a:buChar char="•"/>
             </a:pPr>
             <a:r>
-              <a:rPr lang="en-US" sz="1400" dirty="0">
+              <a:rPr lang="en-US" sz="1500" dirty="0">
                 <a:solidFill>
                   <a:srgbClr val="3D3A36"/>
                 </a:solidFill>
@@ -1865,35 +2859,30 @@
                 <a:ea typeface="Calibri" pitchFamily="34" charset="-122"/>
                 <a:cs typeface="Calibri" pitchFamily="34" charset="-120"/>
               </a:rPr>
-              <a:t>Example: 6.35 = 6 ones, 3 tenths, 5 hundredths</a:t>
-            </a:r>
-            <a:endParaRPr lang="en-US" sz="1400" dirty="0"/>
-          </a:p>
-        </p:txBody>
-      </p:sp>
-      <p:sp>
-        <p:nvSpPr>
-          <p:cNvPr id="6" name="Shape 4"/>
-          <p:cNvSpPr/>
-          <p:nvPr/>
-        </p:nvSpPr>
-        <p:spPr>
-          <a:xfrm>
-            <a:off x="4846320" y="1188720"/>
-            <a:ext cx="3840480" cy="3474720"/>
+              <a:t>Moving right: ones → tenths → hundredths → thousandths (decimals).</a:t>
+            </a:r>
+            <a:endParaRPr lang="en-US" sz="1500" dirty="0"/>
+          </a:p>
+        </p:txBody>
+      </p:sp>
+      <p:sp>
+        <p:nvSpPr>
+          <p:cNvPr id="7" name="Shape 5"/>
+          <p:cNvSpPr/>
+          <p:nvPr/>
+        </p:nvSpPr>
+        <p:spPr>
+          <a:xfrm>
+            <a:off x="731520" y="4206240"/>
+            <a:ext cx="7680960" cy="640080"/>
           </a:xfrm>
           <a:prstGeom prst="rect">
             <a:avLst/>
           </a:prstGeom>
           <a:solidFill>
-            <a:srgbClr val="FFFFFF"/>
+            <a:srgbClr val="E8F5F3"/>
           </a:solidFill>
-          <a:ln w="12700">
-            <a:solidFill>
-              <a:srgbClr val="E5E2DC"/>
-            </a:solidFill>
-            <a:prstDash val="solid"/>
-          </a:ln>
+          <a:ln/>
           <a:effectLst>
             <a:outerShdw sx="100000" sy="100000" kx="0" ky="0" algn="bl" rotWithShape="0" blurRad="50800" dist="25400" dir="8100000">
               <a:srgbClr val="000000">
@@ -1905,34 +2894,14 @@
       </p:sp>
       <p:sp>
         <p:nvSpPr>
-          <p:cNvPr id="7" name="Shape 5"/>
-          <p:cNvSpPr/>
-          <p:nvPr/>
-        </p:nvSpPr>
-        <p:spPr>
-          <a:xfrm>
-            <a:off x="4846320" y="1188720"/>
-            <a:ext cx="3840480" cy="54864"/>
-          </a:xfrm>
-          <a:prstGeom prst="rect">
-            <a:avLst/>
-          </a:prstGeom>
-          <a:solidFill>
-            <a:srgbClr val="2A9D8F"/>
-          </a:solidFill>
-          <a:ln/>
-        </p:spPr>
-      </p:sp>
-      <p:sp>
-        <p:nvSpPr>
           <p:cNvPr id="8" name="Text 6"/>
           <p:cNvSpPr/>
           <p:nvPr/>
         </p:nvSpPr>
         <p:spPr>
           <a:xfrm>
-            <a:off x="5120640" y="1371600"/>
-            <a:ext cx="3291840" cy="3108960"/>
+            <a:off x="914400" y="4251960"/>
+            <a:ext cx="7315200" cy="548640"/>
           </a:xfrm>
           <a:prstGeom prst="rect">
             <a:avLst/>
@@ -1941,46 +2910,28 @@
           <a:ln/>
         </p:spPr>
         <p:txBody>
-          <a:bodyPr wrap="square" rtlCol="0" anchor="t"/>
+          <a:bodyPr wrap="square" rtlCol="0" anchor="ctr"/>
           <a:lstStyle/>
           <a:p>
             <a:pPr indent="0" marL="0">
-              <a:spcAft>
-                <a:spcPts val="400"/>
-              </a:spcAft>
               <a:buNone/>
             </a:pPr>
             <a:r>
-              <a:rPr lang="en-US" sz="1600" b="1" dirty="0">
+              <a:rPr lang="en-US" sz="1200" b="1" dirty="0">
                 <a:solidFill>
-                  <a:srgbClr val="1B2A4A"/>
+                  <a:srgbClr val="2A9D8F"/>
                 </a:solidFill>
                 <a:latin typeface="Calibri" pitchFamily="34" charset="0"/>
                 <a:ea typeface="Calibri" pitchFamily="34" charset="-122"/>
                 <a:cs typeface="Calibri" pitchFamily="34" charset="-120"/>
               </a:rPr>
-              <a:t>Reading Large Numbers</a:t>
-            </a:r>
-            <a:endParaRPr lang="en-US" sz="1600" dirty="0"/>
-          </a:p>
-          <a:p>
+              <a:t>Key Idea: </a:t>
+            </a:r>
             <a:pPr indent="0" marL="0">
-              <a:spcAft>
-                <a:spcPts val="400"/>
-              </a:spcAft>
               <a:buNone/>
             </a:pPr>
-            <a:endParaRPr lang="en-US" sz="1600" dirty="0"/>
-          </a:p>
-          <a:p>
-            <a:pPr indent="0" marL="0">
-              <a:spcAft>
-                <a:spcPts val="400"/>
-              </a:spcAft>
-              <a:buNone/>
-            </a:pPr>
-            <a:r>
-              <a:rPr lang="en-US" sz="1300" dirty="0">
+            <a:r>
+              <a:rPr lang="en-US" sz="1200" i="1" dirty="0">
                 <a:solidFill>
                   <a:srgbClr val="3D3A36"/>
                 </a:solidFill>
@@ -1988,89 +2939,9 @@
                 <a:ea typeface="Calibri" pitchFamily="34" charset="-122"/>
                 <a:cs typeface="Calibri" pitchFamily="34" charset="-120"/>
               </a:rPr>
-              <a:t>Use commas to separate groups of three digits</a:t>
-            </a:r>
-            <a:endParaRPr lang="en-US" sz="1600" dirty="0"/>
-          </a:p>
-          <a:p>
-            <a:pPr indent="0" marL="0">
-              <a:spcAft>
-                <a:spcPts val="400"/>
-              </a:spcAft>
-              <a:buNone/>
-            </a:pPr>
-            <a:r>
-              <a:rPr lang="en-US" sz="1300" dirty="0">
-                <a:solidFill>
-                  <a:srgbClr val="3D3A36"/>
-                </a:solidFill>
-                <a:latin typeface="Calibri" pitchFamily="34" charset="0"/>
-                <a:ea typeface="Calibri" pitchFamily="34" charset="-122"/>
-                <a:cs typeface="Calibri" pitchFamily="34" charset="-120"/>
-              </a:rPr>
-              <a:t>4,500,000 = 'four million, five hundred thousand'</a:t>
-            </a:r>
-            <a:endParaRPr lang="en-US" sz="1600" dirty="0"/>
-          </a:p>
-          <a:p>
-            <a:pPr indent="0" marL="0">
-              <a:spcAft>
-                <a:spcPts val="400"/>
-              </a:spcAft>
-              <a:buNone/>
-            </a:pPr>
-            <a:r>
-              <a:rPr lang="en-US" sz="1300" dirty="0">
-                <a:solidFill>
-                  <a:srgbClr val="3D3A36"/>
-                </a:solidFill>
-                <a:latin typeface="Calibri" pitchFamily="34" charset="0"/>
-                <a:ea typeface="Calibri" pitchFamily="34" charset="-122"/>
-                <a:cs typeface="Calibri" pitchFamily="34" charset="-120"/>
-              </a:rPr>
-              <a:t>Read from left to right, group by group</a:t>
-            </a:r>
-            <a:endParaRPr lang="en-US" sz="1600" dirty="0"/>
-          </a:p>
-          <a:p>
-            <a:pPr indent="0" marL="0">
-              <a:spcAft>
-                <a:spcPts val="400"/>
-              </a:spcAft>
-              <a:buNone/>
-            </a:pPr>
-            <a:r>
-              <a:rPr lang="en-US" sz="1300" dirty="0">
-                <a:solidFill>
-                  <a:srgbClr val="3D3A36"/>
-                </a:solidFill>
-                <a:latin typeface="Calibri" pitchFamily="34" charset="0"/>
-                <a:ea typeface="Calibri" pitchFamily="34" charset="-122"/>
-                <a:cs typeface="Calibri" pitchFamily="34" charset="-120"/>
-              </a:rPr>
-              <a:t>Standard form: 4.5 × 10⁶ (for very large numbers)</a:t>
-            </a:r>
-            <a:endParaRPr lang="en-US" sz="1600" dirty="0"/>
-          </a:p>
-          <a:p>
-            <a:pPr indent="0" marL="0">
-              <a:spcAft>
-                <a:spcPts val="400"/>
-              </a:spcAft>
-              <a:buNone/>
-            </a:pPr>
-            <a:r>
-              <a:rPr lang="en-US" sz="1300" dirty="0">
-                <a:solidFill>
-                  <a:srgbClr val="3D3A36"/>
-                </a:solidFill>
-                <a:latin typeface="Calibri" pitchFamily="34" charset="0"/>
-                <a:ea typeface="Calibri" pitchFamily="34" charset="-122"/>
-                <a:cs typeface="Calibri" pitchFamily="34" charset="-120"/>
-              </a:rPr>
-              <a:t>Comparing: look at the leftmost digit first</a:t>
-            </a:r>
-            <a:endParaRPr lang="en-US" sz="1600" dirty="0"/>
+              <a:t>The same digit (e.g. 5) can mean 5, 50, 500, or 5000 depending on its position.</a:t>
+            </a:r>
+            <a:endParaRPr lang="en-US" sz="1200" dirty="0"/>
           </a:p>
         </p:txBody>
       </p:sp>
@@ -2115,7 +2986,47 @@
         <p:spPr>
           <a:xfrm>
             <a:off x="0" y="0"/>
-            <a:ext cx="9144000" cy="54864"/>
+            <a:ext cx="9144000" cy="822960"/>
+          </a:xfrm>
+          <a:prstGeom prst="rect">
+            <a:avLst/>
+          </a:prstGeom>
+          <a:solidFill>
+            <a:srgbClr val="FFFFFF"/>
+          </a:solidFill>
+          <a:ln/>
+        </p:spPr>
+      </p:sp>
+      <p:sp>
+        <p:nvSpPr>
+          <p:cNvPr id="3" name="Shape 1"/>
+          <p:cNvSpPr/>
+          <p:nvPr/>
+        </p:nvSpPr>
+        <p:spPr>
+          <a:xfrm>
+            <a:off x="0" y="804672"/>
+            <a:ext cx="9144000" cy="27432"/>
+          </a:xfrm>
+          <a:prstGeom prst="rect">
+            <a:avLst/>
+          </a:prstGeom>
+          <a:solidFill>
+            <a:srgbClr val="E5E2DC"/>
+          </a:solidFill>
+          <a:ln/>
+        </p:spPr>
+      </p:sp>
+      <p:sp>
+        <p:nvSpPr>
+          <p:cNvPr id="4" name="Shape 2"/>
+          <p:cNvSpPr/>
+          <p:nvPr/>
+        </p:nvSpPr>
+        <p:spPr>
+          <a:xfrm>
+            <a:off x="548640" y="201168"/>
+            <a:ext cx="54864" cy="420624"/>
           </a:xfrm>
           <a:prstGeom prst="rect">
             <a:avLst/>
@@ -2128,14 +3039,14 @@
       </p:sp>
       <p:sp>
         <p:nvSpPr>
-          <p:cNvPr id="3" name="Text 1"/>
-          <p:cNvSpPr/>
-          <p:nvPr/>
-        </p:nvSpPr>
-        <p:spPr>
-          <a:xfrm>
-            <a:off x="7772400" y="4709160"/>
-            <a:ext cx="1097280" cy="320040"/>
+          <p:cNvPr id="5" name="Text 3"/>
+          <p:cNvSpPr/>
+          <p:nvPr/>
+        </p:nvSpPr>
+        <p:spPr>
+          <a:xfrm>
+            <a:off x="777240" y="137160"/>
+            <a:ext cx="7772400" cy="548640"/>
           </a:xfrm>
           <a:prstGeom prst="rect">
             <a:avLst/>
@@ -2144,53 +3055,14 @@
           <a:ln/>
         </p:spPr>
         <p:txBody>
-          <a:bodyPr wrap="square" rtlCol="0" anchor="ctr"/>
-          <a:lstStyle/>
-          <a:p>
-            <a:pPr algn="r" indent="0" marL="0">
-              <a:buNone/>
-            </a:pPr>
-            <a:r>
-              <a:rPr lang="en-US" sz="900" dirty="0">
-                <a:solidFill>
-                  <a:srgbClr val="6B6660"/>
-                </a:solidFill>
-                <a:latin typeface="Calibri" pitchFamily="34" charset="0"/>
-                <a:ea typeface="Calibri" pitchFamily="34" charset="-122"/>
-                <a:cs typeface="Calibri" pitchFamily="34" charset="-120"/>
-              </a:rPr>
-              <a:t>4 / 5</a:t>
-            </a:r>
-            <a:endParaRPr lang="en-US" sz="900" dirty="0"/>
-          </a:p>
-        </p:txBody>
-      </p:sp>
-      <p:sp>
-        <p:nvSpPr>
-          <p:cNvPr id="4" name="Text 2"/>
-          <p:cNvSpPr/>
-          <p:nvPr/>
-        </p:nvSpPr>
-        <p:spPr>
-          <a:xfrm>
-            <a:off x="457200" y="274320"/>
-            <a:ext cx="8229600" cy="640080"/>
-          </a:xfrm>
-          <a:prstGeom prst="rect">
-            <a:avLst/>
-          </a:prstGeom>
-          <a:noFill/>
-          <a:ln/>
-        </p:spPr>
-        <p:txBody>
-          <a:bodyPr wrap="square" rtlCol="0" anchor="ctr"/>
+          <a:bodyPr wrap="square" lIns="0" tIns="0" rIns="0" bIns="0" rtlCol="0" anchor="ctr"/>
           <a:lstStyle/>
           <a:p>
             <a:pPr indent="0" marL="0">
               <a:buNone/>
             </a:pPr>
             <a:r>
-              <a:rPr lang="en-US" sz="2600" b="1" dirty="0">
+              <a:rPr lang="en-US" sz="2000" b="1" dirty="0">
                 <a:solidFill>
                   <a:srgbClr val="1B2A4A"/>
                 </a:solidFill>
@@ -2198,139 +3070,1675 @@
                 <a:ea typeface="Georgia" pitchFamily="34" charset="-122"/>
                 <a:cs typeface="Georgia" pitchFamily="34" charset="-120"/>
               </a:rPr>
-              <a:t>Ordering and Comparing Numbers</a:t>
-            </a:r>
-            <a:endParaRPr lang="en-US" sz="2600" dirty="0"/>
-          </a:p>
-        </p:txBody>
-      </p:sp>
-      <p:sp>
-        <p:nvSpPr>
-          <p:cNvPr id="5" name="Text 3"/>
-          <p:cNvSpPr/>
-          <p:nvPr/>
-        </p:nvSpPr>
-        <p:spPr>
-          <a:xfrm>
-            <a:off x="457200" y="1097280"/>
-            <a:ext cx="8229600" cy="3657600"/>
-          </a:xfrm>
-          <a:prstGeom prst="rect">
-            <a:avLst/>
-          </a:prstGeom>
-          <a:noFill/>
-          <a:ln/>
-        </p:spPr>
-        <p:txBody>
-          <a:bodyPr wrap="square" rtlCol="0" anchor="t"/>
-          <a:lstStyle/>
-          <a:p>
-            <a:pPr marL="342900" indent="-342900">
-              <a:spcAft>
-                <a:spcPts val="800"/>
-              </a:spcAft>
-              <a:buSzPct val="100000"/>
-              <a:buChar char="•"/>
-            </a:pPr>
-            <a:r>
-              <a:rPr lang="en-US" sz="1400" dirty="0">
-                <a:solidFill>
-                  <a:srgbClr val="3D3A36"/>
-                </a:solidFill>
-                <a:latin typeface="Calibri" pitchFamily="34" charset="0"/>
-                <a:ea typeface="Calibri" pitchFamily="34" charset="-122"/>
-                <a:cs typeface="Calibri" pitchFamily="34" charset="-120"/>
-              </a:rPr>
-              <a:t>Use &lt; (less than), &gt; (greater than), = (equal to)</a:t>
-            </a:r>
-            <a:endParaRPr lang="en-US" sz="1400" dirty="0"/>
-          </a:p>
-          <a:p>
-            <a:pPr marL="342900" indent="-342900">
-              <a:spcAft>
-                <a:spcPts val="800"/>
-              </a:spcAft>
-              <a:buSzPct val="100000"/>
-              <a:buChar char="•"/>
-            </a:pPr>
-            <a:r>
-              <a:rPr lang="en-US" sz="1400" dirty="0">
-                <a:solidFill>
-                  <a:srgbClr val="3D3A36"/>
-                </a:solidFill>
-                <a:latin typeface="Calibri" pitchFamily="34" charset="0"/>
-                <a:ea typeface="Calibri" pitchFamily="34" charset="-122"/>
-                <a:cs typeface="Calibri" pitchFamily="34" charset="-120"/>
-              </a:rPr>
-              <a:t>Compare digits from left to right, starting with the highest place value</a:t>
-            </a:r>
-            <a:endParaRPr lang="en-US" sz="1400" dirty="0"/>
-          </a:p>
-          <a:p>
-            <a:pPr marL="342900" indent="-342900">
-              <a:spcAft>
-                <a:spcPts val="800"/>
-              </a:spcAft>
-              <a:buSzPct val="100000"/>
-              <a:buChar char="•"/>
-            </a:pPr>
-            <a:r>
-              <a:rPr lang="en-US" sz="1400" dirty="0">
-                <a:solidFill>
-                  <a:srgbClr val="3D3A36"/>
-                </a:solidFill>
-                <a:latin typeface="Calibri" pitchFamily="34" charset="0"/>
-                <a:ea typeface="Calibri" pitchFamily="34" charset="-122"/>
-                <a:cs typeface="Calibri" pitchFamily="34" charset="-120"/>
-              </a:rPr>
-              <a:t>Example: 5,432 vs 5,438 — same until the ones place: 2 &lt; 8, so 5,432 &lt; 5,438</a:t>
-            </a:r>
-            <a:endParaRPr lang="en-US" sz="1400" dirty="0"/>
-          </a:p>
-          <a:p>
-            <a:pPr marL="342900" indent="-342900">
-              <a:spcAft>
-                <a:spcPts val="800"/>
-              </a:spcAft>
-              <a:buSzPct val="100000"/>
-              <a:buChar char="•"/>
-            </a:pPr>
-            <a:r>
-              <a:rPr lang="en-US" sz="1400" dirty="0">
-                <a:solidFill>
-                  <a:srgbClr val="3D3A36"/>
-                </a:solidFill>
-                <a:latin typeface="Calibri" pitchFamily="34" charset="0"/>
-                <a:ea typeface="Calibri" pitchFamily="34" charset="-122"/>
-                <a:cs typeface="Calibri" pitchFamily="34" charset="-120"/>
-              </a:rPr>
-              <a:t>For decimals: 0.35 vs 0.4 — write as 0.35 vs 0.40, compare tenths: 3 &lt; 4</a:t>
-            </a:r>
-            <a:endParaRPr lang="en-US" sz="1400" dirty="0"/>
-          </a:p>
-          <a:p>
-            <a:pPr marL="342900" indent="-342900">
-              <a:spcAft>
-                <a:spcPts val="800"/>
-              </a:spcAft>
-              <a:buSzPct val="100000"/>
-              <a:buChar char="•"/>
-            </a:pPr>
-            <a:r>
-              <a:rPr lang="en-US" sz="1400" dirty="0">
-                <a:solidFill>
-                  <a:srgbClr val="3D3A36"/>
-                </a:solidFill>
-                <a:latin typeface="Calibri" pitchFamily="34" charset="0"/>
-                <a:ea typeface="Calibri" pitchFamily="34" charset="-122"/>
-                <a:cs typeface="Calibri" pitchFamily="34" charset="-120"/>
-              </a:rPr>
-              <a:t>On a number line, numbers increase to the right</a:t>
-            </a:r>
-            <a:endParaRPr lang="en-US" sz="1400" dirty="0"/>
-          </a:p>
-        </p:txBody>
-      </p:sp>
+              <a:t>Place Value Chart — 45,238.16</a:t>
+            </a:r>
+            <a:endParaRPr lang="en-US" sz="2000" dirty="0"/>
+          </a:p>
+        </p:txBody>
+      </p:sp>
+      <p:graphicFrame>
+        <p:nvGraphicFramePr>
+          <p:cNvPr id="5" name="Table 0"/>
+          <p:cNvGraphicFramePr>
+            <a:graphicFrameLocks noGrp="1"/>
+          </p:cNvGraphicFramePr>
+          <p:nvPr>
+            <p:extLst>
+              <p:ext uri="{D42A27DB-BD31-4B8C-83A1-F6EECF244321}">
+                <p14:modId xmlns:p14="http://schemas.microsoft.com/office/powerpoint/2010/main" val="1579011935"/>
+              </p:ext>
+            </p:extLst>
+          </p:nvPr>
+        </p:nvGraphicFramePr>
+        <p:xfrm>
+          <a:off x="640080" y="1051560"/>
+          <a:ext cx="7863840" cy="914400"/>
+        </p:xfrm>
+        <a:graphic>
+          <a:graphicData uri="http://schemas.openxmlformats.org/drawingml/2006/table">
+            <a:tbl>
+              <a:tblPr/>
+              <a:tblGrid>
+                <a:gridCol w="982980"/>
+                <a:gridCol w="982980"/>
+                <a:gridCol w="982980"/>
+                <a:gridCol w="982980"/>
+                <a:gridCol w="982980"/>
+                <a:gridCol w="982980"/>
+                <a:gridCol w="982980"/>
+                <a:gridCol w="982980"/>
+              </a:tblGrid>
+              <a:tr h="502920">
+                <a:tc>
+                  <a:txBody>
+                    <a:bodyPr/>
+                    <a:lstStyle/>
+                    <a:p>
+                      <a:pPr indent="0" marL="0">
+                        <a:buNone/>
+                      </a:pPr>
+                      <a:r>
+                        <a:rPr lang="en-US" sz="1200" b="1" dirty="0">
+                          <a:solidFill>
+                            <a:srgbClr val="FFFFFF"/>
+                          </a:solidFill>
+                          <a:latin typeface="Calibri" pitchFamily="34" charset="0"/>
+                          <a:ea typeface="Calibri" pitchFamily="34" charset="-122"/>
+                          <a:cs typeface="Calibri" pitchFamily="34" charset="-120"/>
+                        </a:rPr>
+                        <a:t>Ten Thousands</a:t>
+                      </a:r>
+                      <a:endParaRPr lang="en-US" sz="1200" dirty="0">
+                        <a:latin typeface="Calibri" charset="0"/>
+                        <a:ea typeface="Calibri" charset="0"/>
+                        <a:cs typeface="Calibri" charset="0"/>
+                      </a:endParaRPr>
+                    </a:p>
+                  </a:txBody>
+                  <a:tcPr marL="91440" marR="91440" marT="45720" marB="45720">
+                    <a:lnL w="6350" cap="flat" cmpd="sng" algn="ctr">
+                      <a:solidFill>
+                        <a:srgbClr val="E5E2DC"/>
+                      </a:solidFill>
+                      <a:prstDash val="solid"/>
+                      <a:round/>
+                      <a:headEnd type="none" w="med" len="med"/>
+                      <a:tailEnd type="none" w="med" len="med"/>
+                    </a:lnL>
+                    <a:lnR w="6350" cap="flat" cmpd="sng" algn="ctr">
+                      <a:solidFill>
+                        <a:srgbClr val="E5E2DC"/>
+                      </a:solidFill>
+                      <a:prstDash val="solid"/>
+                      <a:round/>
+                      <a:headEnd type="none" w="med" len="med"/>
+                      <a:tailEnd type="none" w="med" len="med"/>
+                    </a:lnR>
+                    <a:lnT w="6350" cap="flat" cmpd="sng" algn="ctr">
+                      <a:solidFill>
+                        <a:srgbClr val="E5E2DC"/>
+                      </a:solidFill>
+                      <a:prstDash val="solid"/>
+                      <a:round/>
+                      <a:headEnd type="none" w="med" len="med"/>
+                      <a:tailEnd type="none" w="med" len="med"/>
+                    </a:lnT>
+                    <a:lnB w="6350" cap="flat" cmpd="sng" algn="ctr">
+                      <a:solidFill>
+                        <a:srgbClr val="E5E2DC"/>
+                      </a:solidFill>
+                      <a:prstDash val="solid"/>
+                      <a:round/>
+                      <a:headEnd type="none" w="med" len="med"/>
+                      <a:tailEnd type="none" w="med" len="med"/>
+                    </a:lnB>
+                    <a:solidFill>
+                      <a:srgbClr val="2A9D8F"/>
+                    </a:solidFill>
+                  </a:tcPr>
+                </a:tc>
+                <a:tc>
+                  <a:txBody>
+                    <a:bodyPr/>
+                    <a:lstStyle/>
+                    <a:p>
+                      <a:pPr indent="0" marL="0">
+                        <a:buNone/>
+                      </a:pPr>
+                      <a:r>
+                        <a:rPr lang="en-US" sz="1200" b="1" dirty="0">
+                          <a:solidFill>
+                            <a:srgbClr val="FFFFFF"/>
+                          </a:solidFill>
+                          <a:latin typeface="Calibri" pitchFamily="34" charset="0"/>
+                          <a:ea typeface="Calibri" pitchFamily="34" charset="-122"/>
+                          <a:cs typeface="Calibri" pitchFamily="34" charset="-120"/>
+                        </a:rPr>
+                        <a:t>Thousands</a:t>
+                      </a:r>
+                      <a:endParaRPr lang="en-US" sz="1200" dirty="0">
+                        <a:latin typeface="Calibri" charset="0"/>
+                        <a:ea typeface="Calibri" charset="0"/>
+                        <a:cs typeface="Calibri" charset="0"/>
+                      </a:endParaRPr>
+                    </a:p>
+                  </a:txBody>
+                  <a:tcPr marL="91440" marR="91440" marT="45720" marB="45720">
+                    <a:lnL w="6350" cap="flat" cmpd="sng" algn="ctr">
+                      <a:solidFill>
+                        <a:srgbClr val="E5E2DC"/>
+                      </a:solidFill>
+                      <a:prstDash val="solid"/>
+                      <a:round/>
+                      <a:headEnd type="none" w="med" len="med"/>
+                      <a:tailEnd type="none" w="med" len="med"/>
+                    </a:lnL>
+                    <a:lnR w="6350" cap="flat" cmpd="sng" algn="ctr">
+                      <a:solidFill>
+                        <a:srgbClr val="E5E2DC"/>
+                      </a:solidFill>
+                      <a:prstDash val="solid"/>
+                      <a:round/>
+                      <a:headEnd type="none" w="med" len="med"/>
+                      <a:tailEnd type="none" w="med" len="med"/>
+                    </a:lnR>
+                    <a:lnT w="6350" cap="flat" cmpd="sng" algn="ctr">
+                      <a:solidFill>
+                        <a:srgbClr val="E5E2DC"/>
+                      </a:solidFill>
+                      <a:prstDash val="solid"/>
+                      <a:round/>
+                      <a:headEnd type="none" w="med" len="med"/>
+                      <a:tailEnd type="none" w="med" len="med"/>
+                    </a:lnT>
+                    <a:lnB w="6350" cap="flat" cmpd="sng" algn="ctr">
+                      <a:solidFill>
+                        <a:srgbClr val="E5E2DC"/>
+                      </a:solidFill>
+                      <a:prstDash val="solid"/>
+                      <a:round/>
+                      <a:headEnd type="none" w="med" len="med"/>
+                      <a:tailEnd type="none" w="med" len="med"/>
+                    </a:lnB>
+                    <a:solidFill>
+                      <a:srgbClr val="2A9D8F"/>
+                    </a:solidFill>
+                  </a:tcPr>
+                </a:tc>
+                <a:tc>
+                  <a:txBody>
+                    <a:bodyPr/>
+                    <a:lstStyle/>
+                    <a:p>
+                      <a:pPr indent="0" marL="0">
+                        <a:buNone/>
+                      </a:pPr>
+                      <a:r>
+                        <a:rPr lang="en-US" sz="1200" b="1" dirty="0">
+                          <a:solidFill>
+                            <a:srgbClr val="FFFFFF"/>
+                          </a:solidFill>
+                          <a:latin typeface="Calibri" pitchFamily="34" charset="0"/>
+                          <a:ea typeface="Calibri" pitchFamily="34" charset="-122"/>
+                          <a:cs typeface="Calibri" pitchFamily="34" charset="-120"/>
+                        </a:rPr>
+                        <a:t>Hundreds</a:t>
+                      </a:r>
+                      <a:endParaRPr lang="en-US" sz="1200" dirty="0">
+                        <a:latin typeface="Calibri" charset="0"/>
+                        <a:ea typeface="Calibri" charset="0"/>
+                        <a:cs typeface="Calibri" charset="0"/>
+                      </a:endParaRPr>
+                    </a:p>
+                  </a:txBody>
+                  <a:tcPr marL="91440" marR="91440" marT="45720" marB="45720">
+                    <a:lnL w="6350" cap="flat" cmpd="sng" algn="ctr">
+                      <a:solidFill>
+                        <a:srgbClr val="E5E2DC"/>
+                      </a:solidFill>
+                      <a:prstDash val="solid"/>
+                      <a:round/>
+                      <a:headEnd type="none" w="med" len="med"/>
+                      <a:tailEnd type="none" w="med" len="med"/>
+                    </a:lnL>
+                    <a:lnR w="6350" cap="flat" cmpd="sng" algn="ctr">
+                      <a:solidFill>
+                        <a:srgbClr val="E5E2DC"/>
+                      </a:solidFill>
+                      <a:prstDash val="solid"/>
+                      <a:round/>
+                      <a:headEnd type="none" w="med" len="med"/>
+                      <a:tailEnd type="none" w="med" len="med"/>
+                    </a:lnR>
+                    <a:lnT w="6350" cap="flat" cmpd="sng" algn="ctr">
+                      <a:solidFill>
+                        <a:srgbClr val="E5E2DC"/>
+                      </a:solidFill>
+                      <a:prstDash val="solid"/>
+                      <a:round/>
+                      <a:headEnd type="none" w="med" len="med"/>
+                      <a:tailEnd type="none" w="med" len="med"/>
+                    </a:lnT>
+                    <a:lnB w="6350" cap="flat" cmpd="sng" algn="ctr">
+                      <a:solidFill>
+                        <a:srgbClr val="E5E2DC"/>
+                      </a:solidFill>
+                      <a:prstDash val="solid"/>
+                      <a:round/>
+                      <a:headEnd type="none" w="med" len="med"/>
+                      <a:tailEnd type="none" w="med" len="med"/>
+                    </a:lnB>
+                    <a:solidFill>
+                      <a:srgbClr val="2A9D8F"/>
+                    </a:solidFill>
+                  </a:tcPr>
+                </a:tc>
+                <a:tc>
+                  <a:txBody>
+                    <a:bodyPr/>
+                    <a:lstStyle/>
+                    <a:p>
+                      <a:pPr indent="0" marL="0">
+                        <a:buNone/>
+                      </a:pPr>
+                      <a:r>
+                        <a:rPr lang="en-US" sz="1200" b="1" dirty="0">
+                          <a:solidFill>
+                            <a:srgbClr val="FFFFFF"/>
+                          </a:solidFill>
+                          <a:latin typeface="Calibri" pitchFamily="34" charset="0"/>
+                          <a:ea typeface="Calibri" pitchFamily="34" charset="-122"/>
+                          <a:cs typeface="Calibri" pitchFamily="34" charset="-120"/>
+                        </a:rPr>
+                        <a:t>Tens</a:t>
+                      </a:r>
+                      <a:endParaRPr lang="en-US" sz="1200" dirty="0">
+                        <a:latin typeface="Calibri" charset="0"/>
+                        <a:ea typeface="Calibri" charset="0"/>
+                        <a:cs typeface="Calibri" charset="0"/>
+                      </a:endParaRPr>
+                    </a:p>
+                  </a:txBody>
+                  <a:tcPr marL="91440" marR="91440" marT="45720" marB="45720">
+                    <a:lnL w="6350" cap="flat" cmpd="sng" algn="ctr">
+                      <a:solidFill>
+                        <a:srgbClr val="E5E2DC"/>
+                      </a:solidFill>
+                      <a:prstDash val="solid"/>
+                      <a:round/>
+                      <a:headEnd type="none" w="med" len="med"/>
+                      <a:tailEnd type="none" w="med" len="med"/>
+                    </a:lnL>
+                    <a:lnR w="6350" cap="flat" cmpd="sng" algn="ctr">
+                      <a:solidFill>
+                        <a:srgbClr val="E5E2DC"/>
+                      </a:solidFill>
+                      <a:prstDash val="solid"/>
+                      <a:round/>
+                      <a:headEnd type="none" w="med" len="med"/>
+                      <a:tailEnd type="none" w="med" len="med"/>
+                    </a:lnR>
+                    <a:lnT w="6350" cap="flat" cmpd="sng" algn="ctr">
+                      <a:solidFill>
+                        <a:srgbClr val="E5E2DC"/>
+                      </a:solidFill>
+                      <a:prstDash val="solid"/>
+                      <a:round/>
+                      <a:headEnd type="none" w="med" len="med"/>
+                      <a:tailEnd type="none" w="med" len="med"/>
+                    </a:lnT>
+                    <a:lnB w="6350" cap="flat" cmpd="sng" algn="ctr">
+                      <a:solidFill>
+                        <a:srgbClr val="E5E2DC"/>
+                      </a:solidFill>
+                      <a:prstDash val="solid"/>
+                      <a:round/>
+                      <a:headEnd type="none" w="med" len="med"/>
+                      <a:tailEnd type="none" w="med" len="med"/>
+                    </a:lnB>
+                    <a:solidFill>
+                      <a:srgbClr val="2A9D8F"/>
+                    </a:solidFill>
+                  </a:tcPr>
+                </a:tc>
+                <a:tc>
+                  <a:txBody>
+                    <a:bodyPr/>
+                    <a:lstStyle/>
+                    <a:p>
+                      <a:pPr indent="0" marL="0">
+                        <a:buNone/>
+                      </a:pPr>
+                      <a:r>
+                        <a:rPr lang="en-US" sz="1200" b="1" dirty="0">
+                          <a:solidFill>
+                            <a:srgbClr val="FFFFFF"/>
+                          </a:solidFill>
+                          <a:latin typeface="Calibri" pitchFamily="34" charset="0"/>
+                          <a:ea typeface="Calibri" pitchFamily="34" charset="-122"/>
+                          <a:cs typeface="Calibri" pitchFamily="34" charset="-120"/>
+                        </a:rPr>
+                        <a:t>Ones</a:t>
+                      </a:r>
+                      <a:endParaRPr lang="en-US" sz="1200" dirty="0">
+                        <a:latin typeface="Calibri" charset="0"/>
+                        <a:ea typeface="Calibri" charset="0"/>
+                        <a:cs typeface="Calibri" charset="0"/>
+                      </a:endParaRPr>
+                    </a:p>
+                  </a:txBody>
+                  <a:tcPr marL="91440" marR="91440" marT="45720" marB="45720">
+                    <a:lnL w="6350" cap="flat" cmpd="sng" algn="ctr">
+                      <a:solidFill>
+                        <a:srgbClr val="E5E2DC"/>
+                      </a:solidFill>
+                      <a:prstDash val="solid"/>
+                      <a:round/>
+                      <a:headEnd type="none" w="med" len="med"/>
+                      <a:tailEnd type="none" w="med" len="med"/>
+                    </a:lnL>
+                    <a:lnR w="6350" cap="flat" cmpd="sng" algn="ctr">
+                      <a:solidFill>
+                        <a:srgbClr val="E5E2DC"/>
+                      </a:solidFill>
+                      <a:prstDash val="solid"/>
+                      <a:round/>
+                      <a:headEnd type="none" w="med" len="med"/>
+                      <a:tailEnd type="none" w="med" len="med"/>
+                    </a:lnR>
+                    <a:lnT w="6350" cap="flat" cmpd="sng" algn="ctr">
+                      <a:solidFill>
+                        <a:srgbClr val="E5E2DC"/>
+                      </a:solidFill>
+                      <a:prstDash val="solid"/>
+                      <a:round/>
+                      <a:headEnd type="none" w="med" len="med"/>
+                      <a:tailEnd type="none" w="med" len="med"/>
+                    </a:lnT>
+                    <a:lnB w="6350" cap="flat" cmpd="sng" algn="ctr">
+                      <a:solidFill>
+                        <a:srgbClr val="E5E2DC"/>
+                      </a:solidFill>
+                      <a:prstDash val="solid"/>
+                      <a:round/>
+                      <a:headEnd type="none" w="med" len="med"/>
+                      <a:tailEnd type="none" w="med" len="med"/>
+                    </a:lnB>
+                    <a:solidFill>
+                      <a:srgbClr val="2A9D8F"/>
+                    </a:solidFill>
+                  </a:tcPr>
+                </a:tc>
+                <a:tc>
+                  <a:txBody>
+                    <a:bodyPr/>
+                    <a:lstStyle/>
+                    <a:p>
+                      <a:pPr indent="0" marL="0">
+                        <a:buNone/>
+                      </a:pPr>
+                      <a:r>
+                        <a:rPr lang="en-US" sz="1200" b="1" dirty="0">
+                          <a:solidFill>
+                            <a:srgbClr val="FFFFFF"/>
+                          </a:solidFill>
+                          <a:latin typeface="Calibri" pitchFamily="34" charset="0"/>
+                          <a:ea typeface="Calibri" pitchFamily="34" charset="-122"/>
+                          <a:cs typeface="Calibri" pitchFamily="34" charset="-120"/>
+                        </a:rPr>
+                        <a:t>.</a:t>
+                      </a:r>
+                      <a:endParaRPr lang="en-US" sz="1200" dirty="0">
+                        <a:latin typeface="Calibri" charset="0"/>
+                        <a:ea typeface="Calibri" charset="0"/>
+                        <a:cs typeface="Calibri" charset="0"/>
+                      </a:endParaRPr>
+                    </a:p>
+                  </a:txBody>
+                  <a:tcPr marL="91440" marR="91440" marT="45720" marB="45720">
+                    <a:lnL w="6350" cap="flat" cmpd="sng" algn="ctr">
+                      <a:solidFill>
+                        <a:srgbClr val="E5E2DC"/>
+                      </a:solidFill>
+                      <a:prstDash val="solid"/>
+                      <a:round/>
+                      <a:headEnd type="none" w="med" len="med"/>
+                      <a:tailEnd type="none" w="med" len="med"/>
+                    </a:lnL>
+                    <a:lnR w="6350" cap="flat" cmpd="sng" algn="ctr">
+                      <a:solidFill>
+                        <a:srgbClr val="E5E2DC"/>
+                      </a:solidFill>
+                      <a:prstDash val="solid"/>
+                      <a:round/>
+                      <a:headEnd type="none" w="med" len="med"/>
+                      <a:tailEnd type="none" w="med" len="med"/>
+                    </a:lnR>
+                    <a:lnT w="6350" cap="flat" cmpd="sng" algn="ctr">
+                      <a:solidFill>
+                        <a:srgbClr val="E5E2DC"/>
+                      </a:solidFill>
+                      <a:prstDash val="solid"/>
+                      <a:round/>
+                      <a:headEnd type="none" w="med" len="med"/>
+                      <a:tailEnd type="none" w="med" len="med"/>
+                    </a:lnT>
+                    <a:lnB w="6350" cap="flat" cmpd="sng" algn="ctr">
+                      <a:solidFill>
+                        <a:srgbClr val="E5E2DC"/>
+                      </a:solidFill>
+                      <a:prstDash val="solid"/>
+                      <a:round/>
+                      <a:headEnd type="none" w="med" len="med"/>
+                      <a:tailEnd type="none" w="med" len="med"/>
+                    </a:lnB>
+                    <a:solidFill>
+                      <a:srgbClr val="2A9D8F"/>
+                    </a:solidFill>
+                  </a:tcPr>
+                </a:tc>
+                <a:tc>
+                  <a:txBody>
+                    <a:bodyPr/>
+                    <a:lstStyle/>
+                    <a:p>
+                      <a:pPr indent="0" marL="0">
+                        <a:buNone/>
+                      </a:pPr>
+                      <a:r>
+                        <a:rPr lang="en-US" sz="1200" b="1" dirty="0">
+                          <a:solidFill>
+                            <a:srgbClr val="FFFFFF"/>
+                          </a:solidFill>
+                          <a:latin typeface="Calibri" pitchFamily="34" charset="0"/>
+                          <a:ea typeface="Calibri" pitchFamily="34" charset="-122"/>
+                          <a:cs typeface="Calibri" pitchFamily="34" charset="-120"/>
+                        </a:rPr>
+                        <a:t>Tenths</a:t>
+                      </a:r>
+                      <a:endParaRPr lang="en-US" sz="1200" dirty="0">
+                        <a:latin typeface="Calibri" charset="0"/>
+                        <a:ea typeface="Calibri" charset="0"/>
+                        <a:cs typeface="Calibri" charset="0"/>
+                      </a:endParaRPr>
+                    </a:p>
+                  </a:txBody>
+                  <a:tcPr marL="91440" marR="91440" marT="45720" marB="45720">
+                    <a:lnL w="6350" cap="flat" cmpd="sng" algn="ctr">
+                      <a:solidFill>
+                        <a:srgbClr val="E5E2DC"/>
+                      </a:solidFill>
+                      <a:prstDash val="solid"/>
+                      <a:round/>
+                      <a:headEnd type="none" w="med" len="med"/>
+                      <a:tailEnd type="none" w="med" len="med"/>
+                    </a:lnL>
+                    <a:lnR w="6350" cap="flat" cmpd="sng" algn="ctr">
+                      <a:solidFill>
+                        <a:srgbClr val="E5E2DC"/>
+                      </a:solidFill>
+                      <a:prstDash val="solid"/>
+                      <a:round/>
+                      <a:headEnd type="none" w="med" len="med"/>
+                      <a:tailEnd type="none" w="med" len="med"/>
+                    </a:lnR>
+                    <a:lnT w="6350" cap="flat" cmpd="sng" algn="ctr">
+                      <a:solidFill>
+                        <a:srgbClr val="E5E2DC"/>
+                      </a:solidFill>
+                      <a:prstDash val="solid"/>
+                      <a:round/>
+                      <a:headEnd type="none" w="med" len="med"/>
+                      <a:tailEnd type="none" w="med" len="med"/>
+                    </a:lnT>
+                    <a:lnB w="6350" cap="flat" cmpd="sng" algn="ctr">
+                      <a:solidFill>
+                        <a:srgbClr val="E5E2DC"/>
+                      </a:solidFill>
+                      <a:prstDash val="solid"/>
+                      <a:round/>
+                      <a:headEnd type="none" w="med" len="med"/>
+                      <a:tailEnd type="none" w="med" len="med"/>
+                    </a:lnB>
+                    <a:solidFill>
+                      <a:srgbClr val="2A9D8F"/>
+                    </a:solidFill>
+                  </a:tcPr>
+                </a:tc>
+                <a:tc>
+                  <a:txBody>
+                    <a:bodyPr/>
+                    <a:lstStyle/>
+                    <a:p>
+                      <a:pPr indent="0" marL="0">
+                        <a:buNone/>
+                      </a:pPr>
+                      <a:r>
+                        <a:rPr lang="en-US" sz="1200" b="1" dirty="0">
+                          <a:solidFill>
+                            <a:srgbClr val="FFFFFF"/>
+                          </a:solidFill>
+                          <a:latin typeface="Calibri" pitchFamily="34" charset="0"/>
+                          <a:ea typeface="Calibri" pitchFamily="34" charset="-122"/>
+                          <a:cs typeface="Calibri" pitchFamily="34" charset="-120"/>
+                        </a:rPr>
+                        <a:t>Hundredths</a:t>
+                      </a:r>
+                      <a:endParaRPr lang="en-US" sz="1200" dirty="0">
+                        <a:latin typeface="Calibri" charset="0"/>
+                        <a:ea typeface="Calibri" charset="0"/>
+                        <a:cs typeface="Calibri" charset="0"/>
+                      </a:endParaRPr>
+                    </a:p>
+                  </a:txBody>
+                  <a:tcPr marL="91440" marR="91440" marT="45720" marB="45720">
+                    <a:lnL w="6350" cap="flat" cmpd="sng" algn="ctr">
+                      <a:solidFill>
+                        <a:srgbClr val="E5E2DC"/>
+                      </a:solidFill>
+                      <a:prstDash val="solid"/>
+                      <a:round/>
+                      <a:headEnd type="none" w="med" len="med"/>
+                      <a:tailEnd type="none" w="med" len="med"/>
+                    </a:lnL>
+                    <a:lnR w="6350" cap="flat" cmpd="sng" algn="ctr">
+                      <a:solidFill>
+                        <a:srgbClr val="E5E2DC"/>
+                      </a:solidFill>
+                      <a:prstDash val="solid"/>
+                      <a:round/>
+                      <a:headEnd type="none" w="med" len="med"/>
+                      <a:tailEnd type="none" w="med" len="med"/>
+                    </a:lnR>
+                    <a:lnT w="6350" cap="flat" cmpd="sng" algn="ctr">
+                      <a:solidFill>
+                        <a:srgbClr val="E5E2DC"/>
+                      </a:solidFill>
+                      <a:prstDash val="solid"/>
+                      <a:round/>
+                      <a:headEnd type="none" w="med" len="med"/>
+                      <a:tailEnd type="none" w="med" len="med"/>
+                    </a:lnT>
+                    <a:lnB w="6350" cap="flat" cmpd="sng" algn="ctr">
+                      <a:solidFill>
+                        <a:srgbClr val="E5E2DC"/>
+                      </a:solidFill>
+                      <a:prstDash val="solid"/>
+                      <a:round/>
+                      <a:headEnd type="none" w="med" len="med"/>
+                      <a:tailEnd type="none" w="med" len="med"/>
+                    </a:lnB>
+                    <a:solidFill>
+                      <a:srgbClr val="2A9D8F"/>
+                    </a:solidFill>
+                  </a:tcPr>
+                </a:tc>
+              </a:tr>
+              <a:tr h="502920">
+                <a:tc>
+                  <a:txBody>
+                    <a:bodyPr/>
+                    <a:lstStyle/>
+                    <a:p>
+                      <a:pPr indent="0" marL="0">
+                        <a:buNone/>
+                      </a:pPr>
+                      <a:r>
+                        <a:rPr lang="en-US" sz="1200" dirty="0">
+                          <a:solidFill>
+                            <a:srgbClr val="3D3A36"/>
+                          </a:solidFill>
+                          <a:latin typeface="Calibri" pitchFamily="34" charset="0"/>
+                          <a:ea typeface="Calibri" pitchFamily="34" charset="-122"/>
+                          <a:cs typeface="Calibri" pitchFamily="34" charset="-120"/>
+                        </a:rPr>
+                        <a:t>4</a:t>
+                      </a:r>
+                      <a:endParaRPr lang="en-US" sz="1200" dirty="0">
+                        <a:latin typeface="Calibri" charset="0"/>
+                        <a:ea typeface="Calibri" charset="0"/>
+                        <a:cs typeface="Calibri" charset="0"/>
+                      </a:endParaRPr>
+                    </a:p>
+                  </a:txBody>
+                  <a:tcPr marL="91440" marR="91440" marT="45720" marB="45720">
+                    <a:lnL w="6350" cap="flat" cmpd="sng" algn="ctr">
+                      <a:solidFill>
+                        <a:srgbClr val="E5E2DC"/>
+                      </a:solidFill>
+                      <a:prstDash val="solid"/>
+                      <a:round/>
+                      <a:headEnd type="none" w="med" len="med"/>
+                      <a:tailEnd type="none" w="med" len="med"/>
+                    </a:lnL>
+                    <a:lnR w="6350" cap="flat" cmpd="sng" algn="ctr">
+                      <a:solidFill>
+                        <a:srgbClr val="E5E2DC"/>
+                      </a:solidFill>
+                      <a:prstDash val="solid"/>
+                      <a:round/>
+                      <a:headEnd type="none" w="med" len="med"/>
+                      <a:tailEnd type="none" w="med" len="med"/>
+                    </a:lnR>
+                    <a:lnT w="6350" cap="flat" cmpd="sng" algn="ctr">
+                      <a:solidFill>
+                        <a:srgbClr val="E5E2DC"/>
+                      </a:solidFill>
+                      <a:prstDash val="solid"/>
+                      <a:round/>
+                      <a:headEnd type="none" w="med" len="med"/>
+                      <a:tailEnd type="none" w="med" len="med"/>
+                    </a:lnT>
+                    <a:lnB w="6350" cap="flat" cmpd="sng" algn="ctr">
+                      <a:solidFill>
+                        <a:srgbClr val="E5E2DC"/>
+                      </a:solidFill>
+                      <a:prstDash val="solid"/>
+                      <a:round/>
+                      <a:headEnd type="none" w="med" len="med"/>
+                      <a:tailEnd type="none" w="med" len="med"/>
+                    </a:lnB>
+                    <a:solidFill>
+                      <a:srgbClr val="FFFFFF"/>
+                    </a:solidFill>
+                  </a:tcPr>
+                </a:tc>
+                <a:tc>
+                  <a:txBody>
+                    <a:bodyPr/>
+                    <a:lstStyle/>
+                    <a:p>
+                      <a:pPr indent="0" marL="0">
+                        <a:buNone/>
+                      </a:pPr>
+                      <a:r>
+                        <a:rPr lang="en-US" sz="1200" dirty="0">
+                          <a:solidFill>
+                            <a:srgbClr val="3D3A36"/>
+                          </a:solidFill>
+                          <a:latin typeface="Calibri" pitchFamily="34" charset="0"/>
+                          <a:ea typeface="Calibri" pitchFamily="34" charset="-122"/>
+                          <a:cs typeface="Calibri" pitchFamily="34" charset="-120"/>
+                        </a:rPr>
+                        <a:t>5</a:t>
+                      </a:r>
+                      <a:endParaRPr lang="en-US" sz="1200" dirty="0">
+                        <a:latin typeface="Calibri" charset="0"/>
+                        <a:ea typeface="Calibri" charset="0"/>
+                        <a:cs typeface="Calibri" charset="0"/>
+                      </a:endParaRPr>
+                    </a:p>
+                  </a:txBody>
+                  <a:tcPr marL="91440" marR="91440" marT="45720" marB="45720">
+                    <a:lnL w="6350" cap="flat" cmpd="sng" algn="ctr">
+                      <a:solidFill>
+                        <a:srgbClr val="E5E2DC"/>
+                      </a:solidFill>
+                      <a:prstDash val="solid"/>
+                      <a:round/>
+                      <a:headEnd type="none" w="med" len="med"/>
+                      <a:tailEnd type="none" w="med" len="med"/>
+                    </a:lnL>
+                    <a:lnR w="6350" cap="flat" cmpd="sng" algn="ctr">
+                      <a:solidFill>
+                        <a:srgbClr val="E5E2DC"/>
+                      </a:solidFill>
+                      <a:prstDash val="solid"/>
+                      <a:round/>
+                      <a:headEnd type="none" w="med" len="med"/>
+                      <a:tailEnd type="none" w="med" len="med"/>
+                    </a:lnR>
+                    <a:lnT w="6350" cap="flat" cmpd="sng" algn="ctr">
+                      <a:solidFill>
+                        <a:srgbClr val="E5E2DC"/>
+                      </a:solidFill>
+                      <a:prstDash val="solid"/>
+                      <a:round/>
+                      <a:headEnd type="none" w="med" len="med"/>
+                      <a:tailEnd type="none" w="med" len="med"/>
+                    </a:lnT>
+                    <a:lnB w="6350" cap="flat" cmpd="sng" algn="ctr">
+                      <a:solidFill>
+                        <a:srgbClr val="E5E2DC"/>
+                      </a:solidFill>
+                      <a:prstDash val="solid"/>
+                      <a:round/>
+                      <a:headEnd type="none" w="med" len="med"/>
+                      <a:tailEnd type="none" w="med" len="med"/>
+                    </a:lnB>
+                    <a:solidFill>
+                      <a:srgbClr val="FFFFFF"/>
+                    </a:solidFill>
+                  </a:tcPr>
+                </a:tc>
+                <a:tc>
+                  <a:txBody>
+                    <a:bodyPr/>
+                    <a:lstStyle/>
+                    <a:p>
+                      <a:pPr indent="0" marL="0">
+                        <a:buNone/>
+                      </a:pPr>
+                      <a:r>
+                        <a:rPr lang="en-US" sz="1200" dirty="0">
+                          <a:solidFill>
+                            <a:srgbClr val="3D3A36"/>
+                          </a:solidFill>
+                          <a:latin typeface="Calibri" pitchFamily="34" charset="0"/>
+                          <a:ea typeface="Calibri" pitchFamily="34" charset="-122"/>
+                          <a:cs typeface="Calibri" pitchFamily="34" charset="-120"/>
+                        </a:rPr>
+                        <a:t>2</a:t>
+                      </a:r>
+                      <a:endParaRPr lang="en-US" sz="1200" dirty="0">
+                        <a:latin typeface="Calibri" charset="0"/>
+                        <a:ea typeface="Calibri" charset="0"/>
+                        <a:cs typeface="Calibri" charset="0"/>
+                      </a:endParaRPr>
+                    </a:p>
+                  </a:txBody>
+                  <a:tcPr marL="91440" marR="91440" marT="45720" marB="45720">
+                    <a:lnL w="6350" cap="flat" cmpd="sng" algn="ctr">
+                      <a:solidFill>
+                        <a:srgbClr val="E5E2DC"/>
+                      </a:solidFill>
+                      <a:prstDash val="solid"/>
+                      <a:round/>
+                      <a:headEnd type="none" w="med" len="med"/>
+                      <a:tailEnd type="none" w="med" len="med"/>
+                    </a:lnL>
+                    <a:lnR w="6350" cap="flat" cmpd="sng" algn="ctr">
+                      <a:solidFill>
+                        <a:srgbClr val="E5E2DC"/>
+                      </a:solidFill>
+                      <a:prstDash val="solid"/>
+                      <a:round/>
+                      <a:headEnd type="none" w="med" len="med"/>
+                      <a:tailEnd type="none" w="med" len="med"/>
+                    </a:lnR>
+                    <a:lnT w="6350" cap="flat" cmpd="sng" algn="ctr">
+                      <a:solidFill>
+                        <a:srgbClr val="E5E2DC"/>
+                      </a:solidFill>
+                      <a:prstDash val="solid"/>
+                      <a:round/>
+                      <a:headEnd type="none" w="med" len="med"/>
+                      <a:tailEnd type="none" w="med" len="med"/>
+                    </a:lnT>
+                    <a:lnB w="6350" cap="flat" cmpd="sng" algn="ctr">
+                      <a:solidFill>
+                        <a:srgbClr val="E5E2DC"/>
+                      </a:solidFill>
+                      <a:prstDash val="solid"/>
+                      <a:round/>
+                      <a:headEnd type="none" w="med" len="med"/>
+                      <a:tailEnd type="none" w="med" len="med"/>
+                    </a:lnB>
+                    <a:solidFill>
+                      <a:srgbClr val="FFFFFF"/>
+                    </a:solidFill>
+                  </a:tcPr>
+                </a:tc>
+                <a:tc>
+                  <a:txBody>
+                    <a:bodyPr/>
+                    <a:lstStyle/>
+                    <a:p>
+                      <a:pPr indent="0" marL="0">
+                        <a:buNone/>
+                      </a:pPr>
+                      <a:r>
+                        <a:rPr lang="en-US" sz="1200" dirty="0">
+                          <a:solidFill>
+                            <a:srgbClr val="3D3A36"/>
+                          </a:solidFill>
+                          <a:latin typeface="Calibri" pitchFamily="34" charset="0"/>
+                          <a:ea typeface="Calibri" pitchFamily="34" charset="-122"/>
+                          <a:cs typeface="Calibri" pitchFamily="34" charset="-120"/>
+                        </a:rPr>
+                        <a:t>3</a:t>
+                      </a:r>
+                      <a:endParaRPr lang="en-US" sz="1200" dirty="0">
+                        <a:latin typeface="Calibri" charset="0"/>
+                        <a:ea typeface="Calibri" charset="0"/>
+                        <a:cs typeface="Calibri" charset="0"/>
+                      </a:endParaRPr>
+                    </a:p>
+                  </a:txBody>
+                  <a:tcPr marL="91440" marR="91440" marT="45720" marB="45720">
+                    <a:lnL w="6350" cap="flat" cmpd="sng" algn="ctr">
+                      <a:solidFill>
+                        <a:srgbClr val="E5E2DC"/>
+                      </a:solidFill>
+                      <a:prstDash val="solid"/>
+                      <a:round/>
+                      <a:headEnd type="none" w="med" len="med"/>
+                      <a:tailEnd type="none" w="med" len="med"/>
+                    </a:lnL>
+                    <a:lnR w="6350" cap="flat" cmpd="sng" algn="ctr">
+                      <a:solidFill>
+                        <a:srgbClr val="E5E2DC"/>
+                      </a:solidFill>
+                      <a:prstDash val="solid"/>
+                      <a:round/>
+                      <a:headEnd type="none" w="med" len="med"/>
+                      <a:tailEnd type="none" w="med" len="med"/>
+                    </a:lnR>
+                    <a:lnT w="6350" cap="flat" cmpd="sng" algn="ctr">
+                      <a:solidFill>
+                        <a:srgbClr val="E5E2DC"/>
+                      </a:solidFill>
+                      <a:prstDash val="solid"/>
+                      <a:round/>
+                      <a:headEnd type="none" w="med" len="med"/>
+                      <a:tailEnd type="none" w="med" len="med"/>
+                    </a:lnT>
+                    <a:lnB w="6350" cap="flat" cmpd="sng" algn="ctr">
+                      <a:solidFill>
+                        <a:srgbClr val="E5E2DC"/>
+                      </a:solidFill>
+                      <a:prstDash val="solid"/>
+                      <a:round/>
+                      <a:headEnd type="none" w="med" len="med"/>
+                      <a:tailEnd type="none" w="med" len="med"/>
+                    </a:lnB>
+                    <a:solidFill>
+                      <a:srgbClr val="FFFFFF"/>
+                    </a:solidFill>
+                  </a:tcPr>
+                </a:tc>
+                <a:tc>
+                  <a:txBody>
+                    <a:bodyPr/>
+                    <a:lstStyle/>
+                    <a:p>
+                      <a:pPr indent="0" marL="0">
+                        <a:buNone/>
+                      </a:pPr>
+                      <a:r>
+                        <a:rPr lang="en-US" sz="1200" dirty="0">
+                          <a:solidFill>
+                            <a:srgbClr val="3D3A36"/>
+                          </a:solidFill>
+                          <a:latin typeface="Calibri" pitchFamily="34" charset="0"/>
+                          <a:ea typeface="Calibri" pitchFamily="34" charset="-122"/>
+                          <a:cs typeface="Calibri" pitchFamily="34" charset="-120"/>
+                        </a:rPr>
+                        <a:t>8</a:t>
+                      </a:r>
+                      <a:endParaRPr lang="en-US" sz="1200" dirty="0">
+                        <a:latin typeface="Calibri" charset="0"/>
+                        <a:ea typeface="Calibri" charset="0"/>
+                        <a:cs typeface="Calibri" charset="0"/>
+                      </a:endParaRPr>
+                    </a:p>
+                  </a:txBody>
+                  <a:tcPr marL="91440" marR="91440" marT="45720" marB="45720">
+                    <a:lnL w="6350" cap="flat" cmpd="sng" algn="ctr">
+                      <a:solidFill>
+                        <a:srgbClr val="E5E2DC"/>
+                      </a:solidFill>
+                      <a:prstDash val="solid"/>
+                      <a:round/>
+                      <a:headEnd type="none" w="med" len="med"/>
+                      <a:tailEnd type="none" w="med" len="med"/>
+                    </a:lnL>
+                    <a:lnR w="6350" cap="flat" cmpd="sng" algn="ctr">
+                      <a:solidFill>
+                        <a:srgbClr val="E5E2DC"/>
+                      </a:solidFill>
+                      <a:prstDash val="solid"/>
+                      <a:round/>
+                      <a:headEnd type="none" w="med" len="med"/>
+                      <a:tailEnd type="none" w="med" len="med"/>
+                    </a:lnR>
+                    <a:lnT w="6350" cap="flat" cmpd="sng" algn="ctr">
+                      <a:solidFill>
+                        <a:srgbClr val="E5E2DC"/>
+                      </a:solidFill>
+                      <a:prstDash val="solid"/>
+                      <a:round/>
+                      <a:headEnd type="none" w="med" len="med"/>
+                      <a:tailEnd type="none" w="med" len="med"/>
+                    </a:lnT>
+                    <a:lnB w="6350" cap="flat" cmpd="sng" algn="ctr">
+                      <a:solidFill>
+                        <a:srgbClr val="E5E2DC"/>
+                      </a:solidFill>
+                      <a:prstDash val="solid"/>
+                      <a:round/>
+                      <a:headEnd type="none" w="med" len="med"/>
+                      <a:tailEnd type="none" w="med" len="med"/>
+                    </a:lnB>
+                    <a:solidFill>
+                      <a:srgbClr val="FFFFFF"/>
+                    </a:solidFill>
+                  </a:tcPr>
+                </a:tc>
+                <a:tc>
+                  <a:txBody>
+                    <a:bodyPr/>
+                    <a:lstStyle/>
+                    <a:p>
+                      <a:pPr indent="0" marL="0">
+                        <a:buNone/>
+                      </a:pPr>
+                      <a:r>
+                        <a:rPr lang="en-US" sz="1200" dirty="0">
+                          <a:solidFill>
+                            <a:srgbClr val="3D3A36"/>
+                          </a:solidFill>
+                          <a:latin typeface="Calibri" pitchFamily="34" charset="0"/>
+                          <a:ea typeface="Calibri" pitchFamily="34" charset="-122"/>
+                          <a:cs typeface="Calibri" pitchFamily="34" charset="-120"/>
+                        </a:rPr>
+                        <a:t>.</a:t>
+                      </a:r>
+                      <a:endParaRPr lang="en-US" sz="1200" dirty="0">
+                        <a:latin typeface="Calibri" charset="0"/>
+                        <a:ea typeface="Calibri" charset="0"/>
+                        <a:cs typeface="Calibri" charset="0"/>
+                      </a:endParaRPr>
+                    </a:p>
+                  </a:txBody>
+                  <a:tcPr marL="91440" marR="91440" marT="45720" marB="45720">
+                    <a:lnL w="6350" cap="flat" cmpd="sng" algn="ctr">
+                      <a:solidFill>
+                        <a:srgbClr val="E5E2DC"/>
+                      </a:solidFill>
+                      <a:prstDash val="solid"/>
+                      <a:round/>
+                      <a:headEnd type="none" w="med" len="med"/>
+                      <a:tailEnd type="none" w="med" len="med"/>
+                    </a:lnL>
+                    <a:lnR w="6350" cap="flat" cmpd="sng" algn="ctr">
+                      <a:solidFill>
+                        <a:srgbClr val="E5E2DC"/>
+                      </a:solidFill>
+                      <a:prstDash val="solid"/>
+                      <a:round/>
+                      <a:headEnd type="none" w="med" len="med"/>
+                      <a:tailEnd type="none" w="med" len="med"/>
+                    </a:lnR>
+                    <a:lnT w="6350" cap="flat" cmpd="sng" algn="ctr">
+                      <a:solidFill>
+                        <a:srgbClr val="E5E2DC"/>
+                      </a:solidFill>
+                      <a:prstDash val="solid"/>
+                      <a:round/>
+                      <a:headEnd type="none" w="med" len="med"/>
+                      <a:tailEnd type="none" w="med" len="med"/>
+                    </a:lnT>
+                    <a:lnB w="6350" cap="flat" cmpd="sng" algn="ctr">
+                      <a:solidFill>
+                        <a:srgbClr val="E5E2DC"/>
+                      </a:solidFill>
+                      <a:prstDash val="solid"/>
+                      <a:round/>
+                      <a:headEnd type="none" w="med" len="med"/>
+                      <a:tailEnd type="none" w="med" len="med"/>
+                    </a:lnB>
+                    <a:solidFill>
+                      <a:srgbClr val="FFFFFF"/>
+                    </a:solidFill>
+                  </a:tcPr>
+                </a:tc>
+                <a:tc>
+                  <a:txBody>
+                    <a:bodyPr/>
+                    <a:lstStyle/>
+                    <a:p>
+                      <a:pPr indent="0" marL="0">
+                        <a:buNone/>
+                      </a:pPr>
+                      <a:r>
+                        <a:rPr lang="en-US" sz="1200" dirty="0">
+                          <a:solidFill>
+                            <a:srgbClr val="3D3A36"/>
+                          </a:solidFill>
+                          <a:latin typeface="Calibri" pitchFamily="34" charset="0"/>
+                          <a:ea typeface="Calibri" pitchFamily="34" charset="-122"/>
+                          <a:cs typeface="Calibri" pitchFamily="34" charset="-120"/>
+                        </a:rPr>
+                        <a:t>1</a:t>
+                      </a:r>
+                      <a:endParaRPr lang="en-US" sz="1200" dirty="0">
+                        <a:latin typeface="Calibri" charset="0"/>
+                        <a:ea typeface="Calibri" charset="0"/>
+                        <a:cs typeface="Calibri" charset="0"/>
+                      </a:endParaRPr>
+                    </a:p>
+                  </a:txBody>
+                  <a:tcPr marL="91440" marR="91440" marT="45720" marB="45720">
+                    <a:lnL w="6350" cap="flat" cmpd="sng" algn="ctr">
+                      <a:solidFill>
+                        <a:srgbClr val="E5E2DC"/>
+                      </a:solidFill>
+                      <a:prstDash val="solid"/>
+                      <a:round/>
+                      <a:headEnd type="none" w="med" len="med"/>
+                      <a:tailEnd type="none" w="med" len="med"/>
+                    </a:lnL>
+                    <a:lnR w="6350" cap="flat" cmpd="sng" algn="ctr">
+                      <a:solidFill>
+                        <a:srgbClr val="E5E2DC"/>
+                      </a:solidFill>
+                      <a:prstDash val="solid"/>
+                      <a:round/>
+                      <a:headEnd type="none" w="med" len="med"/>
+                      <a:tailEnd type="none" w="med" len="med"/>
+                    </a:lnR>
+                    <a:lnT w="6350" cap="flat" cmpd="sng" algn="ctr">
+                      <a:solidFill>
+                        <a:srgbClr val="E5E2DC"/>
+                      </a:solidFill>
+                      <a:prstDash val="solid"/>
+                      <a:round/>
+                      <a:headEnd type="none" w="med" len="med"/>
+                      <a:tailEnd type="none" w="med" len="med"/>
+                    </a:lnT>
+                    <a:lnB w="6350" cap="flat" cmpd="sng" algn="ctr">
+                      <a:solidFill>
+                        <a:srgbClr val="E5E2DC"/>
+                      </a:solidFill>
+                      <a:prstDash val="solid"/>
+                      <a:round/>
+                      <a:headEnd type="none" w="med" len="med"/>
+                      <a:tailEnd type="none" w="med" len="med"/>
+                    </a:lnB>
+                    <a:solidFill>
+                      <a:srgbClr val="FFFFFF"/>
+                    </a:solidFill>
+                  </a:tcPr>
+                </a:tc>
+                <a:tc>
+                  <a:txBody>
+                    <a:bodyPr/>
+                    <a:lstStyle/>
+                    <a:p>
+                      <a:pPr indent="0" marL="0">
+                        <a:buNone/>
+                      </a:pPr>
+                      <a:r>
+                        <a:rPr lang="en-US" sz="1200" dirty="0">
+                          <a:solidFill>
+                            <a:srgbClr val="3D3A36"/>
+                          </a:solidFill>
+                          <a:latin typeface="Calibri" pitchFamily="34" charset="0"/>
+                          <a:ea typeface="Calibri" pitchFamily="34" charset="-122"/>
+                          <a:cs typeface="Calibri" pitchFamily="34" charset="-120"/>
+                        </a:rPr>
+                        <a:t>6</a:t>
+                      </a:r>
+                      <a:endParaRPr lang="en-US" sz="1200" dirty="0">
+                        <a:latin typeface="Calibri" charset="0"/>
+                        <a:ea typeface="Calibri" charset="0"/>
+                        <a:cs typeface="Calibri" charset="0"/>
+                      </a:endParaRPr>
+                    </a:p>
+                  </a:txBody>
+                  <a:tcPr marL="91440" marR="91440" marT="45720" marB="45720">
+                    <a:lnL w="6350" cap="flat" cmpd="sng" algn="ctr">
+                      <a:solidFill>
+                        <a:srgbClr val="E5E2DC"/>
+                      </a:solidFill>
+                      <a:prstDash val="solid"/>
+                      <a:round/>
+                      <a:headEnd type="none" w="med" len="med"/>
+                      <a:tailEnd type="none" w="med" len="med"/>
+                    </a:lnL>
+                    <a:lnR w="6350" cap="flat" cmpd="sng" algn="ctr">
+                      <a:solidFill>
+                        <a:srgbClr val="E5E2DC"/>
+                      </a:solidFill>
+                      <a:prstDash val="solid"/>
+                      <a:round/>
+                      <a:headEnd type="none" w="med" len="med"/>
+                      <a:tailEnd type="none" w="med" len="med"/>
+                    </a:lnR>
+                    <a:lnT w="6350" cap="flat" cmpd="sng" algn="ctr">
+                      <a:solidFill>
+                        <a:srgbClr val="E5E2DC"/>
+                      </a:solidFill>
+                      <a:prstDash val="solid"/>
+                      <a:round/>
+                      <a:headEnd type="none" w="med" len="med"/>
+                      <a:tailEnd type="none" w="med" len="med"/>
+                    </a:lnT>
+                    <a:lnB w="6350" cap="flat" cmpd="sng" algn="ctr">
+                      <a:solidFill>
+                        <a:srgbClr val="E5E2DC"/>
+                      </a:solidFill>
+                      <a:prstDash val="solid"/>
+                      <a:round/>
+                      <a:headEnd type="none" w="med" len="med"/>
+                      <a:tailEnd type="none" w="med" len="med"/>
+                    </a:lnB>
+                    <a:solidFill>
+                      <a:srgbClr val="FFFFFF"/>
+                    </a:solidFill>
+                  </a:tcPr>
+                </a:tc>
+              </a:tr>
+              <a:tr h="502920">
+                <a:tc>
+                  <a:txBody>
+                    <a:bodyPr/>
+                    <a:lstStyle/>
+                    <a:p>
+                      <a:pPr indent="0" marL="0">
+                        <a:buNone/>
+                      </a:pPr>
+                      <a:r>
+                        <a:rPr lang="en-US" sz="1200" dirty="0">
+                          <a:solidFill>
+                            <a:srgbClr val="3D3A36"/>
+                          </a:solidFill>
+                          <a:latin typeface="Calibri" pitchFamily="34" charset="0"/>
+                          <a:ea typeface="Calibri" pitchFamily="34" charset="-122"/>
+                          <a:cs typeface="Calibri" pitchFamily="34" charset="-120"/>
+                        </a:rPr>
+                        <a:t>40,000</a:t>
+                      </a:r>
+                      <a:endParaRPr lang="en-US" sz="1200" dirty="0">
+                        <a:latin typeface="Calibri" charset="0"/>
+                        <a:ea typeface="Calibri" charset="0"/>
+                        <a:cs typeface="Calibri" charset="0"/>
+                      </a:endParaRPr>
+                    </a:p>
+                  </a:txBody>
+                  <a:tcPr marL="91440" marR="91440" marT="45720" marB="45720">
+                    <a:lnL w="6350" cap="flat" cmpd="sng" algn="ctr">
+                      <a:solidFill>
+                        <a:srgbClr val="E5E2DC"/>
+                      </a:solidFill>
+                      <a:prstDash val="solid"/>
+                      <a:round/>
+                      <a:headEnd type="none" w="med" len="med"/>
+                      <a:tailEnd type="none" w="med" len="med"/>
+                    </a:lnL>
+                    <a:lnR w="6350" cap="flat" cmpd="sng" algn="ctr">
+                      <a:solidFill>
+                        <a:srgbClr val="E5E2DC"/>
+                      </a:solidFill>
+                      <a:prstDash val="solid"/>
+                      <a:round/>
+                      <a:headEnd type="none" w="med" len="med"/>
+                      <a:tailEnd type="none" w="med" len="med"/>
+                    </a:lnR>
+                    <a:lnT w="6350" cap="flat" cmpd="sng" algn="ctr">
+                      <a:solidFill>
+                        <a:srgbClr val="E5E2DC"/>
+                      </a:solidFill>
+                      <a:prstDash val="solid"/>
+                      <a:round/>
+                      <a:headEnd type="none" w="med" len="med"/>
+                      <a:tailEnd type="none" w="med" len="med"/>
+                    </a:lnT>
+                    <a:lnB w="6350" cap="flat" cmpd="sng" algn="ctr">
+                      <a:solidFill>
+                        <a:srgbClr val="E5E2DC"/>
+                      </a:solidFill>
+                      <a:prstDash val="solid"/>
+                      <a:round/>
+                      <a:headEnd type="none" w="med" len="med"/>
+                      <a:tailEnd type="none" w="med" len="med"/>
+                    </a:lnB>
+                    <a:solidFill>
+                      <a:srgbClr val="F8F6F3"/>
+                    </a:solidFill>
+                  </a:tcPr>
+                </a:tc>
+                <a:tc>
+                  <a:txBody>
+                    <a:bodyPr/>
+                    <a:lstStyle/>
+                    <a:p>
+                      <a:pPr indent="0" marL="0">
+                        <a:buNone/>
+                      </a:pPr>
+                      <a:r>
+                        <a:rPr lang="en-US" sz="1200" dirty="0">
+                          <a:solidFill>
+                            <a:srgbClr val="3D3A36"/>
+                          </a:solidFill>
+                          <a:latin typeface="Calibri" pitchFamily="34" charset="0"/>
+                          <a:ea typeface="Calibri" pitchFamily="34" charset="-122"/>
+                          <a:cs typeface="Calibri" pitchFamily="34" charset="-120"/>
+                        </a:rPr>
+                        <a:t>5,000</a:t>
+                      </a:r>
+                      <a:endParaRPr lang="en-US" sz="1200" dirty="0">
+                        <a:latin typeface="Calibri" charset="0"/>
+                        <a:ea typeface="Calibri" charset="0"/>
+                        <a:cs typeface="Calibri" charset="0"/>
+                      </a:endParaRPr>
+                    </a:p>
+                  </a:txBody>
+                  <a:tcPr marL="91440" marR="91440" marT="45720" marB="45720">
+                    <a:lnL w="6350" cap="flat" cmpd="sng" algn="ctr">
+                      <a:solidFill>
+                        <a:srgbClr val="E5E2DC"/>
+                      </a:solidFill>
+                      <a:prstDash val="solid"/>
+                      <a:round/>
+                      <a:headEnd type="none" w="med" len="med"/>
+                      <a:tailEnd type="none" w="med" len="med"/>
+                    </a:lnL>
+                    <a:lnR w="6350" cap="flat" cmpd="sng" algn="ctr">
+                      <a:solidFill>
+                        <a:srgbClr val="E5E2DC"/>
+                      </a:solidFill>
+                      <a:prstDash val="solid"/>
+                      <a:round/>
+                      <a:headEnd type="none" w="med" len="med"/>
+                      <a:tailEnd type="none" w="med" len="med"/>
+                    </a:lnR>
+                    <a:lnT w="6350" cap="flat" cmpd="sng" algn="ctr">
+                      <a:solidFill>
+                        <a:srgbClr val="E5E2DC"/>
+                      </a:solidFill>
+                      <a:prstDash val="solid"/>
+                      <a:round/>
+                      <a:headEnd type="none" w="med" len="med"/>
+                      <a:tailEnd type="none" w="med" len="med"/>
+                    </a:lnT>
+                    <a:lnB w="6350" cap="flat" cmpd="sng" algn="ctr">
+                      <a:solidFill>
+                        <a:srgbClr val="E5E2DC"/>
+                      </a:solidFill>
+                      <a:prstDash val="solid"/>
+                      <a:round/>
+                      <a:headEnd type="none" w="med" len="med"/>
+                      <a:tailEnd type="none" w="med" len="med"/>
+                    </a:lnB>
+                    <a:solidFill>
+                      <a:srgbClr val="F8F6F3"/>
+                    </a:solidFill>
+                  </a:tcPr>
+                </a:tc>
+                <a:tc>
+                  <a:txBody>
+                    <a:bodyPr/>
+                    <a:lstStyle/>
+                    <a:p>
+                      <a:pPr indent="0" marL="0">
+                        <a:buNone/>
+                      </a:pPr>
+                      <a:r>
+                        <a:rPr lang="en-US" sz="1200" dirty="0">
+                          <a:solidFill>
+                            <a:srgbClr val="3D3A36"/>
+                          </a:solidFill>
+                          <a:latin typeface="Calibri" pitchFamily="34" charset="0"/>
+                          <a:ea typeface="Calibri" pitchFamily="34" charset="-122"/>
+                          <a:cs typeface="Calibri" pitchFamily="34" charset="-120"/>
+                        </a:rPr>
+                        <a:t>200</a:t>
+                      </a:r>
+                      <a:endParaRPr lang="en-US" sz="1200" dirty="0">
+                        <a:latin typeface="Calibri" charset="0"/>
+                        <a:ea typeface="Calibri" charset="0"/>
+                        <a:cs typeface="Calibri" charset="0"/>
+                      </a:endParaRPr>
+                    </a:p>
+                  </a:txBody>
+                  <a:tcPr marL="91440" marR="91440" marT="45720" marB="45720">
+                    <a:lnL w="6350" cap="flat" cmpd="sng" algn="ctr">
+                      <a:solidFill>
+                        <a:srgbClr val="E5E2DC"/>
+                      </a:solidFill>
+                      <a:prstDash val="solid"/>
+                      <a:round/>
+                      <a:headEnd type="none" w="med" len="med"/>
+                      <a:tailEnd type="none" w="med" len="med"/>
+                    </a:lnL>
+                    <a:lnR w="6350" cap="flat" cmpd="sng" algn="ctr">
+                      <a:solidFill>
+                        <a:srgbClr val="E5E2DC"/>
+                      </a:solidFill>
+                      <a:prstDash val="solid"/>
+                      <a:round/>
+                      <a:headEnd type="none" w="med" len="med"/>
+                      <a:tailEnd type="none" w="med" len="med"/>
+                    </a:lnR>
+                    <a:lnT w="6350" cap="flat" cmpd="sng" algn="ctr">
+                      <a:solidFill>
+                        <a:srgbClr val="E5E2DC"/>
+                      </a:solidFill>
+                      <a:prstDash val="solid"/>
+                      <a:round/>
+                      <a:headEnd type="none" w="med" len="med"/>
+                      <a:tailEnd type="none" w="med" len="med"/>
+                    </a:lnT>
+                    <a:lnB w="6350" cap="flat" cmpd="sng" algn="ctr">
+                      <a:solidFill>
+                        <a:srgbClr val="E5E2DC"/>
+                      </a:solidFill>
+                      <a:prstDash val="solid"/>
+                      <a:round/>
+                      <a:headEnd type="none" w="med" len="med"/>
+                      <a:tailEnd type="none" w="med" len="med"/>
+                    </a:lnB>
+                    <a:solidFill>
+                      <a:srgbClr val="F8F6F3"/>
+                    </a:solidFill>
+                  </a:tcPr>
+                </a:tc>
+                <a:tc>
+                  <a:txBody>
+                    <a:bodyPr/>
+                    <a:lstStyle/>
+                    <a:p>
+                      <a:pPr indent="0" marL="0">
+                        <a:buNone/>
+                      </a:pPr>
+                      <a:r>
+                        <a:rPr lang="en-US" sz="1200" dirty="0">
+                          <a:solidFill>
+                            <a:srgbClr val="3D3A36"/>
+                          </a:solidFill>
+                          <a:latin typeface="Calibri" pitchFamily="34" charset="0"/>
+                          <a:ea typeface="Calibri" pitchFamily="34" charset="-122"/>
+                          <a:cs typeface="Calibri" pitchFamily="34" charset="-120"/>
+                        </a:rPr>
+                        <a:t>30</a:t>
+                      </a:r>
+                      <a:endParaRPr lang="en-US" sz="1200" dirty="0">
+                        <a:latin typeface="Calibri" charset="0"/>
+                        <a:ea typeface="Calibri" charset="0"/>
+                        <a:cs typeface="Calibri" charset="0"/>
+                      </a:endParaRPr>
+                    </a:p>
+                  </a:txBody>
+                  <a:tcPr marL="91440" marR="91440" marT="45720" marB="45720">
+                    <a:lnL w="6350" cap="flat" cmpd="sng" algn="ctr">
+                      <a:solidFill>
+                        <a:srgbClr val="E5E2DC"/>
+                      </a:solidFill>
+                      <a:prstDash val="solid"/>
+                      <a:round/>
+                      <a:headEnd type="none" w="med" len="med"/>
+                      <a:tailEnd type="none" w="med" len="med"/>
+                    </a:lnL>
+                    <a:lnR w="6350" cap="flat" cmpd="sng" algn="ctr">
+                      <a:solidFill>
+                        <a:srgbClr val="E5E2DC"/>
+                      </a:solidFill>
+                      <a:prstDash val="solid"/>
+                      <a:round/>
+                      <a:headEnd type="none" w="med" len="med"/>
+                      <a:tailEnd type="none" w="med" len="med"/>
+                    </a:lnR>
+                    <a:lnT w="6350" cap="flat" cmpd="sng" algn="ctr">
+                      <a:solidFill>
+                        <a:srgbClr val="E5E2DC"/>
+                      </a:solidFill>
+                      <a:prstDash val="solid"/>
+                      <a:round/>
+                      <a:headEnd type="none" w="med" len="med"/>
+                      <a:tailEnd type="none" w="med" len="med"/>
+                    </a:lnT>
+                    <a:lnB w="6350" cap="flat" cmpd="sng" algn="ctr">
+                      <a:solidFill>
+                        <a:srgbClr val="E5E2DC"/>
+                      </a:solidFill>
+                      <a:prstDash val="solid"/>
+                      <a:round/>
+                      <a:headEnd type="none" w="med" len="med"/>
+                      <a:tailEnd type="none" w="med" len="med"/>
+                    </a:lnB>
+                    <a:solidFill>
+                      <a:srgbClr val="F8F6F3"/>
+                    </a:solidFill>
+                  </a:tcPr>
+                </a:tc>
+                <a:tc>
+                  <a:txBody>
+                    <a:bodyPr/>
+                    <a:lstStyle/>
+                    <a:p>
+                      <a:pPr indent="0" marL="0">
+                        <a:buNone/>
+                      </a:pPr>
+                      <a:r>
+                        <a:rPr lang="en-US" sz="1200" dirty="0">
+                          <a:solidFill>
+                            <a:srgbClr val="3D3A36"/>
+                          </a:solidFill>
+                          <a:latin typeface="Calibri" pitchFamily="34" charset="0"/>
+                          <a:ea typeface="Calibri" pitchFamily="34" charset="-122"/>
+                          <a:cs typeface="Calibri" pitchFamily="34" charset="-120"/>
+                        </a:rPr>
+                        <a:t>8</a:t>
+                      </a:r>
+                      <a:endParaRPr lang="en-US" sz="1200" dirty="0">
+                        <a:latin typeface="Calibri" charset="0"/>
+                        <a:ea typeface="Calibri" charset="0"/>
+                        <a:cs typeface="Calibri" charset="0"/>
+                      </a:endParaRPr>
+                    </a:p>
+                  </a:txBody>
+                  <a:tcPr marL="91440" marR="91440" marT="45720" marB="45720">
+                    <a:lnL w="6350" cap="flat" cmpd="sng" algn="ctr">
+                      <a:solidFill>
+                        <a:srgbClr val="E5E2DC"/>
+                      </a:solidFill>
+                      <a:prstDash val="solid"/>
+                      <a:round/>
+                      <a:headEnd type="none" w="med" len="med"/>
+                      <a:tailEnd type="none" w="med" len="med"/>
+                    </a:lnL>
+                    <a:lnR w="6350" cap="flat" cmpd="sng" algn="ctr">
+                      <a:solidFill>
+                        <a:srgbClr val="E5E2DC"/>
+                      </a:solidFill>
+                      <a:prstDash val="solid"/>
+                      <a:round/>
+                      <a:headEnd type="none" w="med" len="med"/>
+                      <a:tailEnd type="none" w="med" len="med"/>
+                    </a:lnR>
+                    <a:lnT w="6350" cap="flat" cmpd="sng" algn="ctr">
+                      <a:solidFill>
+                        <a:srgbClr val="E5E2DC"/>
+                      </a:solidFill>
+                      <a:prstDash val="solid"/>
+                      <a:round/>
+                      <a:headEnd type="none" w="med" len="med"/>
+                      <a:tailEnd type="none" w="med" len="med"/>
+                    </a:lnT>
+                    <a:lnB w="6350" cap="flat" cmpd="sng" algn="ctr">
+                      <a:solidFill>
+                        <a:srgbClr val="E5E2DC"/>
+                      </a:solidFill>
+                      <a:prstDash val="solid"/>
+                      <a:round/>
+                      <a:headEnd type="none" w="med" len="med"/>
+                      <a:tailEnd type="none" w="med" len="med"/>
+                    </a:lnB>
+                    <a:solidFill>
+                      <a:srgbClr val="F8F6F3"/>
+                    </a:solidFill>
+                  </a:tcPr>
+                </a:tc>
+                <a:tc>
+                  <a:txBody>
+                    <a:bodyPr/>
+                    <a:lstStyle/>
+                    <a:p>
+                      <a:pPr indent="0" marL="0">
+                        <a:buNone/>
+                      </a:pPr>
+                      <a:endParaRPr lang="en-US" sz="1200" dirty="0">
+                        <a:latin typeface="Calibri" charset="0"/>
+                        <a:ea typeface="Calibri" charset="0"/>
+                        <a:cs typeface="Calibri" charset="0"/>
+                      </a:endParaRPr>
+                    </a:p>
+                  </a:txBody>
+                  <a:tcPr marL="91440" marR="91440" marT="45720" marB="45720">
+                    <a:lnL w="6350" cap="flat" cmpd="sng" algn="ctr">
+                      <a:solidFill>
+                        <a:srgbClr val="E5E2DC"/>
+                      </a:solidFill>
+                      <a:prstDash val="solid"/>
+                      <a:round/>
+                      <a:headEnd type="none" w="med" len="med"/>
+                      <a:tailEnd type="none" w="med" len="med"/>
+                    </a:lnL>
+                    <a:lnR w="6350" cap="flat" cmpd="sng" algn="ctr">
+                      <a:solidFill>
+                        <a:srgbClr val="E5E2DC"/>
+                      </a:solidFill>
+                      <a:prstDash val="solid"/>
+                      <a:round/>
+                      <a:headEnd type="none" w="med" len="med"/>
+                      <a:tailEnd type="none" w="med" len="med"/>
+                    </a:lnR>
+                    <a:lnT w="6350" cap="flat" cmpd="sng" algn="ctr">
+                      <a:solidFill>
+                        <a:srgbClr val="E5E2DC"/>
+                      </a:solidFill>
+                      <a:prstDash val="solid"/>
+                      <a:round/>
+                      <a:headEnd type="none" w="med" len="med"/>
+                      <a:tailEnd type="none" w="med" len="med"/>
+                    </a:lnT>
+                    <a:lnB w="6350" cap="flat" cmpd="sng" algn="ctr">
+                      <a:solidFill>
+                        <a:srgbClr val="E5E2DC"/>
+                      </a:solidFill>
+                      <a:prstDash val="solid"/>
+                      <a:round/>
+                      <a:headEnd type="none" w="med" len="med"/>
+                      <a:tailEnd type="none" w="med" len="med"/>
+                    </a:lnB>
+                    <a:solidFill>
+                      <a:srgbClr val="F8F6F3"/>
+                    </a:solidFill>
+                  </a:tcPr>
+                </a:tc>
+                <a:tc>
+                  <a:txBody>
+                    <a:bodyPr/>
+                    <a:lstStyle/>
+                    <a:p>
+                      <a:pPr indent="0" marL="0">
+                        <a:buNone/>
+                      </a:pPr>
+                      <a:r>
+                        <a:rPr lang="en-US" sz="1200" dirty="0">
+                          <a:solidFill>
+                            <a:srgbClr val="3D3A36"/>
+                          </a:solidFill>
+                          <a:latin typeface="Calibri" pitchFamily="34" charset="0"/>
+                          <a:ea typeface="Calibri" pitchFamily="34" charset="-122"/>
+                          <a:cs typeface="Calibri" pitchFamily="34" charset="-120"/>
+                        </a:rPr>
+                        <a:t>0.1</a:t>
+                      </a:r>
+                      <a:endParaRPr lang="en-US" sz="1200" dirty="0">
+                        <a:latin typeface="Calibri" charset="0"/>
+                        <a:ea typeface="Calibri" charset="0"/>
+                        <a:cs typeface="Calibri" charset="0"/>
+                      </a:endParaRPr>
+                    </a:p>
+                  </a:txBody>
+                  <a:tcPr marL="91440" marR="91440" marT="45720" marB="45720">
+                    <a:lnL w="6350" cap="flat" cmpd="sng" algn="ctr">
+                      <a:solidFill>
+                        <a:srgbClr val="E5E2DC"/>
+                      </a:solidFill>
+                      <a:prstDash val="solid"/>
+                      <a:round/>
+                      <a:headEnd type="none" w="med" len="med"/>
+                      <a:tailEnd type="none" w="med" len="med"/>
+                    </a:lnL>
+                    <a:lnR w="6350" cap="flat" cmpd="sng" algn="ctr">
+                      <a:solidFill>
+                        <a:srgbClr val="E5E2DC"/>
+                      </a:solidFill>
+                      <a:prstDash val="solid"/>
+                      <a:round/>
+                      <a:headEnd type="none" w="med" len="med"/>
+                      <a:tailEnd type="none" w="med" len="med"/>
+                    </a:lnR>
+                    <a:lnT w="6350" cap="flat" cmpd="sng" algn="ctr">
+                      <a:solidFill>
+                        <a:srgbClr val="E5E2DC"/>
+                      </a:solidFill>
+                      <a:prstDash val="solid"/>
+                      <a:round/>
+                      <a:headEnd type="none" w="med" len="med"/>
+                      <a:tailEnd type="none" w="med" len="med"/>
+                    </a:lnT>
+                    <a:lnB w="6350" cap="flat" cmpd="sng" algn="ctr">
+                      <a:solidFill>
+                        <a:srgbClr val="E5E2DC"/>
+                      </a:solidFill>
+                      <a:prstDash val="solid"/>
+                      <a:round/>
+                      <a:headEnd type="none" w="med" len="med"/>
+                      <a:tailEnd type="none" w="med" len="med"/>
+                    </a:lnB>
+                    <a:solidFill>
+                      <a:srgbClr val="F8F6F3"/>
+                    </a:solidFill>
+                  </a:tcPr>
+                </a:tc>
+                <a:tc>
+                  <a:txBody>
+                    <a:bodyPr/>
+                    <a:lstStyle/>
+                    <a:p>
+                      <a:pPr indent="0" marL="0">
+                        <a:buNone/>
+                      </a:pPr>
+                      <a:r>
+                        <a:rPr lang="en-US" sz="1200" dirty="0">
+                          <a:solidFill>
+                            <a:srgbClr val="3D3A36"/>
+                          </a:solidFill>
+                          <a:latin typeface="Calibri" pitchFamily="34" charset="0"/>
+                          <a:ea typeface="Calibri" pitchFamily="34" charset="-122"/>
+                          <a:cs typeface="Calibri" pitchFamily="34" charset="-120"/>
+                        </a:rPr>
+                        <a:t>0.06</a:t>
+                      </a:r>
+                      <a:endParaRPr lang="en-US" sz="1200" dirty="0">
+                        <a:latin typeface="Calibri" charset="0"/>
+                        <a:ea typeface="Calibri" charset="0"/>
+                        <a:cs typeface="Calibri" charset="0"/>
+                      </a:endParaRPr>
+                    </a:p>
+                  </a:txBody>
+                  <a:tcPr marL="91440" marR="91440" marT="45720" marB="45720">
+                    <a:lnL w="6350" cap="flat" cmpd="sng" algn="ctr">
+                      <a:solidFill>
+                        <a:srgbClr val="E5E2DC"/>
+                      </a:solidFill>
+                      <a:prstDash val="solid"/>
+                      <a:round/>
+                      <a:headEnd type="none" w="med" len="med"/>
+                      <a:tailEnd type="none" w="med" len="med"/>
+                    </a:lnL>
+                    <a:lnR w="6350" cap="flat" cmpd="sng" algn="ctr">
+                      <a:solidFill>
+                        <a:srgbClr val="E5E2DC"/>
+                      </a:solidFill>
+                      <a:prstDash val="solid"/>
+                      <a:round/>
+                      <a:headEnd type="none" w="med" len="med"/>
+                      <a:tailEnd type="none" w="med" len="med"/>
+                    </a:lnR>
+                    <a:lnT w="6350" cap="flat" cmpd="sng" algn="ctr">
+                      <a:solidFill>
+                        <a:srgbClr val="E5E2DC"/>
+                      </a:solidFill>
+                      <a:prstDash val="solid"/>
+                      <a:round/>
+                      <a:headEnd type="none" w="med" len="med"/>
+                      <a:tailEnd type="none" w="med" len="med"/>
+                    </a:lnT>
+                    <a:lnB w="6350" cap="flat" cmpd="sng" algn="ctr">
+                      <a:solidFill>
+                        <a:srgbClr val="E5E2DC"/>
+                      </a:solidFill>
+                      <a:prstDash val="solid"/>
+                      <a:round/>
+                      <a:headEnd type="none" w="med" len="med"/>
+                      <a:tailEnd type="none" w="med" len="med"/>
+                    </a:lnB>
+                    <a:solidFill>
+                      <a:srgbClr val="F8F6F3"/>
+                    </a:solidFill>
+                  </a:tcPr>
+                </a:tc>
+              </a:tr>
+            </a:tbl>
+          </a:graphicData>
+        </a:graphic>
+      </p:graphicFrame>
     </p:spTree>
   </p:cSld>
   <p:clrMapOvr>
@@ -2345,7 +4753,7 @@
     <p:bg>
       <p:bgPr>
         <a:solidFill>
-          <a:srgbClr val="1B2A4A"/>
+          <a:srgbClr val="FAF8F5"/>
         </a:solidFill>
       </p:bgPr>
     </p:bg>
@@ -2372,27 +4780,67 @@
         <p:spPr>
           <a:xfrm>
             <a:off x="0" y="0"/>
-            <a:ext cx="109728" cy="5143500"/>
+            <a:ext cx="9144000" cy="822960"/>
           </a:xfrm>
           <a:prstGeom prst="rect">
             <a:avLst/>
           </a:prstGeom>
           <a:solidFill>
-            <a:srgbClr val="E9C46A"/>
+            <a:srgbClr val="FFFFFF"/>
           </a:solidFill>
           <a:ln/>
         </p:spPr>
       </p:sp>
       <p:sp>
         <p:nvSpPr>
-          <p:cNvPr id="3" name="Text 1"/>
-          <p:cNvSpPr/>
-          <p:nvPr/>
-        </p:nvSpPr>
-        <p:spPr>
-          <a:xfrm>
-            <a:off x="731520" y="457200"/>
-            <a:ext cx="7772400" cy="731520"/>
+          <p:cNvPr id="3" name="Shape 1"/>
+          <p:cNvSpPr/>
+          <p:nvPr/>
+        </p:nvSpPr>
+        <p:spPr>
+          <a:xfrm>
+            <a:off x="0" y="804672"/>
+            <a:ext cx="9144000" cy="27432"/>
+          </a:xfrm>
+          <a:prstGeom prst="rect">
+            <a:avLst/>
+          </a:prstGeom>
+          <a:solidFill>
+            <a:srgbClr val="E5E2DC"/>
+          </a:solidFill>
+          <a:ln/>
+        </p:spPr>
+      </p:sp>
+      <p:sp>
+        <p:nvSpPr>
+          <p:cNvPr id="4" name="Shape 2"/>
+          <p:cNvSpPr/>
+          <p:nvPr/>
+        </p:nvSpPr>
+        <p:spPr>
+          <a:xfrm>
+            <a:off x="548640" y="201168"/>
+            <a:ext cx="54864" cy="420624"/>
+          </a:xfrm>
+          <a:prstGeom prst="rect">
+            <a:avLst/>
+          </a:prstGeom>
+          <a:solidFill>
+            <a:srgbClr val="2A9D8F"/>
+          </a:solidFill>
+          <a:ln/>
+        </p:spPr>
+      </p:sp>
+      <p:sp>
+        <p:nvSpPr>
+          <p:cNvPr id="5" name="Text 3"/>
+          <p:cNvSpPr/>
+          <p:nvPr/>
+        </p:nvSpPr>
+        <p:spPr>
+          <a:xfrm>
+            <a:off x="777240" y="137160"/>
+            <a:ext cx="7772400" cy="548640"/>
           </a:xfrm>
           <a:prstGeom prst="rect">
             <a:avLst/>
@@ -2401,14 +4849,1596 @@
           <a:ln/>
         </p:spPr>
         <p:txBody>
-          <a:bodyPr wrap="square" rtlCol="0" anchor="ctr"/>
+          <a:bodyPr wrap="square" lIns="0" tIns="0" rIns="0" bIns="0" rtlCol="0" anchor="ctr"/>
           <a:lstStyle/>
           <a:p>
             <a:pPr indent="0" marL="0">
               <a:buNone/>
             </a:pPr>
             <a:r>
-              <a:rPr lang="en-US" sz="3200" b="1" dirty="0">
+              <a:rPr lang="en-US" sz="2000" b="1" dirty="0">
+                <a:solidFill>
+                  <a:srgbClr val="1B2A4A"/>
+                </a:solidFill>
+                <a:latin typeface="Georgia" pitchFamily="34" charset="0"/>
+                <a:ea typeface="Georgia" pitchFamily="34" charset="-122"/>
+                <a:cs typeface="Georgia" pitchFamily="34" charset="-120"/>
+              </a:rPr>
+              <a:t>Comparing and Ordering Numbers</a:t>
+            </a:r>
+            <a:endParaRPr lang="en-US" sz="2000" dirty="0"/>
+          </a:p>
+        </p:txBody>
+      </p:sp>
+      <p:sp>
+        <p:nvSpPr>
+          <p:cNvPr id="6" name="Text 4"/>
+          <p:cNvSpPr/>
+          <p:nvPr/>
+        </p:nvSpPr>
+        <p:spPr>
+          <a:xfrm>
+            <a:off x="731520" y="1051560"/>
+            <a:ext cx="7680960" cy="3108960"/>
+          </a:xfrm>
+          <a:prstGeom prst="rect">
+            <a:avLst/>
+          </a:prstGeom>
+          <a:noFill/>
+          <a:ln/>
+        </p:spPr>
+        <p:txBody>
+          <a:bodyPr wrap="square" rtlCol="0" anchor="t"/>
+          <a:lstStyle/>
+          <a:p>
+            <a:pPr marL="342900" indent="-342900">
+              <a:spcAft>
+                <a:spcPts val="800"/>
+              </a:spcAft>
+              <a:buSzPct val="100000"/>
+              <a:buChar char="•"/>
+            </a:pPr>
+            <a:r>
+              <a:rPr lang="en-US" sz="1500" dirty="0">
+                <a:solidFill>
+                  <a:srgbClr val="3D3A36"/>
+                </a:solidFill>
+                <a:latin typeface="Calibri" pitchFamily="34" charset="0"/>
+                <a:ea typeface="Calibri" pitchFamily="34" charset="-122"/>
+                <a:cs typeface="Calibri" pitchFamily="34" charset="-120"/>
+              </a:rPr>
+              <a:t>Compare from LEFT to RIGHT — start with the biggest place value.</a:t>
+            </a:r>
+            <a:endParaRPr lang="en-US" sz="1500" dirty="0"/>
+          </a:p>
+          <a:p>
+            <a:pPr marL="342900" indent="-342900">
+              <a:spcAft>
+                <a:spcPts val="800"/>
+              </a:spcAft>
+              <a:buSzPct val="100000"/>
+              <a:buChar char="•"/>
+            </a:pPr>
+            <a:r>
+              <a:rPr lang="en-US" sz="1500" dirty="0">
+                <a:solidFill>
+                  <a:srgbClr val="3D3A36"/>
+                </a:solidFill>
+                <a:latin typeface="Calibri" pitchFamily="34" charset="0"/>
+                <a:ea typeface="Calibri" pitchFamily="34" charset="-122"/>
+                <a:cs typeface="Calibri" pitchFamily="34" charset="-120"/>
+              </a:rPr>
+              <a:t>Example: 4,521 vs 4,318 → same thousands (4), different hundreds (5 &gt; 3), so 4,521 &gt; 4,318.</a:t>
+            </a:r>
+            <a:endParaRPr lang="en-US" sz="1500" dirty="0"/>
+          </a:p>
+          <a:p>
+            <a:pPr marL="342900" indent="-342900">
+              <a:spcAft>
+                <a:spcPts val="800"/>
+              </a:spcAft>
+              <a:buSzPct val="100000"/>
+              <a:buChar char="•"/>
+            </a:pPr>
+            <a:r>
+              <a:rPr lang="en-US" sz="1500" dirty="0">
+                <a:solidFill>
+                  <a:srgbClr val="3D3A36"/>
+                </a:solidFill>
+                <a:latin typeface="Calibri" pitchFamily="34" charset="0"/>
+                <a:ea typeface="Calibri" pitchFamily="34" charset="-122"/>
+                <a:cs typeface="Calibri" pitchFamily="34" charset="-120"/>
+              </a:rPr>
+              <a:t>Use &lt; (less than), &gt; (greater than), = (equal to).</a:t>
+            </a:r>
+            <a:endParaRPr lang="en-US" sz="1500" dirty="0"/>
+          </a:p>
+          <a:p>
+            <a:pPr marL="342900" indent="-342900">
+              <a:spcAft>
+                <a:spcPts val="800"/>
+              </a:spcAft>
+              <a:buSzPct val="100000"/>
+              <a:buChar char="•"/>
+            </a:pPr>
+            <a:r>
+              <a:rPr lang="en-US" sz="1500" dirty="0">
+                <a:solidFill>
+                  <a:srgbClr val="3D3A36"/>
+                </a:solidFill>
+                <a:latin typeface="Calibri" pitchFamily="34" charset="0"/>
+                <a:ea typeface="Calibri" pitchFamily="34" charset="-122"/>
+                <a:cs typeface="Calibri" pitchFamily="34" charset="-120"/>
+              </a:rPr>
+              <a:t>To ORDER numbers: put them in a place value chart and compare column by column.</a:t>
+            </a:r>
+            <a:endParaRPr lang="en-US" sz="1500" dirty="0"/>
+          </a:p>
+          <a:p>
+            <a:pPr marL="342900" indent="-342900">
+              <a:spcAft>
+                <a:spcPts val="800"/>
+              </a:spcAft>
+              <a:buSzPct val="100000"/>
+              <a:buChar char="•"/>
+            </a:pPr>
+            <a:r>
+              <a:rPr lang="en-US" sz="1500" dirty="0">
+                <a:solidFill>
+                  <a:srgbClr val="3D3A36"/>
+                </a:solidFill>
+                <a:latin typeface="Calibri" pitchFamily="34" charset="0"/>
+                <a:ea typeface="Calibri" pitchFamily="34" charset="-122"/>
+                <a:cs typeface="Calibri" pitchFamily="34" charset="-120"/>
+              </a:rPr>
+              <a:t>Ascending = smallest to largest. Descending = largest to smallest.</a:t>
+            </a:r>
+            <a:endParaRPr lang="en-US" sz="1500" dirty="0"/>
+          </a:p>
+        </p:txBody>
+      </p:sp>
+      <p:sp>
+        <p:nvSpPr>
+          <p:cNvPr id="7" name="Shape 5"/>
+          <p:cNvSpPr/>
+          <p:nvPr/>
+        </p:nvSpPr>
+        <p:spPr>
+          <a:xfrm>
+            <a:off x="731520" y="4206240"/>
+            <a:ext cx="7680960" cy="640080"/>
+          </a:xfrm>
+          <a:prstGeom prst="rect">
+            <a:avLst/>
+          </a:prstGeom>
+          <a:solidFill>
+            <a:srgbClr val="E8F5F3"/>
+          </a:solidFill>
+          <a:ln/>
+          <a:effectLst>
+            <a:outerShdw sx="100000" sy="100000" kx="0" ky="0" algn="bl" rotWithShape="0" blurRad="50800" dist="25400" dir="8100000">
+              <a:srgbClr val="000000">
+                <a:alpha val="10000"/>
+              </a:srgbClr>
+            </a:outerShdw>
+          </a:effectLst>
+        </p:spPr>
+      </p:sp>
+      <p:sp>
+        <p:nvSpPr>
+          <p:cNvPr id="8" name="Text 6"/>
+          <p:cNvSpPr/>
+          <p:nvPr/>
+        </p:nvSpPr>
+        <p:spPr>
+          <a:xfrm>
+            <a:off x="914400" y="4251960"/>
+            <a:ext cx="7315200" cy="548640"/>
+          </a:xfrm>
+          <a:prstGeom prst="rect">
+            <a:avLst/>
+          </a:prstGeom>
+          <a:noFill/>
+          <a:ln/>
+        </p:spPr>
+        <p:txBody>
+          <a:bodyPr wrap="square" rtlCol="0" anchor="ctr"/>
+          <a:lstStyle/>
+          <a:p>
+            <a:pPr indent="0" marL="0">
+              <a:buNone/>
+            </a:pPr>
+            <a:r>
+              <a:rPr lang="en-US" sz="1200" b="1" dirty="0">
+                <a:solidFill>
+                  <a:srgbClr val="2A9D8F"/>
+                </a:solidFill>
+                <a:latin typeface="Calibri" pitchFamily="34" charset="0"/>
+                <a:ea typeface="Calibri" pitchFamily="34" charset="-122"/>
+                <a:cs typeface="Calibri" pitchFamily="34" charset="-120"/>
+              </a:rPr>
+              <a:t>Key Idea: </a:t>
+            </a:r>
+            <a:pPr indent="0" marL="0">
+              <a:buNone/>
+            </a:pPr>
+            <a:r>
+              <a:rPr lang="en-US" sz="1200" i="1" dirty="0">
+                <a:solidFill>
+                  <a:srgbClr val="3D3A36"/>
+                </a:solidFill>
+                <a:latin typeface="Calibri" pitchFamily="34" charset="0"/>
+                <a:ea typeface="Calibri" pitchFamily="34" charset="-122"/>
+                <a:cs typeface="Calibri" pitchFamily="34" charset="-120"/>
+              </a:rPr>
+              <a:t>The crocodile always eats the bigger number: 5 &gt; 3 (mouth opens towards 5).</a:t>
+            </a:r>
+            <a:endParaRPr lang="en-US" sz="1200" dirty="0"/>
+          </a:p>
+        </p:txBody>
+      </p:sp>
+    </p:spTree>
+  </p:cSld>
+  <p:clrMapOvr>
+    <a:masterClrMapping/>
+  </p:clrMapOvr>
+</p:sld>
+</file>
+
+<file path=ppt/slides/slide6.xml><?xml version="1.0" encoding="utf-8"?>
+<p:sld xmlns:a="http://schemas.openxmlformats.org/drawingml/2006/main" xmlns:r="http://schemas.openxmlformats.org/officeDocument/2006/relationships" xmlns:p="http://schemas.openxmlformats.org/presentationml/2006/main">
+  <p:cSld name="Slide 6">
+    <p:bg>
+      <p:bgPr>
+        <a:solidFill>
+          <a:srgbClr val="FAF8F5"/>
+        </a:solidFill>
+      </p:bgPr>
+    </p:bg>
+    <p:spTree>
+      <p:nvGrpSpPr>
+        <p:cNvPr id="1" name=""/>
+        <p:cNvGrpSpPr/>
+        <p:nvPr/>
+      </p:nvGrpSpPr>
+      <p:grpSpPr>
+        <a:xfrm>
+          <a:off x="0" y="0"/>
+          <a:ext cx="0" cy="0"/>
+          <a:chOff x="0" y="0"/>
+          <a:chExt cx="0" cy="0"/>
+        </a:xfrm>
+      </p:grpSpPr>
+      <p:sp>
+        <p:nvSpPr>
+          <p:cNvPr id="2" name="Shape 0"/>
+          <p:cNvSpPr/>
+          <p:nvPr/>
+        </p:nvSpPr>
+        <p:spPr>
+          <a:xfrm>
+            <a:off x="0" y="0"/>
+            <a:ext cx="9144000" cy="822960"/>
+          </a:xfrm>
+          <a:prstGeom prst="rect">
+            <a:avLst/>
+          </a:prstGeom>
+          <a:solidFill>
+            <a:srgbClr val="FFFFFF"/>
+          </a:solidFill>
+          <a:ln/>
+        </p:spPr>
+      </p:sp>
+      <p:sp>
+        <p:nvSpPr>
+          <p:cNvPr id="3" name="Shape 1"/>
+          <p:cNvSpPr/>
+          <p:nvPr/>
+        </p:nvSpPr>
+        <p:spPr>
+          <a:xfrm>
+            <a:off x="0" y="804672"/>
+            <a:ext cx="9144000" cy="27432"/>
+          </a:xfrm>
+          <a:prstGeom prst="rect">
+            <a:avLst/>
+          </a:prstGeom>
+          <a:solidFill>
+            <a:srgbClr val="E5E2DC"/>
+          </a:solidFill>
+          <a:ln/>
+        </p:spPr>
+      </p:sp>
+      <p:sp>
+        <p:nvSpPr>
+          <p:cNvPr id="4" name="Shape 2"/>
+          <p:cNvSpPr/>
+          <p:nvPr/>
+        </p:nvSpPr>
+        <p:spPr>
+          <a:xfrm>
+            <a:off x="548640" y="201168"/>
+            <a:ext cx="54864" cy="420624"/>
+          </a:xfrm>
+          <a:prstGeom prst="rect">
+            <a:avLst/>
+          </a:prstGeom>
+          <a:solidFill>
+            <a:srgbClr val="2A9D8F"/>
+          </a:solidFill>
+          <a:ln/>
+        </p:spPr>
+      </p:sp>
+      <p:sp>
+        <p:nvSpPr>
+          <p:cNvPr id="5" name="Text 3"/>
+          <p:cNvSpPr/>
+          <p:nvPr/>
+        </p:nvSpPr>
+        <p:spPr>
+          <a:xfrm>
+            <a:off x="777240" y="137160"/>
+            <a:ext cx="7772400" cy="548640"/>
+          </a:xfrm>
+          <a:prstGeom prst="rect">
+            <a:avLst/>
+          </a:prstGeom>
+          <a:noFill/>
+          <a:ln/>
+        </p:spPr>
+        <p:txBody>
+          <a:bodyPr wrap="square" lIns="0" tIns="0" rIns="0" bIns="0" rtlCol="0" anchor="ctr"/>
+          <a:lstStyle/>
+          <a:p>
+            <a:pPr indent="0" marL="0">
+              <a:buNone/>
+            </a:pPr>
+            <a:r>
+              <a:rPr lang="en-US" sz="2000" b="1" dirty="0">
+                <a:solidFill>
+                  <a:srgbClr val="1B2A4A"/>
+                </a:solidFill>
+                <a:latin typeface="Georgia" pitchFamily="34" charset="0"/>
+                <a:ea typeface="Georgia" pitchFamily="34" charset="-122"/>
+                <a:cs typeface="Georgia" pitchFamily="34" charset="-120"/>
+              </a:rPr>
+              <a:t>Powers of 10</a:t>
+            </a:r>
+            <a:endParaRPr lang="en-US" sz="2000" dirty="0"/>
+          </a:p>
+        </p:txBody>
+      </p:sp>
+      <p:sp>
+        <p:nvSpPr>
+          <p:cNvPr id="6" name="Shape 4"/>
+          <p:cNvSpPr/>
+          <p:nvPr/>
+        </p:nvSpPr>
+        <p:spPr>
+          <a:xfrm>
+            <a:off x="731520" y="1280160"/>
+            <a:ext cx="2377440" cy="2377440"/>
+          </a:xfrm>
+          <a:prstGeom prst="rect">
+            <a:avLst/>
+          </a:prstGeom>
+          <a:solidFill>
+            <a:srgbClr val="FFFFFF"/>
+          </a:solidFill>
+          <a:ln/>
+          <a:effectLst>
+            <a:outerShdw sx="100000" sy="100000" kx="0" ky="0" algn="bl" rotWithShape="0" blurRad="50800" dist="25400" dir="8100000">
+              <a:srgbClr val="000000">
+                <a:alpha val="10000"/>
+              </a:srgbClr>
+            </a:outerShdw>
+          </a:effectLst>
+        </p:spPr>
+      </p:sp>
+      <p:sp>
+        <p:nvSpPr>
+          <p:cNvPr id="7" name="Text 5"/>
+          <p:cNvSpPr/>
+          <p:nvPr/>
+        </p:nvSpPr>
+        <p:spPr>
+          <a:xfrm>
+            <a:off x="731520" y="1463040"/>
+            <a:ext cx="2377440" cy="914400"/>
+          </a:xfrm>
+          <a:prstGeom prst="rect">
+            <a:avLst/>
+          </a:prstGeom>
+          <a:noFill/>
+          <a:ln/>
+        </p:spPr>
+        <p:txBody>
+          <a:bodyPr wrap="square" rtlCol="0" anchor="ctr"/>
+          <a:lstStyle/>
+          <a:p>
+            <a:pPr algn="ctr" indent="0" marL="0">
+              <a:buNone/>
+            </a:pPr>
+            <a:r>
+              <a:rPr lang="en-US" sz="3600" b="1" dirty="0">
+                <a:solidFill>
+                  <a:srgbClr val="2A9D8F"/>
+                </a:solidFill>
+                <a:latin typeface="Georgia" pitchFamily="34" charset="0"/>
+                <a:ea typeface="Georgia" pitchFamily="34" charset="-122"/>
+                <a:cs typeface="Georgia" pitchFamily="34" charset="-120"/>
+              </a:rPr>
+              <a:t>×10</a:t>
+            </a:r>
+            <a:endParaRPr lang="en-US" sz="3600" dirty="0"/>
+          </a:p>
+        </p:txBody>
+      </p:sp>
+      <p:sp>
+        <p:nvSpPr>
+          <p:cNvPr id="8" name="Text 6"/>
+          <p:cNvSpPr/>
+          <p:nvPr/>
+        </p:nvSpPr>
+        <p:spPr>
+          <a:xfrm>
+            <a:off x="731520" y="2423160"/>
+            <a:ext cx="2377440" cy="365760"/>
+          </a:xfrm>
+          <a:prstGeom prst="rect">
+            <a:avLst/>
+          </a:prstGeom>
+          <a:noFill/>
+          <a:ln/>
+        </p:spPr>
+        <p:txBody>
+          <a:bodyPr wrap="square" rtlCol="0" anchor="ctr"/>
+          <a:lstStyle/>
+          <a:p>
+            <a:pPr algn="ctr" indent="0" marL="0">
+              <a:buNone/>
+            </a:pPr>
+            <a:r>
+              <a:rPr lang="en-US" sz="1200" b="1" dirty="0">
+                <a:solidFill>
+                  <a:srgbClr val="6B6660"/>
+                </a:solidFill>
+                <a:latin typeface="Calibri" pitchFamily="34" charset="0"/>
+                <a:ea typeface="Calibri" pitchFamily="34" charset="-122"/>
+                <a:cs typeface="Calibri" pitchFamily="34" charset="-120"/>
+              </a:rPr>
+              <a:t>EACH PLACE LEFT</a:t>
+            </a:r>
+            <a:endParaRPr lang="en-US" sz="1200" dirty="0"/>
+          </a:p>
+        </p:txBody>
+      </p:sp>
+      <p:sp>
+        <p:nvSpPr>
+          <p:cNvPr id="9" name="Text 7"/>
+          <p:cNvSpPr/>
+          <p:nvPr/>
+        </p:nvSpPr>
+        <p:spPr>
+          <a:xfrm>
+            <a:off x="822960" y="2834640"/>
+            <a:ext cx="2194560" cy="640080"/>
+          </a:xfrm>
+          <a:prstGeom prst="rect">
+            <a:avLst/>
+          </a:prstGeom>
+          <a:noFill/>
+          <a:ln/>
+        </p:spPr>
+        <p:txBody>
+          <a:bodyPr wrap="square" rtlCol="0" anchor="ctr"/>
+          <a:lstStyle/>
+          <a:p>
+            <a:pPr algn="ctr" indent="0" marL="0">
+              <a:buNone/>
+            </a:pPr>
+            <a:r>
+              <a:rPr lang="en-US" sz="1000" dirty="0">
+                <a:solidFill>
+                  <a:srgbClr val="9B9690"/>
+                </a:solidFill>
+                <a:latin typeface="Calibri" pitchFamily="34" charset="0"/>
+                <a:ea typeface="Calibri" pitchFamily="34" charset="-122"/>
+                <a:cs typeface="Calibri" pitchFamily="34" charset="-120"/>
+              </a:rPr>
+              <a:t>Ones → Tens → Hundreds → Thousands</a:t>
+            </a:r>
+            <a:endParaRPr lang="en-US" sz="1000" dirty="0"/>
+          </a:p>
+        </p:txBody>
+      </p:sp>
+      <p:sp>
+        <p:nvSpPr>
+          <p:cNvPr id="10" name="Shape 8"/>
+          <p:cNvSpPr/>
+          <p:nvPr/>
+        </p:nvSpPr>
+        <p:spPr>
+          <a:xfrm>
+            <a:off x="3383280" y="1280160"/>
+            <a:ext cx="2377440" cy="2377440"/>
+          </a:xfrm>
+          <a:prstGeom prst="rect">
+            <a:avLst/>
+          </a:prstGeom>
+          <a:solidFill>
+            <a:srgbClr val="FFFFFF"/>
+          </a:solidFill>
+          <a:ln/>
+          <a:effectLst>
+            <a:outerShdw sx="100000" sy="100000" kx="0" ky="0" algn="bl" rotWithShape="0" blurRad="50800" dist="25400" dir="8100000">
+              <a:srgbClr val="000000">
+                <a:alpha val="10000"/>
+              </a:srgbClr>
+            </a:outerShdw>
+          </a:effectLst>
+        </p:spPr>
+      </p:sp>
+      <p:sp>
+        <p:nvSpPr>
+          <p:cNvPr id="11" name="Text 9"/>
+          <p:cNvSpPr/>
+          <p:nvPr/>
+        </p:nvSpPr>
+        <p:spPr>
+          <a:xfrm>
+            <a:off x="3383280" y="1463040"/>
+            <a:ext cx="2377440" cy="914400"/>
+          </a:xfrm>
+          <a:prstGeom prst="rect">
+            <a:avLst/>
+          </a:prstGeom>
+          <a:noFill/>
+          <a:ln/>
+        </p:spPr>
+        <p:txBody>
+          <a:bodyPr wrap="square" rtlCol="0" anchor="ctr"/>
+          <a:lstStyle/>
+          <a:p>
+            <a:pPr algn="ctr" indent="0" marL="0">
+              <a:buNone/>
+            </a:pPr>
+            <a:r>
+              <a:rPr lang="en-US" sz="3600" b="1" dirty="0">
+                <a:solidFill>
+                  <a:srgbClr val="2A9D8F"/>
+                </a:solidFill>
+                <a:latin typeface="Georgia" pitchFamily="34" charset="0"/>
+                <a:ea typeface="Georgia" pitchFamily="34" charset="-122"/>
+                <a:cs typeface="Georgia" pitchFamily="34" charset="-120"/>
+              </a:rPr>
+              <a:t>÷10</a:t>
+            </a:r>
+            <a:endParaRPr lang="en-US" sz="3600" dirty="0"/>
+          </a:p>
+        </p:txBody>
+      </p:sp>
+      <p:sp>
+        <p:nvSpPr>
+          <p:cNvPr id="12" name="Text 10"/>
+          <p:cNvSpPr/>
+          <p:nvPr/>
+        </p:nvSpPr>
+        <p:spPr>
+          <a:xfrm>
+            <a:off x="3383280" y="2423160"/>
+            <a:ext cx="2377440" cy="365760"/>
+          </a:xfrm>
+          <a:prstGeom prst="rect">
+            <a:avLst/>
+          </a:prstGeom>
+          <a:noFill/>
+          <a:ln/>
+        </p:spPr>
+        <p:txBody>
+          <a:bodyPr wrap="square" rtlCol="0" anchor="ctr"/>
+          <a:lstStyle/>
+          <a:p>
+            <a:pPr algn="ctr" indent="0" marL="0">
+              <a:buNone/>
+            </a:pPr>
+            <a:r>
+              <a:rPr lang="en-US" sz="1200" b="1" dirty="0">
+                <a:solidFill>
+                  <a:srgbClr val="6B6660"/>
+                </a:solidFill>
+                <a:latin typeface="Calibri" pitchFamily="34" charset="0"/>
+                <a:ea typeface="Calibri" pitchFamily="34" charset="-122"/>
+                <a:cs typeface="Calibri" pitchFamily="34" charset="-120"/>
+              </a:rPr>
+              <a:t>EACH PLACE RIGHT</a:t>
+            </a:r>
+            <a:endParaRPr lang="en-US" sz="1200" dirty="0"/>
+          </a:p>
+        </p:txBody>
+      </p:sp>
+      <p:sp>
+        <p:nvSpPr>
+          <p:cNvPr id="13" name="Text 11"/>
+          <p:cNvSpPr/>
+          <p:nvPr/>
+        </p:nvSpPr>
+        <p:spPr>
+          <a:xfrm>
+            <a:off x="3474720" y="2834640"/>
+            <a:ext cx="2194560" cy="640080"/>
+          </a:xfrm>
+          <a:prstGeom prst="rect">
+            <a:avLst/>
+          </a:prstGeom>
+          <a:noFill/>
+          <a:ln/>
+        </p:spPr>
+        <p:txBody>
+          <a:bodyPr wrap="square" rtlCol="0" anchor="ctr"/>
+          <a:lstStyle/>
+          <a:p>
+            <a:pPr algn="ctr" indent="0" marL="0">
+              <a:buNone/>
+            </a:pPr>
+            <a:r>
+              <a:rPr lang="en-US" sz="1000" dirty="0">
+                <a:solidFill>
+                  <a:srgbClr val="9B9690"/>
+                </a:solidFill>
+                <a:latin typeface="Calibri" pitchFamily="34" charset="0"/>
+                <a:ea typeface="Calibri" pitchFamily="34" charset="-122"/>
+                <a:cs typeface="Calibri" pitchFamily="34" charset="-120"/>
+              </a:rPr>
+              <a:t>Ones → Tenths → Hundredths</a:t>
+            </a:r>
+            <a:endParaRPr lang="en-US" sz="1000" dirty="0"/>
+          </a:p>
+        </p:txBody>
+      </p:sp>
+      <p:sp>
+        <p:nvSpPr>
+          <p:cNvPr id="14" name="Shape 12"/>
+          <p:cNvSpPr/>
+          <p:nvPr/>
+        </p:nvSpPr>
+        <p:spPr>
+          <a:xfrm>
+            <a:off x="6035040" y="1280160"/>
+            <a:ext cx="2377440" cy="2377440"/>
+          </a:xfrm>
+          <a:prstGeom prst="rect">
+            <a:avLst/>
+          </a:prstGeom>
+          <a:solidFill>
+            <a:srgbClr val="FFFFFF"/>
+          </a:solidFill>
+          <a:ln/>
+          <a:effectLst>
+            <a:outerShdw sx="100000" sy="100000" kx="0" ky="0" algn="bl" rotWithShape="0" blurRad="50800" dist="25400" dir="8100000">
+              <a:srgbClr val="000000">
+                <a:alpha val="10000"/>
+              </a:srgbClr>
+            </a:outerShdw>
+          </a:effectLst>
+        </p:spPr>
+      </p:sp>
+      <p:sp>
+        <p:nvSpPr>
+          <p:cNvPr id="15" name="Text 13"/>
+          <p:cNvSpPr/>
+          <p:nvPr/>
+        </p:nvSpPr>
+        <p:spPr>
+          <a:xfrm>
+            <a:off x="6035040" y="1463040"/>
+            <a:ext cx="2377440" cy="914400"/>
+          </a:xfrm>
+          <a:prstGeom prst="rect">
+            <a:avLst/>
+          </a:prstGeom>
+          <a:noFill/>
+          <a:ln/>
+        </p:spPr>
+        <p:txBody>
+          <a:bodyPr wrap="square" rtlCol="0" anchor="ctr"/>
+          <a:lstStyle/>
+          <a:p>
+            <a:pPr algn="ctr" indent="0" marL="0">
+              <a:buNone/>
+            </a:pPr>
+            <a:r>
+              <a:rPr lang="en-US" sz="3600" b="1" dirty="0">
+                <a:solidFill>
+                  <a:srgbClr val="2A9D8F"/>
+                </a:solidFill>
+                <a:latin typeface="Georgia" pitchFamily="34" charset="0"/>
+                <a:ea typeface="Georgia" pitchFamily="34" charset="-122"/>
+                <a:cs typeface="Georgia" pitchFamily="34" charset="-120"/>
+              </a:rPr>
+              <a:t>10³</a:t>
+            </a:r>
+            <a:endParaRPr lang="en-US" sz="3600" dirty="0"/>
+          </a:p>
+        </p:txBody>
+      </p:sp>
+      <p:sp>
+        <p:nvSpPr>
+          <p:cNvPr id="16" name="Text 14"/>
+          <p:cNvSpPr/>
+          <p:nvPr/>
+        </p:nvSpPr>
+        <p:spPr>
+          <a:xfrm>
+            <a:off x="6035040" y="2423160"/>
+            <a:ext cx="2377440" cy="365760"/>
+          </a:xfrm>
+          <a:prstGeom prst="rect">
+            <a:avLst/>
+          </a:prstGeom>
+          <a:noFill/>
+          <a:ln/>
+        </p:spPr>
+        <p:txBody>
+          <a:bodyPr wrap="square" rtlCol="0" anchor="ctr"/>
+          <a:lstStyle/>
+          <a:p>
+            <a:pPr algn="ctr" indent="0" marL="0">
+              <a:buNone/>
+            </a:pPr>
+            <a:r>
+              <a:rPr lang="en-US" sz="1200" b="1" dirty="0">
+                <a:solidFill>
+                  <a:srgbClr val="6B6660"/>
+                </a:solidFill>
+                <a:latin typeface="Calibri" pitchFamily="34" charset="0"/>
+                <a:ea typeface="Calibri" pitchFamily="34" charset="-122"/>
+                <a:cs typeface="Calibri" pitchFamily="34" charset="-120"/>
+              </a:rPr>
+              <a:t>= 1,000</a:t>
+            </a:r>
+            <a:endParaRPr lang="en-US" sz="1200" dirty="0"/>
+          </a:p>
+        </p:txBody>
+      </p:sp>
+      <p:sp>
+        <p:nvSpPr>
+          <p:cNvPr id="17" name="Text 15"/>
+          <p:cNvSpPr/>
+          <p:nvPr/>
+        </p:nvSpPr>
+        <p:spPr>
+          <a:xfrm>
+            <a:off x="6126480" y="2834640"/>
+            <a:ext cx="2194560" cy="640080"/>
+          </a:xfrm>
+          <a:prstGeom prst="rect">
+            <a:avLst/>
+          </a:prstGeom>
+          <a:noFill/>
+          <a:ln/>
+        </p:spPr>
+        <p:txBody>
+          <a:bodyPr wrap="square" rtlCol="0" anchor="ctr"/>
+          <a:lstStyle/>
+          <a:p>
+            <a:pPr algn="ctr" indent="0" marL="0">
+              <a:buNone/>
+            </a:pPr>
+            <a:r>
+              <a:rPr lang="en-US" sz="1000" dirty="0">
+                <a:solidFill>
+                  <a:srgbClr val="9B9690"/>
+                </a:solidFill>
+                <a:latin typeface="Calibri" pitchFamily="34" charset="0"/>
+                <a:ea typeface="Calibri" pitchFamily="34" charset="-122"/>
+                <a:cs typeface="Calibri" pitchFamily="34" charset="-120"/>
+              </a:rPr>
+              <a:t>10 × 10 × 10</a:t>
+            </a:r>
+            <a:endParaRPr lang="en-US" sz="1000" dirty="0"/>
+          </a:p>
+        </p:txBody>
+      </p:sp>
+    </p:spTree>
+  </p:cSld>
+  <p:clrMapOvr>
+    <a:masterClrMapping/>
+  </p:clrMapOvr>
+</p:sld>
+</file>
+
+<file path=ppt/slides/slide7.xml><?xml version="1.0" encoding="utf-8"?>
+<p:sld xmlns:a="http://schemas.openxmlformats.org/drawingml/2006/main" xmlns:r="http://schemas.openxmlformats.org/officeDocument/2006/relationships" xmlns:p="http://schemas.openxmlformats.org/presentationml/2006/main">
+  <p:cSld name="Slide 7">
+    <p:bg>
+      <p:bgPr>
+        <a:solidFill>
+          <a:srgbClr val="FAF8F5"/>
+        </a:solidFill>
+      </p:bgPr>
+    </p:bg>
+    <p:spTree>
+      <p:nvGrpSpPr>
+        <p:cNvPr id="1" name=""/>
+        <p:cNvGrpSpPr/>
+        <p:nvPr/>
+      </p:nvGrpSpPr>
+      <p:grpSpPr>
+        <a:xfrm>
+          <a:off x="0" y="0"/>
+          <a:ext cx="0" cy="0"/>
+          <a:chOff x="0" y="0"/>
+          <a:chExt cx="0" cy="0"/>
+        </a:xfrm>
+      </p:grpSpPr>
+      <p:sp>
+        <p:nvSpPr>
+          <p:cNvPr id="2" name="Shape 0"/>
+          <p:cNvSpPr/>
+          <p:nvPr/>
+        </p:nvSpPr>
+        <p:spPr>
+          <a:xfrm>
+            <a:off x="0" y="0"/>
+            <a:ext cx="9144000" cy="822960"/>
+          </a:xfrm>
+          <a:prstGeom prst="rect">
+            <a:avLst/>
+          </a:prstGeom>
+          <a:solidFill>
+            <a:srgbClr val="FFFFFF"/>
+          </a:solidFill>
+          <a:ln/>
+        </p:spPr>
+      </p:sp>
+      <p:sp>
+        <p:nvSpPr>
+          <p:cNvPr id="3" name="Shape 1"/>
+          <p:cNvSpPr/>
+          <p:nvPr/>
+        </p:nvSpPr>
+        <p:spPr>
+          <a:xfrm>
+            <a:off x="0" y="804672"/>
+            <a:ext cx="9144000" cy="27432"/>
+          </a:xfrm>
+          <a:prstGeom prst="rect">
+            <a:avLst/>
+          </a:prstGeom>
+          <a:solidFill>
+            <a:srgbClr val="E5E2DC"/>
+          </a:solidFill>
+          <a:ln/>
+        </p:spPr>
+      </p:sp>
+      <p:sp>
+        <p:nvSpPr>
+          <p:cNvPr id="4" name="Shape 2"/>
+          <p:cNvSpPr/>
+          <p:nvPr/>
+        </p:nvSpPr>
+        <p:spPr>
+          <a:xfrm>
+            <a:off x="548640" y="201168"/>
+            <a:ext cx="54864" cy="420624"/>
+          </a:xfrm>
+          <a:prstGeom prst="rect">
+            <a:avLst/>
+          </a:prstGeom>
+          <a:solidFill>
+            <a:srgbClr val="2A9D8F"/>
+          </a:solidFill>
+          <a:ln/>
+        </p:spPr>
+      </p:sp>
+      <p:sp>
+        <p:nvSpPr>
+          <p:cNvPr id="5" name="Text 3"/>
+          <p:cNvSpPr/>
+          <p:nvPr/>
+        </p:nvSpPr>
+        <p:spPr>
+          <a:xfrm>
+            <a:off x="777240" y="137160"/>
+            <a:ext cx="7772400" cy="548640"/>
+          </a:xfrm>
+          <a:prstGeom prst="rect">
+            <a:avLst/>
+          </a:prstGeom>
+          <a:noFill/>
+          <a:ln/>
+        </p:spPr>
+        <p:txBody>
+          <a:bodyPr wrap="square" lIns="0" tIns="0" rIns="0" bIns="0" rtlCol="0" anchor="ctr"/>
+          <a:lstStyle/>
+          <a:p>
+            <a:pPr indent="0" marL="0">
+              <a:buNone/>
+            </a:pPr>
+            <a:r>
+              <a:rPr lang="en-US" sz="2000" b="1" dirty="0">
+                <a:solidFill>
+                  <a:srgbClr val="1B2A4A"/>
+                </a:solidFill>
+                <a:latin typeface="Georgia" pitchFamily="34" charset="0"/>
+                <a:ea typeface="Georgia" pitchFamily="34" charset="-122"/>
+                <a:cs typeface="Georgia" pitchFamily="34" charset="-120"/>
+              </a:rPr>
+              <a:t>Check Your Understanding</a:t>
+            </a:r>
+            <a:endParaRPr lang="en-US" sz="2000" dirty="0"/>
+          </a:p>
+        </p:txBody>
+      </p:sp>
+      <p:sp>
+        <p:nvSpPr>
+          <p:cNvPr id="6" name="Shape 4"/>
+          <p:cNvSpPr/>
+          <p:nvPr/>
+        </p:nvSpPr>
+        <p:spPr>
+          <a:xfrm>
+            <a:off x="731520" y="1051560"/>
+            <a:ext cx="7680960" cy="438912"/>
+          </a:xfrm>
+          <a:prstGeom prst="rect">
+            <a:avLst/>
+          </a:prstGeom>
+          <a:solidFill>
+            <a:srgbClr val="FFFFFF"/>
+          </a:solidFill>
+          <a:ln/>
+        </p:spPr>
+      </p:sp>
+      <p:sp>
+        <p:nvSpPr>
+          <p:cNvPr id="7" name="Text 5"/>
+          <p:cNvSpPr/>
+          <p:nvPr/>
+        </p:nvSpPr>
+        <p:spPr>
+          <a:xfrm>
+            <a:off x="868680" y="1051560"/>
+            <a:ext cx="320040" cy="438912"/>
+          </a:xfrm>
+          <a:prstGeom prst="rect">
+            <a:avLst/>
+          </a:prstGeom>
+          <a:noFill/>
+          <a:ln/>
+        </p:spPr>
+        <p:txBody>
+          <a:bodyPr wrap="square" rtlCol="0" anchor="ctr"/>
+          <a:lstStyle/>
+          <a:p>
+            <a:pPr indent="0" marL="0">
+              <a:buNone/>
+            </a:pPr>
+            <a:r>
+              <a:rPr lang="en-US" sz="1400" dirty="0">
+                <a:solidFill>
+                  <a:srgbClr val="2A9D8F"/>
+                </a:solidFill>
+              </a:rPr>
+              <a:t>☐</a:t>
+            </a:r>
+            <a:endParaRPr lang="en-US" sz="1400" dirty="0"/>
+          </a:p>
+        </p:txBody>
+      </p:sp>
+      <p:sp>
+        <p:nvSpPr>
+          <p:cNvPr id="8" name="Text 6"/>
+          <p:cNvSpPr/>
+          <p:nvPr/>
+        </p:nvSpPr>
+        <p:spPr>
+          <a:xfrm>
+            <a:off x="1234440" y="1051560"/>
+            <a:ext cx="6949440" cy="438912"/>
+          </a:xfrm>
+          <a:prstGeom prst="rect">
+            <a:avLst/>
+          </a:prstGeom>
+          <a:noFill/>
+          <a:ln/>
+        </p:spPr>
+        <p:txBody>
+          <a:bodyPr wrap="square" rtlCol="0" anchor="ctr"/>
+          <a:lstStyle/>
+          <a:p>
+            <a:pPr indent="0" marL="0">
+              <a:buNone/>
+            </a:pPr>
+            <a:r>
+              <a:rPr lang="en-US" sz="1300" dirty="0">
+                <a:solidFill>
+                  <a:srgbClr val="3D3A36"/>
+                </a:solidFill>
+                <a:latin typeface="Calibri" pitchFamily="34" charset="0"/>
+                <a:ea typeface="Calibri" pitchFamily="34" charset="-122"/>
+                <a:cs typeface="Calibri" pitchFamily="34" charset="-120"/>
+              </a:rPr>
+              <a:t>I can identify the value of each digit in a number</a:t>
+            </a:r>
+            <a:endParaRPr lang="en-US" sz="1300" dirty="0"/>
+          </a:p>
+        </p:txBody>
+      </p:sp>
+      <p:sp>
+        <p:nvSpPr>
+          <p:cNvPr id="9" name="Shape 7"/>
+          <p:cNvSpPr/>
+          <p:nvPr/>
+        </p:nvSpPr>
+        <p:spPr>
+          <a:xfrm>
+            <a:off x="731520" y="1554480"/>
+            <a:ext cx="7680960" cy="438912"/>
+          </a:xfrm>
+          <a:prstGeom prst="rect">
+            <a:avLst/>
+          </a:prstGeom>
+          <a:solidFill>
+            <a:srgbClr val="F8F6F3"/>
+          </a:solidFill>
+          <a:ln/>
+        </p:spPr>
+      </p:sp>
+      <p:sp>
+        <p:nvSpPr>
+          <p:cNvPr id="10" name="Text 8"/>
+          <p:cNvSpPr/>
+          <p:nvPr/>
+        </p:nvSpPr>
+        <p:spPr>
+          <a:xfrm>
+            <a:off x="868680" y="1554480"/>
+            <a:ext cx="320040" cy="438912"/>
+          </a:xfrm>
+          <a:prstGeom prst="rect">
+            <a:avLst/>
+          </a:prstGeom>
+          <a:noFill/>
+          <a:ln/>
+        </p:spPr>
+        <p:txBody>
+          <a:bodyPr wrap="square" rtlCol="0" anchor="ctr"/>
+          <a:lstStyle/>
+          <a:p>
+            <a:pPr indent="0" marL="0">
+              <a:buNone/>
+            </a:pPr>
+            <a:r>
+              <a:rPr lang="en-US" sz="1400" dirty="0">
+                <a:solidFill>
+                  <a:srgbClr val="2A9D8F"/>
+                </a:solidFill>
+              </a:rPr>
+              <a:t>☐</a:t>
+            </a:r>
+            <a:endParaRPr lang="en-US" sz="1400" dirty="0"/>
+          </a:p>
+        </p:txBody>
+      </p:sp>
+      <p:sp>
+        <p:nvSpPr>
+          <p:cNvPr id="11" name="Text 9"/>
+          <p:cNvSpPr/>
+          <p:nvPr/>
+        </p:nvSpPr>
+        <p:spPr>
+          <a:xfrm>
+            <a:off x="1234440" y="1554480"/>
+            <a:ext cx="6949440" cy="438912"/>
+          </a:xfrm>
+          <a:prstGeom prst="rect">
+            <a:avLst/>
+          </a:prstGeom>
+          <a:noFill/>
+          <a:ln/>
+        </p:spPr>
+        <p:txBody>
+          <a:bodyPr wrap="square" rtlCol="0" anchor="ctr"/>
+          <a:lstStyle/>
+          <a:p>
+            <a:pPr indent="0" marL="0">
+              <a:buNone/>
+            </a:pPr>
+            <a:r>
+              <a:rPr lang="en-US" sz="1300" dirty="0">
+                <a:solidFill>
+                  <a:srgbClr val="3D3A36"/>
+                </a:solidFill>
+                <a:latin typeface="Calibri" pitchFamily="34" charset="0"/>
+                <a:ea typeface="Calibri" pitchFamily="34" charset="-122"/>
+                <a:cs typeface="Calibri" pitchFamily="34" charset="-120"/>
+              </a:rPr>
+              <a:t>I can read and write numbers up to millions</a:t>
+            </a:r>
+            <a:endParaRPr lang="en-US" sz="1300" dirty="0"/>
+          </a:p>
+        </p:txBody>
+      </p:sp>
+      <p:sp>
+        <p:nvSpPr>
+          <p:cNvPr id="12" name="Shape 10"/>
+          <p:cNvSpPr/>
+          <p:nvPr/>
+        </p:nvSpPr>
+        <p:spPr>
+          <a:xfrm>
+            <a:off x="731520" y="2057400"/>
+            <a:ext cx="7680960" cy="438912"/>
+          </a:xfrm>
+          <a:prstGeom prst="rect">
+            <a:avLst/>
+          </a:prstGeom>
+          <a:solidFill>
+            <a:srgbClr val="FFFFFF"/>
+          </a:solidFill>
+          <a:ln/>
+        </p:spPr>
+      </p:sp>
+      <p:sp>
+        <p:nvSpPr>
+          <p:cNvPr id="13" name="Text 11"/>
+          <p:cNvSpPr/>
+          <p:nvPr/>
+        </p:nvSpPr>
+        <p:spPr>
+          <a:xfrm>
+            <a:off x="868680" y="2057400"/>
+            <a:ext cx="320040" cy="438912"/>
+          </a:xfrm>
+          <a:prstGeom prst="rect">
+            <a:avLst/>
+          </a:prstGeom>
+          <a:noFill/>
+          <a:ln/>
+        </p:spPr>
+        <p:txBody>
+          <a:bodyPr wrap="square" rtlCol="0" anchor="ctr"/>
+          <a:lstStyle/>
+          <a:p>
+            <a:pPr indent="0" marL="0">
+              <a:buNone/>
+            </a:pPr>
+            <a:r>
+              <a:rPr lang="en-US" sz="1400" dirty="0">
+                <a:solidFill>
+                  <a:srgbClr val="2A9D8F"/>
+                </a:solidFill>
+              </a:rPr>
+              <a:t>☐</a:t>
+            </a:r>
+            <a:endParaRPr lang="en-US" sz="1400" dirty="0"/>
+          </a:p>
+        </p:txBody>
+      </p:sp>
+      <p:sp>
+        <p:nvSpPr>
+          <p:cNvPr id="14" name="Text 12"/>
+          <p:cNvSpPr/>
+          <p:nvPr/>
+        </p:nvSpPr>
+        <p:spPr>
+          <a:xfrm>
+            <a:off x="1234440" y="2057400"/>
+            <a:ext cx="6949440" cy="438912"/>
+          </a:xfrm>
+          <a:prstGeom prst="rect">
+            <a:avLst/>
+          </a:prstGeom>
+          <a:noFill/>
+          <a:ln/>
+        </p:spPr>
+        <p:txBody>
+          <a:bodyPr wrap="square" rtlCol="0" anchor="ctr"/>
+          <a:lstStyle/>
+          <a:p>
+            <a:pPr indent="0" marL="0">
+              <a:buNone/>
+            </a:pPr>
+            <a:r>
+              <a:rPr lang="en-US" sz="1300" dirty="0">
+                <a:solidFill>
+                  <a:srgbClr val="3D3A36"/>
+                </a:solidFill>
+                <a:latin typeface="Calibri" pitchFamily="34" charset="0"/>
+                <a:ea typeface="Calibri" pitchFamily="34" charset="-122"/>
+                <a:cs typeface="Calibri" pitchFamily="34" charset="-120"/>
+              </a:rPr>
+              <a:t>I can compare numbers using &lt; &gt; =</a:t>
+            </a:r>
+            <a:endParaRPr lang="en-US" sz="1300" dirty="0"/>
+          </a:p>
+        </p:txBody>
+      </p:sp>
+      <p:sp>
+        <p:nvSpPr>
+          <p:cNvPr id="15" name="Shape 13"/>
+          <p:cNvSpPr/>
+          <p:nvPr/>
+        </p:nvSpPr>
+        <p:spPr>
+          <a:xfrm>
+            <a:off x="731520" y="2560320"/>
+            <a:ext cx="7680960" cy="438912"/>
+          </a:xfrm>
+          <a:prstGeom prst="rect">
+            <a:avLst/>
+          </a:prstGeom>
+          <a:solidFill>
+            <a:srgbClr val="F8F6F3"/>
+          </a:solidFill>
+          <a:ln/>
+        </p:spPr>
+      </p:sp>
+      <p:sp>
+        <p:nvSpPr>
+          <p:cNvPr id="16" name="Text 14"/>
+          <p:cNvSpPr/>
+          <p:nvPr/>
+        </p:nvSpPr>
+        <p:spPr>
+          <a:xfrm>
+            <a:off x="868680" y="2560320"/>
+            <a:ext cx="320040" cy="438912"/>
+          </a:xfrm>
+          <a:prstGeom prst="rect">
+            <a:avLst/>
+          </a:prstGeom>
+          <a:noFill/>
+          <a:ln/>
+        </p:spPr>
+        <p:txBody>
+          <a:bodyPr wrap="square" rtlCol="0" anchor="ctr"/>
+          <a:lstStyle/>
+          <a:p>
+            <a:pPr indent="0" marL="0">
+              <a:buNone/>
+            </a:pPr>
+            <a:r>
+              <a:rPr lang="en-US" sz="1400" dirty="0">
+                <a:solidFill>
+                  <a:srgbClr val="2A9D8F"/>
+                </a:solidFill>
+              </a:rPr>
+              <a:t>☐</a:t>
+            </a:r>
+            <a:endParaRPr lang="en-US" sz="1400" dirty="0"/>
+          </a:p>
+        </p:txBody>
+      </p:sp>
+      <p:sp>
+        <p:nvSpPr>
+          <p:cNvPr id="17" name="Text 15"/>
+          <p:cNvSpPr/>
+          <p:nvPr/>
+        </p:nvSpPr>
+        <p:spPr>
+          <a:xfrm>
+            <a:off x="1234440" y="2560320"/>
+            <a:ext cx="6949440" cy="438912"/>
+          </a:xfrm>
+          <a:prstGeom prst="rect">
+            <a:avLst/>
+          </a:prstGeom>
+          <a:noFill/>
+          <a:ln/>
+        </p:spPr>
+        <p:txBody>
+          <a:bodyPr wrap="square" rtlCol="0" anchor="ctr"/>
+          <a:lstStyle/>
+          <a:p>
+            <a:pPr indent="0" marL="0">
+              <a:buNone/>
+            </a:pPr>
+            <a:r>
+              <a:rPr lang="en-US" sz="1300" dirty="0">
+                <a:solidFill>
+                  <a:srgbClr val="3D3A36"/>
+                </a:solidFill>
+                <a:latin typeface="Calibri" pitchFamily="34" charset="0"/>
+                <a:ea typeface="Calibri" pitchFamily="34" charset="-122"/>
+                <a:cs typeface="Calibri" pitchFamily="34" charset="-120"/>
+              </a:rPr>
+              <a:t>I can order numbers in ascending and descending order</a:t>
+            </a:r>
+            <a:endParaRPr lang="en-US" sz="1300" dirty="0"/>
+          </a:p>
+        </p:txBody>
+      </p:sp>
+      <p:sp>
+        <p:nvSpPr>
+          <p:cNvPr id="18" name="Shape 16"/>
+          <p:cNvSpPr/>
+          <p:nvPr/>
+        </p:nvSpPr>
+        <p:spPr>
+          <a:xfrm>
+            <a:off x="731520" y="3063240"/>
+            <a:ext cx="7680960" cy="438912"/>
+          </a:xfrm>
+          <a:prstGeom prst="rect">
+            <a:avLst/>
+          </a:prstGeom>
+          <a:solidFill>
+            <a:srgbClr val="FFFFFF"/>
+          </a:solidFill>
+          <a:ln/>
+        </p:spPr>
+      </p:sp>
+      <p:sp>
+        <p:nvSpPr>
+          <p:cNvPr id="19" name="Text 17"/>
+          <p:cNvSpPr/>
+          <p:nvPr/>
+        </p:nvSpPr>
+        <p:spPr>
+          <a:xfrm>
+            <a:off x="868680" y="3063240"/>
+            <a:ext cx="320040" cy="438912"/>
+          </a:xfrm>
+          <a:prstGeom prst="rect">
+            <a:avLst/>
+          </a:prstGeom>
+          <a:noFill/>
+          <a:ln/>
+        </p:spPr>
+        <p:txBody>
+          <a:bodyPr wrap="square" rtlCol="0" anchor="ctr"/>
+          <a:lstStyle/>
+          <a:p>
+            <a:pPr indent="0" marL="0">
+              <a:buNone/>
+            </a:pPr>
+            <a:r>
+              <a:rPr lang="en-US" sz="1400" dirty="0">
+                <a:solidFill>
+                  <a:srgbClr val="2A9D8F"/>
+                </a:solidFill>
+              </a:rPr>
+              <a:t>☐</a:t>
+            </a:r>
+            <a:endParaRPr lang="en-US" sz="1400" dirty="0"/>
+          </a:p>
+        </p:txBody>
+      </p:sp>
+      <p:sp>
+        <p:nvSpPr>
+          <p:cNvPr id="20" name="Text 18"/>
+          <p:cNvSpPr/>
+          <p:nvPr/>
+        </p:nvSpPr>
+        <p:spPr>
+          <a:xfrm>
+            <a:off x="1234440" y="3063240"/>
+            <a:ext cx="6949440" cy="438912"/>
+          </a:xfrm>
+          <a:prstGeom prst="rect">
+            <a:avLst/>
+          </a:prstGeom>
+          <a:noFill/>
+          <a:ln/>
+        </p:spPr>
+        <p:txBody>
+          <a:bodyPr wrap="square" rtlCol="0" anchor="ctr"/>
+          <a:lstStyle/>
+          <a:p>
+            <a:pPr indent="0" marL="0">
+              <a:buNone/>
+            </a:pPr>
+            <a:r>
+              <a:rPr lang="en-US" sz="1300" dirty="0">
+                <a:solidFill>
+                  <a:srgbClr val="3D3A36"/>
+                </a:solidFill>
+                <a:latin typeface="Calibri" pitchFamily="34" charset="0"/>
+                <a:ea typeface="Calibri" pitchFamily="34" charset="-122"/>
+                <a:cs typeface="Calibri" pitchFamily="34" charset="-120"/>
+              </a:rPr>
+              <a:t>I understand that each place is 10× bigger than the one to its right</a:t>
+            </a:r>
+            <a:endParaRPr lang="en-US" sz="1300" dirty="0"/>
+          </a:p>
+        </p:txBody>
+      </p:sp>
+      <p:sp>
+        <p:nvSpPr>
+          <p:cNvPr id="21" name="Shape 19"/>
+          <p:cNvSpPr/>
+          <p:nvPr/>
+        </p:nvSpPr>
+        <p:spPr>
+          <a:xfrm>
+            <a:off x="731520" y="3749040"/>
+            <a:ext cx="7680960" cy="594360"/>
+          </a:xfrm>
+          <a:prstGeom prst="rect">
+            <a:avLst/>
+          </a:prstGeom>
+          <a:solidFill>
+            <a:srgbClr val="E8F5F3"/>
+          </a:solidFill>
+          <a:ln/>
+          <a:effectLst>
+            <a:outerShdw sx="100000" sy="100000" kx="0" ky="0" algn="bl" rotWithShape="0" blurRad="50800" dist="25400" dir="8100000">
+              <a:srgbClr val="000000">
+                <a:alpha val="10000"/>
+              </a:srgbClr>
+            </a:outerShdw>
+          </a:effectLst>
+        </p:spPr>
+      </p:sp>
+      <p:sp>
+        <p:nvSpPr>
+          <p:cNvPr id="22" name="Text 20"/>
+          <p:cNvSpPr/>
+          <p:nvPr/>
+        </p:nvSpPr>
+        <p:spPr>
+          <a:xfrm>
+            <a:off x="914400" y="3749040"/>
+            <a:ext cx="7315200" cy="594360"/>
+          </a:xfrm>
+          <a:prstGeom prst="rect">
+            <a:avLst/>
+          </a:prstGeom>
+          <a:noFill/>
+          <a:ln/>
+        </p:spPr>
+        <p:txBody>
+          <a:bodyPr wrap="square" rtlCol="0" anchor="ctr"/>
+          <a:lstStyle/>
+          <a:p>
+            <a:pPr indent="0" marL="0">
+              <a:buNone/>
+            </a:pPr>
+            <a:r>
+              <a:rPr lang="en-US" sz="1200" b="1" dirty="0">
+                <a:solidFill>
+                  <a:srgbClr val="2A9D8F"/>
+                </a:solidFill>
+                <a:latin typeface="Calibri" pitchFamily="34" charset="0"/>
+                <a:ea typeface="Calibri" pitchFamily="34" charset="-122"/>
+                <a:cs typeface="Calibri" pitchFamily="34" charset="-120"/>
+              </a:rPr>
+              <a:t>Key Idea: </a:t>
+            </a:r>
+            <a:pPr indent="0" marL="0">
+              <a:buNone/>
+            </a:pPr>
+            <a:r>
+              <a:rPr lang="en-US" sz="1200" i="1" dirty="0">
+                <a:solidFill>
+                  <a:srgbClr val="3D3A36"/>
+                </a:solidFill>
+                <a:latin typeface="Calibri" pitchFamily="34" charset="0"/>
+                <a:ea typeface="Calibri" pitchFamily="34" charset="-122"/>
+                <a:cs typeface="Calibri" pitchFamily="34" charset="-120"/>
+              </a:rPr>
+              <a:t>Place value is the foundation of all number work in mathematics.</a:t>
+            </a:r>
+            <a:endParaRPr lang="en-US" sz="1200" dirty="0"/>
+          </a:p>
+        </p:txBody>
+      </p:sp>
+    </p:spTree>
+  </p:cSld>
+  <p:clrMapOvr>
+    <a:masterClrMapping/>
+  </p:clrMapOvr>
+</p:sld>
+</file>
+
+<file path=ppt/slides/slide8.xml><?xml version="1.0" encoding="utf-8"?>
+<p:sld xmlns:a="http://schemas.openxmlformats.org/drawingml/2006/main" xmlns:r="http://schemas.openxmlformats.org/officeDocument/2006/relationships" xmlns:p="http://schemas.openxmlformats.org/presentationml/2006/main">
+  <p:cSld name="Slide 8">
+    <p:spTree>
+      <p:nvGrpSpPr>
+        <p:cNvPr id="1" name=""/>
+        <p:cNvGrpSpPr/>
+        <p:nvPr/>
+      </p:nvGrpSpPr>
+      <p:grpSpPr>
+        <a:xfrm>
+          <a:off x="0" y="0"/>
+          <a:ext cx="0" cy="0"/>
+          <a:chOff x="0" y="0"/>
+          <a:chExt cx="0" cy="0"/>
+        </a:xfrm>
+      </p:grpSpPr>
+      <p:sp>
+        <p:nvSpPr>
+          <p:cNvPr id="2" name="Shape 0"/>
+          <p:cNvSpPr/>
+          <p:nvPr/>
+        </p:nvSpPr>
+        <p:spPr>
+          <a:xfrm>
+            <a:off x="0" y="0"/>
+            <a:ext cx="9144000" cy="5143500"/>
+          </a:xfrm>
+          <a:prstGeom prst="rect">
+            <a:avLst/>
+          </a:prstGeom>
+          <a:solidFill>
+            <a:srgbClr val="1B2A4A"/>
+          </a:solidFill>
+          <a:ln/>
+        </p:spPr>
+      </p:sp>
+      <p:sp>
+        <p:nvSpPr>
+          <p:cNvPr id="3" name="Shape 1"/>
+          <p:cNvSpPr/>
+          <p:nvPr/>
+        </p:nvSpPr>
+        <p:spPr>
+          <a:xfrm>
+            <a:off x="0" y="4777740"/>
+            <a:ext cx="9144000" cy="365760"/>
+          </a:xfrm>
+          <a:prstGeom prst="rect">
+            <a:avLst/>
+          </a:prstGeom>
+          <a:solidFill>
+            <a:srgbClr val="2A9D8F"/>
+          </a:solidFill>
+          <a:ln/>
+        </p:spPr>
+      </p:sp>
+      <p:sp>
+        <p:nvSpPr>
+          <p:cNvPr id="4" name="Shape 2"/>
+          <p:cNvSpPr/>
+          <p:nvPr/>
+        </p:nvSpPr>
+        <p:spPr>
+          <a:xfrm>
+            <a:off x="-914400" y="-914400"/>
+            <a:ext cx="3657600" cy="3657600"/>
+          </a:xfrm>
+          <a:prstGeom prst="ellipse">
+            <a:avLst/>
+          </a:prstGeom>
+          <a:solidFill>
+            <a:srgbClr val="2A9D8F">
+              <a:alpha val="10000"/>
+            </a:srgbClr>
+          </a:solidFill>
+          <a:ln/>
+        </p:spPr>
+      </p:sp>
+      <p:sp>
+        <p:nvSpPr>
+          <p:cNvPr id="5" name="Text 3"/>
+          <p:cNvSpPr/>
+          <p:nvPr/>
+        </p:nvSpPr>
+        <p:spPr>
+          <a:xfrm>
+            <a:off x="731520" y="1463040"/>
+            <a:ext cx="7680960" cy="822960"/>
+          </a:xfrm>
+          <a:prstGeom prst="rect">
+            <a:avLst/>
+          </a:prstGeom>
+          <a:noFill/>
+          <a:ln/>
+        </p:spPr>
+        <p:txBody>
+          <a:bodyPr wrap="square" rtlCol="0" anchor="ctr"/>
+          <a:lstStyle/>
+          <a:p>
+            <a:pPr algn="ctr" indent="0" marL="0">
+              <a:buNone/>
+            </a:pPr>
+            <a:r>
+              <a:rPr lang="en-US" sz="3400" b="1" dirty="0">
                 <a:solidFill>
                   <a:srgbClr val="FFFFFF"/>
                 </a:solidFill>
@@ -2416,149 +6446,22 @@
                 <a:ea typeface="Georgia" pitchFamily="34" charset="-122"/>
                 <a:cs typeface="Georgia" pitchFamily="34" charset="-120"/>
               </a:rPr>
-              <a:t>Key Takeaways</a:t>
-            </a:r>
-            <a:endParaRPr lang="en-US" sz="3200" dirty="0"/>
-          </a:p>
-        </p:txBody>
-      </p:sp>
-      <p:sp>
-        <p:nvSpPr>
-          <p:cNvPr id="4" name="Text 2"/>
-          <p:cNvSpPr/>
-          <p:nvPr/>
-        </p:nvSpPr>
-        <p:spPr>
-          <a:xfrm>
-            <a:off x="731520" y="1463040"/>
-            <a:ext cx="7772400" cy="3200400"/>
-          </a:xfrm>
-          <a:prstGeom prst="rect">
-            <a:avLst/>
-          </a:prstGeom>
-          <a:noFill/>
-          <a:ln/>
-        </p:spPr>
-        <p:txBody>
-          <a:bodyPr wrap="square" rtlCol="0" anchor="t"/>
-          <a:lstStyle/>
-          <a:p>
-            <a:pPr marL="342900" indent="-342900">
-              <a:spcAft>
-                <a:spcPts val="1000"/>
-              </a:spcAft>
-              <a:buSzPct val="100000"/>
-              <a:buChar char="•"/>
-            </a:pPr>
-            <a:r>
-              <a:rPr lang="en-US" sz="1500" dirty="0">
-                <a:solidFill>
-                  <a:srgbClr val="CADCFC"/>
-                </a:solidFill>
-                <a:latin typeface="Calibri" pitchFamily="34" charset="0"/>
-                <a:ea typeface="Calibri" pitchFamily="34" charset="-122"/>
-                <a:cs typeface="Calibri" pitchFamily="34" charset="-120"/>
-              </a:rPr>
-              <a:t>Every digit's value depends on its position (place value)</a:t>
-            </a:r>
-            <a:endParaRPr lang="en-US" sz="1500" dirty="0"/>
-          </a:p>
-          <a:p>
-            <a:pPr marL="342900" indent="-342900">
-              <a:spcAft>
-                <a:spcPts val="1000"/>
-              </a:spcAft>
-              <a:buSzPct val="100000"/>
-              <a:buChar char="•"/>
-            </a:pPr>
-            <a:r>
-              <a:rPr lang="en-US" sz="1500" dirty="0">
-                <a:solidFill>
-                  <a:srgbClr val="CADCFC"/>
-                </a:solidFill>
-                <a:latin typeface="Calibri" pitchFamily="34" charset="0"/>
-                <a:ea typeface="Calibri" pitchFamily="34" charset="-122"/>
-                <a:cs typeface="Calibri" pitchFamily="34" charset="-120"/>
-              </a:rPr>
-              <a:t>Commas separate groups of three digits in large numbers</a:t>
-            </a:r>
-            <a:endParaRPr lang="en-US" sz="1500" dirty="0"/>
-          </a:p>
-          <a:p>
-            <a:pPr marL="342900" indent="-342900">
-              <a:spcAft>
-                <a:spcPts val="1000"/>
-              </a:spcAft>
-              <a:buSzPct val="100000"/>
-              <a:buChar char="•"/>
-            </a:pPr>
-            <a:r>
-              <a:rPr lang="en-US" sz="1500" dirty="0">
-                <a:solidFill>
-                  <a:srgbClr val="CADCFC"/>
-                </a:solidFill>
-                <a:latin typeface="Calibri" pitchFamily="34" charset="0"/>
-                <a:ea typeface="Calibri" pitchFamily="34" charset="-122"/>
-                <a:cs typeface="Calibri" pitchFamily="34" charset="-120"/>
-              </a:rPr>
-              <a:t>Compare numbers from left to right, highest place value first</a:t>
-            </a:r>
-            <a:endParaRPr lang="en-US" sz="1500" dirty="0"/>
-          </a:p>
-          <a:p>
-            <a:pPr marL="342900" indent="-342900">
-              <a:spcAft>
-                <a:spcPts val="1000"/>
-              </a:spcAft>
-              <a:buSzPct val="100000"/>
-              <a:buChar char="•"/>
-            </a:pPr>
-            <a:r>
-              <a:rPr lang="en-US" sz="1500" dirty="0">
-                <a:solidFill>
-                  <a:srgbClr val="CADCFC"/>
-                </a:solidFill>
-                <a:latin typeface="Calibri" pitchFamily="34" charset="0"/>
-                <a:ea typeface="Calibri" pitchFamily="34" charset="-122"/>
-                <a:cs typeface="Calibri" pitchFamily="34" charset="-120"/>
-              </a:rPr>
-              <a:t>Decimals: tenths, hundredths, thousandths extend right of the decimal point</a:t>
-            </a:r>
-            <a:endParaRPr lang="en-US" sz="1500" dirty="0"/>
-          </a:p>
-          <a:p>
-            <a:pPr marL="342900" indent="-342900">
-              <a:spcAft>
-                <a:spcPts val="1000"/>
-              </a:spcAft>
-              <a:buSzPct val="100000"/>
-              <a:buChar char="•"/>
-            </a:pPr>
-            <a:r>
-              <a:rPr lang="en-US" sz="1500" dirty="0">
-                <a:solidFill>
-                  <a:srgbClr val="CADCFC"/>
-                </a:solidFill>
-                <a:latin typeface="Calibri" pitchFamily="34" charset="0"/>
-                <a:ea typeface="Calibri" pitchFamily="34" charset="-122"/>
-                <a:cs typeface="Calibri" pitchFamily="34" charset="-120"/>
-              </a:rPr>
-              <a:t>Use &lt;, &gt;, = to compare and order numbers</a:t>
-            </a:r>
-            <a:endParaRPr lang="en-US" sz="1500" dirty="0"/>
-          </a:p>
-        </p:txBody>
-      </p:sp>
-      <p:sp>
-        <p:nvSpPr>
-          <p:cNvPr id="5" name="Text 3"/>
-          <p:cNvSpPr/>
-          <p:nvPr/>
-        </p:nvSpPr>
-        <p:spPr>
-          <a:xfrm>
-            <a:off x="731520" y="4572000"/>
-            <a:ext cx="7772400" cy="365760"/>
+              <a:t>Review &amp; Practise</a:t>
+            </a:r>
+            <a:endParaRPr lang="en-US" sz="3400" dirty="0"/>
+          </a:p>
+        </p:txBody>
+      </p:sp>
+      <p:sp>
+        <p:nvSpPr>
+          <p:cNvPr id="6" name="Text 4"/>
+          <p:cNvSpPr/>
+          <p:nvPr/>
+        </p:nvSpPr>
+        <p:spPr>
+          <a:xfrm>
+            <a:off x="731520" y="2468880"/>
+            <a:ext cx="7680960" cy="457200"/>
           </a:xfrm>
           <a:prstGeom prst="rect">
             <a:avLst/>
@@ -2570,13 +6473,13 @@
           <a:bodyPr wrap="square" rtlCol="0" anchor="ctr"/>
           <a:lstStyle/>
           <a:p>
-            <a:pPr indent="0" marL="0">
+            <a:pPr algn="ctr" indent="0" marL="0">
               <a:buNone/>
             </a:pPr>
             <a:r>
-              <a:rPr lang="en-US" sz="1100" dirty="0">
+              <a:rPr lang="en-US" sz="1800" dirty="0">
                 <a:solidFill>
-                  <a:srgbClr val="E9C46A"/>
+                  <a:srgbClr val="2A9D8F"/>
                 </a:solidFill>
                 <a:latin typeface="Calibri" pitchFamily="34" charset="0"/>
                 <a:ea typeface="Calibri" pitchFamily="34" charset="-122"/>
@@ -2584,7 +6487,46 @@
               </a:rPr>
               <a:t>mrzocchi.com</a:t>
             </a:r>
-            <a:endParaRPr lang="en-US" sz="1100" dirty="0"/>
+            <a:endParaRPr lang="en-US" sz="1800" dirty="0"/>
+          </a:p>
+        </p:txBody>
+      </p:sp>
+      <p:sp>
+        <p:nvSpPr>
+          <p:cNvPr id="7" name="Text 5"/>
+          <p:cNvSpPr/>
+          <p:nvPr/>
+        </p:nvSpPr>
+        <p:spPr>
+          <a:xfrm>
+            <a:off x="731520" y="3108960"/>
+            <a:ext cx="7680960" cy="457200"/>
+          </a:xfrm>
+          <a:prstGeom prst="rect">
+            <a:avLst/>
+          </a:prstGeom>
+          <a:noFill/>
+          <a:ln/>
+        </p:spPr>
+        <p:txBody>
+          <a:bodyPr wrap="square" rtlCol="0" anchor="ctr"/>
+          <a:lstStyle/>
+          <a:p>
+            <a:pPr algn="ctr" indent="0" marL="0">
+              <a:buNone/>
+            </a:pPr>
+            <a:r>
+              <a:rPr lang="en-US" sz="1300" dirty="0">
+                <a:solidFill>
+                  <a:srgbClr val="9B9690"/>
+                </a:solidFill>
+                <a:latin typeface="Calibri" pitchFamily="34" charset="0"/>
+                <a:ea typeface="Calibri" pitchFamily="34" charset="-122"/>
+                <a:cs typeface="Calibri" pitchFamily="34" charset="-120"/>
+              </a:rPr>
+              <a:t>Use the Self-Quiz, Review Games, and Practice Builder to test yourself.</a:t>
+            </a:r>
+            <a:endParaRPr lang="en-US" sz="1300" dirty="0"/>
           </a:p>
         </p:txBody>
       </p:sp>
